--- a/exports/pptx/lessons/middle-module-06-moon-phases-tithi/day-02-paksha.pptx
+++ b/exports/pptx/lessons/middle-module-06-moon-phases-tithi/day-02-paksha.pptx
@@ -17,9 +17,17 @@
     <p:sldId id="265" r:id="rId11"/>
     <p:sldId id="266" r:id="rId12"/>
     <p:sldId id="267" r:id="rId13"/>
+    <p:sldId id="268" r:id="rId14"/>
+    <p:sldId id="269" r:id="rId15"/>
+    <p:sldId id="270" r:id="rId16"/>
+    <p:sldId id="271" r:id="rId17"/>
+    <p:sldId id="272" r:id="rId18"/>
+    <p:sldId id="273" r:id="rId19"/>
+    <p:sldId id="274" r:id="rId20"/>
+    <p:sldId id="275" r:id="rId21"/>
   </p:sldIdLst>
   <p:notesMasterIdLst>
-    <p:notesMasterId r:id="rId14"/>
+    <p:notesMasterId r:id="rId22"/>
   </p:notesMasterIdLst>
   <p:sldSz cx="9144000" cy="5143500"/>
   <p:notesSz cx="5143500" cy="9144000"/>
@@ -819,6 +827,622 @@
 </p:notes>
 </file>
 
+<file path=ppt/notesSlides/notesSlide13.xml><?xml version="1.0" encoding="utf-8"?>
+<p:notes xmlns:a="http://schemas.openxmlformats.org/drawingml/2006/main" xmlns:r="http://schemas.openxmlformats.org/officeDocument/2006/relationships" xmlns:p="http://schemas.openxmlformats.org/presentationml/2006/main">
+  <p:cSld>
+    <p:spTree>
+      <p:nvGrpSpPr>
+        <p:cNvPr id="1" name=""/>
+        <p:cNvGrpSpPr/>
+        <p:nvPr/>
+      </p:nvGrpSpPr>
+      <p:grpSpPr>
+        <a:xfrm>
+          <a:off x="0" y="0"/>
+          <a:ext cx="0" cy="0"/>
+          <a:chOff x="0" y="0"/>
+          <a:chExt cx="0" cy="0"/>
+        </a:xfrm>
+      </p:grpSpPr>
+      <p:sp>
+        <p:nvSpPr>
+          <p:cNvPr id="2" name="Slide Image Placeholder 1"/>
+          <p:cNvSpPr>
+            <a:spLocks noGrp="1" noRot="1" noChangeAspect="1"/>
+          </p:cNvSpPr>
+          <p:nvPr>
+            <p:ph type="sldImg"/>
+          </p:nvPr>
+        </p:nvSpPr>
+        <p:spPr/>
+      </p:sp>
+      <p:sp>
+        <p:nvSpPr>
+          <p:cNvPr id="3" name="Notes Placeholder 2"/>
+          <p:cNvSpPr>
+            <a:spLocks noGrp="1"/>
+          </p:cNvSpPr>
+          <p:nvPr>
+            <p:ph type="body" idx="1"/>
+          </p:nvPr>
+        </p:nvSpPr>
+        <p:spPr/>
+        <p:txBody>
+          <a:bodyPr/>
+          <a:lstStyle/>
+          <a:p>
+            <a:r>
+              <a:rPr lang="en-US" dirty="0"/>
+              <a:t/>
+            </a:r>
+            <a:endParaRPr lang="en-US" dirty="0"/>
+          </a:p>
+        </p:txBody>
+      </p:sp>
+      <p:sp>
+        <p:nvSpPr>
+          <p:cNvPr id="4" name="Slide Number Placeholder 3"/>
+          <p:cNvSpPr>
+            <a:spLocks noGrp="1"/>
+          </p:cNvSpPr>
+          <p:nvPr>
+            <p:ph type="sldNum" sz="quarter" idx="10"/>
+          </p:nvPr>
+        </p:nvSpPr>
+        <p:spPr/>
+        <p:txBody>
+          <a:bodyPr/>
+          <a:lstStyle/>
+          <a:p>
+            <a:fld id="{F7021451-1387-4CA6-816F-3879F97B5CBC}" type="slidenum">
+              <a:rPr lang="en-US"/>
+              <a:t>13</a:t>
+            </a:fld>
+            <a:endParaRPr lang="en-US"/>
+          </a:p>
+        </p:txBody>
+      </p:sp>
+    </p:spTree>
+    <p:extLst>
+      <p:ext uri="{BB962C8B-B14F-4D97-AF65-F5344CB8AC3E}">
+        <p14:creationId xmlns:p14="http://schemas.microsoft.com/office/powerpoint/2010/main" val="1024086991"/>
+      </p:ext>
+    </p:extLst>
+  </p:cSld>
+  <p:clrMapOvr>
+    <a:masterClrMapping/>
+  </p:clrMapOvr>
+</p:notes>
+</file>
+
+<file path=ppt/notesSlides/notesSlide14.xml><?xml version="1.0" encoding="utf-8"?>
+<p:notes xmlns:a="http://schemas.openxmlformats.org/drawingml/2006/main" xmlns:r="http://schemas.openxmlformats.org/officeDocument/2006/relationships" xmlns:p="http://schemas.openxmlformats.org/presentationml/2006/main">
+  <p:cSld>
+    <p:spTree>
+      <p:nvGrpSpPr>
+        <p:cNvPr id="1" name=""/>
+        <p:cNvGrpSpPr/>
+        <p:nvPr/>
+      </p:nvGrpSpPr>
+      <p:grpSpPr>
+        <a:xfrm>
+          <a:off x="0" y="0"/>
+          <a:ext cx="0" cy="0"/>
+          <a:chOff x="0" y="0"/>
+          <a:chExt cx="0" cy="0"/>
+        </a:xfrm>
+      </p:grpSpPr>
+      <p:sp>
+        <p:nvSpPr>
+          <p:cNvPr id="2" name="Slide Image Placeholder 1"/>
+          <p:cNvSpPr>
+            <a:spLocks noGrp="1" noRot="1" noChangeAspect="1"/>
+          </p:cNvSpPr>
+          <p:nvPr>
+            <p:ph type="sldImg"/>
+          </p:nvPr>
+        </p:nvSpPr>
+        <p:spPr/>
+      </p:sp>
+      <p:sp>
+        <p:nvSpPr>
+          <p:cNvPr id="3" name="Notes Placeholder 2"/>
+          <p:cNvSpPr>
+            <a:spLocks noGrp="1"/>
+          </p:cNvSpPr>
+          <p:nvPr>
+            <p:ph type="body" idx="1"/>
+          </p:nvPr>
+        </p:nvSpPr>
+        <p:spPr/>
+        <p:txBody>
+          <a:bodyPr/>
+          <a:lstStyle/>
+          <a:p>
+            <a:r>
+              <a:rPr lang="en-US" dirty="0"/>
+              <a:t/>
+            </a:r>
+            <a:endParaRPr lang="en-US" dirty="0"/>
+          </a:p>
+        </p:txBody>
+      </p:sp>
+      <p:sp>
+        <p:nvSpPr>
+          <p:cNvPr id="4" name="Slide Number Placeholder 3"/>
+          <p:cNvSpPr>
+            <a:spLocks noGrp="1"/>
+          </p:cNvSpPr>
+          <p:nvPr>
+            <p:ph type="sldNum" sz="quarter" idx="10"/>
+          </p:nvPr>
+        </p:nvSpPr>
+        <p:spPr/>
+        <p:txBody>
+          <a:bodyPr/>
+          <a:lstStyle/>
+          <a:p>
+            <a:fld id="{F7021451-1387-4CA6-816F-3879F97B5CBC}" type="slidenum">
+              <a:rPr lang="en-US"/>
+              <a:t>14</a:t>
+            </a:fld>
+            <a:endParaRPr lang="en-US"/>
+          </a:p>
+        </p:txBody>
+      </p:sp>
+    </p:spTree>
+    <p:extLst>
+      <p:ext uri="{BB962C8B-B14F-4D97-AF65-F5344CB8AC3E}">
+        <p14:creationId xmlns:p14="http://schemas.microsoft.com/office/powerpoint/2010/main" val="1024086991"/>
+      </p:ext>
+    </p:extLst>
+  </p:cSld>
+  <p:clrMapOvr>
+    <a:masterClrMapping/>
+  </p:clrMapOvr>
+</p:notes>
+</file>
+
+<file path=ppt/notesSlides/notesSlide15.xml><?xml version="1.0" encoding="utf-8"?>
+<p:notes xmlns:a="http://schemas.openxmlformats.org/drawingml/2006/main" xmlns:r="http://schemas.openxmlformats.org/officeDocument/2006/relationships" xmlns:p="http://schemas.openxmlformats.org/presentationml/2006/main">
+  <p:cSld>
+    <p:spTree>
+      <p:nvGrpSpPr>
+        <p:cNvPr id="1" name=""/>
+        <p:cNvGrpSpPr/>
+        <p:nvPr/>
+      </p:nvGrpSpPr>
+      <p:grpSpPr>
+        <a:xfrm>
+          <a:off x="0" y="0"/>
+          <a:ext cx="0" cy="0"/>
+          <a:chOff x="0" y="0"/>
+          <a:chExt cx="0" cy="0"/>
+        </a:xfrm>
+      </p:grpSpPr>
+      <p:sp>
+        <p:nvSpPr>
+          <p:cNvPr id="2" name="Slide Image Placeholder 1"/>
+          <p:cNvSpPr>
+            <a:spLocks noGrp="1" noRot="1" noChangeAspect="1"/>
+          </p:cNvSpPr>
+          <p:nvPr>
+            <p:ph type="sldImg"/>
+          </p:nvPr>
+        </p:nvSpPr>
+        <p:spPr/>
+      </p:sp>
+      <p:sp>
+        <p:nvSpPr>
+          <p:cNvPr id="3" name="Notes Placeholder 2"/>
+          <p:cNvSpPr>
+            <a:spLocks noGrp="1"/>
+          </p:cNvSpPr>
+          <p:nvPr>
+            <p:ph type="body" idx="1"/>
+          </p:nvPr>
+        </p:nvSpPr>
+        <p:spPr/>
+        <p:txBody>
+          <a:bodyPr/>
+          <a:lstStyle/>
+          <a:p>
+            <a:r>
+              <a:rPr lang="en-US" dirty="0"/>
+              <a:t/>
+            </a:r>
+            <a:endParaRPr lang="en-US" dirty="0"/>
+          </a:p>
+        </p:txBody>
+      </p:sp>
+      <p:sp>
+        <p:nvSpPr>
+          <p:cNvPr id="4" name="Slide Number Placeholder 3"/>
+          <p:cNvSpPr>
+            <a:spLocks noGrp="1"/>
+          </p:cNvSpPr>
+          <p:nvPr>
+            <p:ph type="sldNum" sz="quarter" idx="10"/>
+          </p:nvPr>
+        </p:nvSpPr>
+        <p:spPr/>
+        <p:txBody>
+          <a:bodyPr/>
+          <a:lstStyle/>
+          <a:p>
+            <a:fld id="{F7021451-1387-4CA6-816F-3879F97B5CBC}" type="slidenum">
+              <a:rPr lang="en-US"/>
+              <a:t>15</a:t>
+            </a:fld>
+            <a:endParaRPr lang="en-US"/>
+          </a:p>
+        </p:txBody>
+      </p:sp>
+    </p:spTree>
+    <p:extLst>
+      <p:ext uri="{BB962C8B-B14F-4D97-AF65-F5344CB8AC3E}">
+        <p14:creationId xmlns:p14="http://schemas.microsoft.com/office/powerpoint/2010/main" val="1024086991"/>
+      </p:ext>
+    </p:extLst>
+  </p:cSld>
+  <p:clrMapOvr>
+    <a:masterClrMapping/>
+  </p:clrMapOvr>
+</p:notes>
+</file>
+
+<file path=ppt/notesSlides/notesSlide16.xml><?xml version="1.0" encoding="utf-8"?>
+<p:notes xmlns:a="http://schemas.openxmlformats.org/drawingml/2006/main" xmlns:r="http://schemas.openxmlformats.org/officeDocument/2006/relationships" xmlns:p="http://schemas.openxmlformats.org/presentationml/2006/main">
+  <p:cSld>
+    <p:spTree>
+      <p:nvGrpSpPr>
+        <p:cNvPr id="1" name=""/>
+        <p:cNvGrpSpPr/>
+        <p:nvPr/>
+      </p:nvGrpSpPr>
+      <p:grpSpPr>
+        <a:xfrm>
+          <a:off x="0" y="0"/>
+          <a:ext cx="0" cy="0"/>
+          <a:chOff x="0" y="0"/>
+          <a:chExt cx="0" cy="0"/>
+        </a:xfrm>
+      </p:grpSpPr>
+      <p:sp>
+        <p:nvSpPr>
+          <p:cNvPr id="2" name="Slide Image Placeholder 1"/>
+          <p:cNvSpPr>
+            <a:spLocks noGrp="1" noRot="1" noChangeAspect="1"/>
+          </p:cNvSpPr>
+          <p:nvPr>
+            <p:ph type="sldImg"/>
+          </p:nvPr>
+        </p:nvSpPr>
+        <p:spPr/>
+      </p:sp>
+      <p:sp>
+        <p:nvSpPr>
+          <p:cNvPr id="3" name="Notes Placeholder 2"/>
+          <p:cNvSpPr>
+            <a:spLocks noGrp="1"/>
+          </p:cNvSpPr>
+          <p:nvPr>
+            <p:ph type="body" idx="1"/>
+          </p:nvPr>
+        </p:nvSpPr>
+        <p:spPr/>
+        <p:txBody>
+          <a:bodyPr/>
+          <a:lstStyle/>
+          <a:p>
+            <a:r>
+              <a:rPr lang="en-US" dirty="0"/>
+              <a:t/>
+            </a:r>
+            <a:endParaRPr lang="en-US" dirty="0"/>
+          </a:p>
+        </p:txBody>
+      </p:sp>
+      <p:sp>
+        <p:nvSpPr>
+          <p:cNvPr id="4" name="Slide Number Placeholder 3"/>
+          <p:cNvSpPr>
+            <a:spLocks noGrp="1"/>
+          </p:cNvSpPr>
+          <p:nvPr>
+            <p:ph type="sldNum" sz="quarter" idx="10"/>
+          </p:nvPr>
+        </p:nvSpPr>
+        <p:spPr/>
+        <p:txBody>
+          <a:bodyPr/>
+          <a:lstStyle/>
+          <a:p>
+            <a:fld id="{F7021451-1387-4CA6-816F-3879F97B5CBC}" type="slidenum">
+              <a:rPr lang="en-US"/>
+              <a:t>16</a:t>
+            </a:fld>
+            <a:endParaRPr lang="en-US"/>
+          </a:p>
+        </p:txBody>
+      </p:sp>
+    </p:spTree>
+    <p:extLst>
+      <p:ext uri="{BB962C8B-B14F-4D97-AF65-F5344CB8AC3E}">
+        <p14:creationId xmlns:p14="http://schemas.microsoft.com/office/powerpoint/2010/main" val="1024086991"/>
+      </p:ext>
+    </p:extLst>
+  </p:cSld>
+  <p:clrMapOvr>
+    <a:masterClrMapping/>
+  </p:clrMapOvr>
+</p:notes>
+</file>
+
+<file path=ppt/notesSlides/notesSlide17.xml><?xml version="1.0" encoding="utf-8"?>
+<p:notes xmlns:a="http://schemas.openxmlformats.org/drawingml/2006/main" xmlns:r="http://schemas.openxmlformats.org/officeDocument/2006/relationships" xmlns:p="http://schemas.openxmlformats.org/presentationml/2006/main">
+  <p:cSld>
+    <p:spTree>
+      <p:nvGrpSpPr>
+        <p:cNvPr id="1" name=""/>
+        <p:cNvGrpSpPr/>
+        <p:nvPr/>
+      </p:nvGrpSpPr>
+      <p:grpSpPr>
+        <a:xfrm>
+          <a:off x="0" y="0"/>
+          <a:ext cx="0" cy="0"/>
+          <a:chOff x="0" y="0"/>
+          <a:chExt cx="0" cy="0"/>
+        </a:xfrm>
+      </p:grpSpPr>
+      <p:sp>
+        <p:nvSpPr>
+          <p:cNvPr id="2" name="Slide Image Placeholder 1"/>
+          <p:cNvSpPr>
+            <a:spLocks noGrp="1" noRot="1" noChangeAspect="1"/>
+          </p:cNvSpPr>
+          <p:nvPr>
+            <p:ph type="sldImg"/>
+          </p:nvPr>
+        </p:nvSpPr>
+        <p:spPr/>
+      </p:sp>
+      <p:sp>
+        <p:nvSpPr>
+          <p:cNvPr id="3" name="Notes Placeholder 2"/>
+          <p:cNvSpPr>
+            <a:spLocks noGrp="1"/>
+          </p:cNvSpPr>
+          <p:nvPr>
+            <p:ph type="body" idx="1"/>
+          </p:nvPr>
+        </p:nvSpPr>
+        <p:spPr/>
+        <p:txBody>
+          <a:bodyPr/>
+          <a:lstStyle/>
+          <a:p>
+            <a:r>
+              <a:rPr lang="en-US" dirty="0"/>
+              <a:t/>
+            </a:r>
+            <a:endParaRPr lang="en-US" dirty="0"/>
+          </a:p>
+        </p:txBody>
+      </p:sp>
+      <p:sp>
+        <p:nvSpPr>
+          <p:cNvPr id="4" name="Slide Number Placeholder 3"/>
+          <p:cNvSpPr>
+            <a:spLocks noGrp="1"/>
+          </p:cNvSpPr>
+          <p:nvPr>
+            <p:ph type="sldNum" sz="quarter" idx="10"/>
+          </p:nvPr>
+        </p:nvSpPr>
+        <p:spPr/>
+        <p:txBody>
+          <a:bodyPr/>
+          <a:lstStyle/>
+          <a:p>
+            <a:fld id="{F7021451-1387-4CA6-816F-3879F97B5CBC}" type="slidenum">
+              <a:rPr lang="en-US"/>
+              <a:t>17</a:t>
+            </a:fld>
+            <a:endParaRPr lang="en-US"/>
+          </a:p>
+        </p:txBody>
+      </p:sp>
+    </p:spTree>
+    <p:extLst>
+      <p:ext uri="{BB962C8B-B14F-4D97-AF65-F5344CB8AC3E}">
+        <p14:creationId xmlns:p14="http://schemas.microsoft.com/office/powerpoint/2010/main" val="1024086991"/>
+      </p:ext>
+    </p:extLst>
+  </p:cSld>
+  <p:clrMapOvr>
+    <a:masterClrMapping/>
+  </p:clrMapOvr>
+</p:notes>
+</file>
+
+<file path=ppt/notesSlides/notesSlide18.xml><?xml version="1.0" encoding="utf-8"?>
+<p:notes xmlns:a="http://schemas.openxmlformats.org/drawingml/2006/main" xmlns:r="http://schemas.openxmlformats.org/officeDocument/2006/relationships" xmlns:p="http://schemas.openxmlformats.org/presentationml/2006/main">
+  <p:cSld>
+    <p:spTree>
+      <p:nvGrpSpPr>
+        <p:cNvPr id="1" name=""/>
+        <p:cNvGrpSpPr/>
+        <p:nvPr/>
+      </p:nvGrpSpPr>
+      <p:grpSpPr>
+        <a:xfrm>
+          <a:off x="0" y="0"/>
+          <a:ext cx="0" cy="0"/>
+          <a:chOff x="0" y="0"/>
+          <a:chExt cx="0" cy="0"/>
+        </a:xfrm>
+      </p:grpSpPr>
+      <p:sp>
+        <p:nvSpPr>
+          <p:cNvPr id="2" name="Slide Image Placeholder 1"/>
+          <p:cNvSpPr>
+            <a:spLocks noGrp="1" noRot="1" noChangeAspect="1"/>
+          </p:cNvSpPr>
+          <p:nvPr>
+            <p:ph type="sldImg"/>
+          </p:nvPr>
+        </p:nvSpPr>
+        <p:spPr/>
+      </p:sp>
+      <p:sp>
+        <p:nvSpPr>
+          <p:cNvPr id="3" name="Notes Placeholder 2"/>
+          <p:cNvSpPr>
+            <a:spLocks noGrp="1"/>
+          </p:cNvSpPr>
+          <p:nvPr>
+            <p:ph type="body" idx="1"/>
+          </p:nvPr>
+        </p:nvSpPr>
+        <p:spPr/>
+        <p:txBody>
+          <a:bodyPr/>
+          <a:lstStyle/>
+          <a:p>
+            <a:r>
+              <a:rPr lang="en-US" dirty="0"/>
+              <a:t/>
+            </a:r>
+            <a:endParaRPr lang="en-US" dirty="0"/>
+          </a:p>
+        </p:txBody>
+      </p:sp>
+      <p:sp>
+        <p:nvSpPr>
+          <p:cNvPr id="4" name="Slide Number Placeholder 3"/>
+          <p:cNvSpPr>
+            <a:spLocks noGrp="1"/>
+          </p:cNvSpPr>
+          <p:nvPr>
+            <p:ph type="sldNum" sz="quarter" idx="10"/>
+          </p:nvPr>
+        </p:nvSpPr>
+        <p:spPr/>
+        <p:txBody>
+          <a:bodyPr/>
+          <a:lstStyle/>
+          <a:p>
+            <a:fld id="{F7021451-1387-4CA6-816F-3879F97B5CBC}" type="slidenum">
+              <a:rPr lang="en-US"/>
+              <a:t>18</a:t>
+            </a:fld>
+            <a:endParaRPr lang="en-US"/>
+          </a:p>
+        </p:txBody>
+      </p:sp>
+    </p:spTree>
+    <p:extLst>
+      <p:ext uri="{BB962C8B-B14F-4D97-AF65-F5344CB8AC3E}">
+        <p14:creationId xmlns:p14="http://schemas.microsoft.com/office/powerpoint/2010/main" val="1024086991"/>
+      </p:ext>
+    </p:extLst>
+  </p:cSld>
+  <p:clrMapOvr>
+    <a:masterClrMapping/>
+  </p:clrMapOvr>
+</p:notes>
+</file>
+
+<file path=ppt/notesSlides/notesSlide19.xml><?xml version="1.0" encoding="utf-8"?>
+<p:notes xmlns:a="http://schemas.openxmlformats.org/drawingml/2006/main" xmlns:r="http://schemas.openxmlformats.org/officeDocument/2006/relationships" xmlns:p="http://schemas.openxmlformats.org/presentationml/2006/main">
+  <p:cSld>
+    <p:spTree>
+      <p:nvGrpSpPr>
+        <p:cNvPr id="1" name=""/>
+        <p:cNvGrpSpPr/>
+        <p:nvPr/>
+      </p:nvGrpSpPr>
+      <p:grpSpPr>
+        <a:xfrm>
+          <a:off x="0" y="0"/>
+          <a:ext cx="0" cy="0"/>
+          <a:chOff x="0" y="0"/>
+          <a:chExt cx="0" cy="0"/>
+        </a:xfrm>
+      </p:grpSpPr>
+      <p:sp>
+        <p:nvSpPr>
+          <p:cNvPr id="2" name="Slide Image Placeholder 1"/>
+          <p:cNvSpPr>
+            <a:spLocks noGrp="1" noRot="1" noChangeAspect="1"/>
+          </p:cNvSpPr>
+          <p:nvPr>
+            <p:ph type="sldImg"/>
+          </p:nvPr>
+        </p:nvSpPr>
+        <p:spPr/>
+      </p:sp>
+      <p:sp>
+        <p:nvSpPr>
+          <p:cNvPr id="3" name="Notes Placeholder 2"/>
+          <p:cNvSpPr>
+            <a:spLocks noGrp="1"/>
+          </p:cNvSpPr>
+          <p:nvPr>
+            <p:ph type="body" idx="1"/>
+          </p:nvPr>
+        </p:nvSpPr>
+        <p:spPr/>
+        <p:txBody>
+          <a:bodyPr/>
+          <a:lstStyle/>
+          <a:p>
+            <a:r>
+              <a:rPr lang="en-US" dirty="0"/>
+              <a:t/>
+            </a:r>
+            <a:endParaRPr lang="en-US" dirty="0"/>
+          </a:p>
+        </p:txBody>
+      </p:sp>
+      <p:sp>
+        <p:nvSpPr>
+          <p:cNvPr id="4" name="Slide Number Placeholder 3"/>
+          <p:cNvSpPr>
+            <a:spLocks noGrp="1"/>
+          </p:cNvSpPr>
+          <p:nvPr>
+            <p:ph type="sldNum" sz="quarter" idx="10"/>
+          </p:nvPr>
+        </p:nvSpPr>
+        <p:spPr/>
+        <p:txBody>
+          <a:bodyPr/>
+          <a:lstStyle/>
+          <a:p>
+            <a:fld id="{F7021451-1387-4CA6-816F-3879F97B5CBC}" type="slidenum">
+              <a:rPr lang="en-US"/>
+              <a:t>19</a:t>
+            </a:fld>
+            <a:endParaRPr lang="en-US"/>
+          </a:p>
+        </p:txBody>
+      </p:sp>
+    </p:spTree>
+    <p:extLst>
+      <p:ext uri="{BB962C8B-B14F-4D97-AF65-F5344CB8AC3E}">
+        <p14:creationId xmlns:p14="http://schemas.microsoft.com/office/powerpoint/2010/main" val="1024086991"/>
+      </p:ext>
+    </p:extLst>
+  </p:cSld>
+  <p:clrMapOvr>
+    <a:masterClrMapping/>
+  </p:clrMapOvr>
+</p:notes>
+</file>
+
 <file path=ppt/notesSlides/notesSlide2.xml><?xml version="1.0" encoding="utf-8"?>
 <p:notes xmlns:a="http://schemas.openxmlformats.org/drawingml/2006/main" xmlns:r="http://schemas.openxmlformats.org/officeDocument/2006/relationships" xmlns:p="http://schemas.openxmlformats.org/presentationml/2006/main">
   <p:cSld>
@@ -889,6 +1513,94 @@
             <a:fld id="{F7021451-1387-4CA6-816F-3879F97B5CBC}" type="slidenum">
               <a:rPr lang="en-US"/>
               <a:t>2</a:t>
+            </a:fld>
+            <a:endParaRPr lang="en-US"/>
+          </a:p>
+        </p:txBody>
+      </p:sp>
+    </p:spTree>
+    <p:extLst>
+      <p:ext uri="{BB962C8B-B14F-4D97-AF65-F5344CB8AC3E}">
+        <p14:creationId xmlns:p14="http://schemas.microsoft.com/office/powerpoint/2010/main" val="1024086991"/>
+      </p:ext>
+    </p:extLst>
+  </p:cSld>
+  <p:clrMapOvr>
+    <a:masterClrMapping/>
+  </p:clrMapOvr>
+</p:notes>
+</file>
+
+<file path=ppt/notesSlides/notesSlide20.xml><?xml version="1.0" encoding="utf-8"?>
+<p:notes xmlns:a="http://schemas.openxmlformats.org/drawingml/2006/main" xmlns:r="http://schemas.openxmlformats.org/officeDocument/2006/relationships" xmlns:p="http://schemas.openxmlformats.org/presentationml/2006/main">
+  <p:cSld>
+    <p:spTree>
+      <p:nvGrpSpPr>
+        <p:cNvPr id="1" name=""/>
+        <p:cNvGrpSpPr/>
+        <p:nvPr/>
+      </p:nvGrpSpPr>
+      <p:grpSpPr>
+        <a:xfrm>
+          <a:off x="0" y="0"/>
+          <a:ext cx="0" cy="0"/>
+          <a:chOff x="0" y="0"/>
+          <a:chExt cx="0" cy="0"/>
+        </a:xfrm>
+      </p:grpSpPr>
+      <p:sp>
+        <p:nvSpPr>
+          <p:cNvPr id="2" name="Slide Image Placeholder 1"/>
+          <p:cNvSpPr>
+            <a:spLocks noGrp="1" noRot="1" noChangeAspect="1"/>
+          </p:cNvSpPr>
+          <p:nvPr>
+            <p:ph type="sldImg"/>
+          </p:nvPr>
+        </p:nvSpPr>
+        <p:spPr/>
+      </p:sp>
+      <p:sp>
+        <p:nvSpPr>
+          <p:cNvPr id="3" name="Notes Placeholder 2"/>
+          <p:cNvSpPr>
+            <a:spLocks noGrp="1"/>
+          </p:cNvSpPr>
+          <p:nvPr>
+            <p:ph type="body" idx="1"/>
+          </p:nvPr>
+        </p:nvSpPr>
+        <p:spPr/>
+        <p:txBody>
+          <a:bodyPr/>
+          <a:lstStyle/>
+          <a:p>
+            <a:r>
+              <a:rPr lang="en-US" dirty="0"/>
+              <a:t/>
+            </a:r>
+            <a:endParaRPr lang="en-US" dirty="0"/>
+          </a:p>
+        </p:txBody>
+      </p:sp>
+      <p:sp>
+        <p:nvSpPr>
+          <p:cNvPr id="4" name="Slide Number Placeholder 3"/>
+          <p:cNvSpPr>
+            <a:spLocks noGrp="1"/>
+          </p:cNvSpPr>
+          <p:nvPr>
+            <p:ph type="sldNum" sz="quarter" idx="10"/>
+          </p:nvPr>
+        </p:nvSpPr>
+        <p:spPr/>
+        <p:txBody>
+          <a:bodyPr/>
+          <a:lstStyle/>
+          <a:p>
+            <a:fld id="{F7021451-1387-4CA6-816F-3879F97B5CBC}" type="slidenum">
+              <a:rPr lang="en-US"/>
+              <a:t>20</a:t>
             </a:fld>
             <a:endParaRPr lang="en-US"/>
           </a:p>
@@ -2100,286 +2812,6 @@
         </p:nvSpPr>
         <p:spPr>
           <a:xfrm>
-            <a:off x="406301" y="1223963"/>
-            <a:ext cx="8498026" cy="274290"/>
-          </a:xfrm>
-          <a:prstGeom prst="rect">
-            <a:avLst/>
-          </a:prstGeom>
-          <a:noFill/>
-          <a:ln/>
-        </p:spPr>
-        <p:txBody>
-          <a:bodyPr wrap="square" lIns="0" tIns="0" rIns="0" bIns="0" rtlCol="0" anchor="t"/>
-          <a:lstStyle/>
-          <a:p>
-            <a:pPr algn="l" indent="0" marL="0">
-              <a:lnSpc>
-                <a:spcPts val="2160"/>
-              </a:lnSpc>
-              <a:spcBef>
-                <a:spcPts val="600"/>
-              </a:spcBef>
-              <a:spcAft>
-                <a:spcPts val="800"/>
-              </a:spcAft>
-              <a:buNone/>
-            </a:pPr>
-            <a:r>
-              <a:rPr lang="en-US" sz="1800" b="1" dirty="0">
-                <a:solidFill>
-                  <a:srgbClr val="FE4447"/>
-                </a:solidFill>
-                <a:latin typeface="Georgia" pitchFamily="34" charset="0"/>
-                <a:ea typeface="Georgia" pitchFamily="34" charset="-122"/>
-                <a:cs typeface="Georgia" pitchFamily="34" charset="-120"/>
-              </a:rPr>
-              <a:t>Learning objective</a:t>
-            </a:r>
-            <a:endParaRPr lang="en-US" sz="1800" dirty="0"/>
-          </a:p>
-        </p:txBody>
-      </p:sp>
-      <p:sp>
-        <p:nvSpPr>
-          <p:cNvPr id="6" name="Text 4"/>
-          <p:cNvSpPr/>
-          <p:nvPr/>
-        </p:nvSpPr>
-        <p:spPr>
-          <a:xfrm>
-            <a:off x="406301" y="1637854"/>
-            <a:ext cx="8498026" cy="426541"/>
-          </a:xfrm>
-          <a:prstGeom prst="rect">
-            <a:avLst/>
-          </a:prstGeom>
-          <a:noFill/>
-          <a:ln/>
-        </p:spPr>
-        <p:txBody>
-          <a:bodyPr wrap="square" lIns="0" tIns="0" rIns="0" bIns="0" rtlCol="0" anchor="t"/>
-          <a:lstStyle/>
-          <a:p>
-            <a:pPr algn="l" indent="0" marL="0">
-              <a:lnSpc>
-                <a:spcPts val="1680"/>
-              </a:lnSpc>
-              <a:spcBef>
-                <a:spcPts val="300"/>
-              </a:spcBef>
-              <a:spcAft>
-                <a:spcPts val="300"/>
-              </a:spcAft>
-              <a:buNone/>
-            </a:pPr>
-            <a:r>
-              <a:rPr lang="en-US" sz="1200" dirty="0">
-                <a:solidFill>
-                  <a:srgbClr val="1C2833"/>
-                </a:solidFill>
-                <a:latin typeface="Arial" pitchFamily="34" charset="0"/>
-                <a:ea typeface="Arial" pitchFamily="34" charset="-122"/>
-                <a:cs typeface="Arial" pitchFamily="34" charset="-120"/>
-              </a:rPr>
-              <a:t>Students will define </a:t>
-            </a:r>
-            <a:pPr algn="l" indent="0" marL="0">
-              <a:lnSpc>
-                <a:spcPts val="1680"/>
-              </a:lnSpc>
-              <a:spcBef>
-                <a:spcPts val="300"/>
-              </a:spcBef>
-              <a:spcAft>
-                <a:spcPts val="300"/>
-              </a:spcAft>
-              <a:buNone/>
-            </a:pPr>
-            <a:r>
-              <a:rPr lang="en-US" sz="1200" i="1" dirty="0">
-                <a:solidFill>
-                  <a:srgbClr val="1C2833"/>
-                </a:solidFill>
-                <a:latin typeface="Arial" pitchFamily="34" charset="0"/>
-                <a:ea typeface="Arial" pitchFamily="34" charset="-122"/>
-                <a:cs typeface="Arial" pitchFamily="34" charset="-120"/>
-              </a:rPr>
-              <a:t>śukla pakṣa</a:t>
-            </a:r>
-            <a:pPr algn="l" indent="0" marL="0">
-              <a:lnSpc>
-                <a:spcPts val="1680"/>
-              </a:lnSpc>
-              <a:spcBef>
-                <a:spcPts val="300"/>
-              </a:spcBef>
-              <a:spcAft>
-                <a:spcPts val="300"/>
-              </a:spcAft>
-              <a:buNone/>
-            </a:pPr>
-            <a:r>
-              <a:rPr lang="en-US" sz="1200" dirty="0">
-                <a:solidFill>
-                  <a:srgbClr val="1C2833"/>
-                </a:solidFill>
-                <a:latin typeface="Arial" pitchFamily="34" charset="0"/>
-                <a:ea typeface="Arial" pitchFamily="34" charset="-122"/>
-                <a:cs typeface="Arial" pitchFamily="34" charset="-120"/>
-              </a:rPr>
-              <a:t> and </a:t>
-            </a:r>
-            <a:pPr algn="l" indent="0" marL="0">
-              <a:lnSpc>
-                <a:spcPts val="1680"/>
-              </a:lnSpc>
-              <a:spcBef>
-                <a:spcPts val="300"/>
-              </a:spcBef>
-              <a:spcAft>
-                <a:spcPts val="300"/>
-              </a:spcAft>
-              <a:buNone/>
-            </a:pPr>
-            <a:r>
-              <a:rPr lang="en-US" sz="1200" i="1" dirty="0">
-                <a:solidFill>
-                  <a:srgbClr val="1C2833"/>
-                </a:solidFill>
-                <a:latin typeface="Arial" pitchFamily="34" charset="0"/>
-                <a:ea typeface="Arial" pitchFamily="34" charset="-122"/>
-                <a:cs typeface="Arial" pitchFamily="34" charset="-120"/>
-              </a:rPr>
-              <a:t>kṛṣṇa pakṣa</a:t>
-            </a:r>
-            <a:pPr algn="l" indent="0" marL="0">
-              <a:lnSpc>
-                <a:spcPts val="1680"/>
-              </a:lnSpc>
-              <a:spcBef>
-                <a:spcPts val="300"/>
-              </a:spcBef>
-              <a:spcAft>
-                <a:spcPts val="300"/>
-              </a:spcAft>
-              <a:buNone/>
-            </a:pPr>
-            <a:r>
-              <a:rPr lang="en-US" sz="1200" dirty="0">
-                <a:solidFill>
-                  <a:srgbClr val="1C2833"/>
-                </a:solidFill>
-                <a:latin typeface="Arial" pitchFamily="34" charset="0"/>
-                <a:ea typeface="Arial" pitchFamily="34" charset="-122"/>
-                <a:cs typeface="Arial" pitchFamily="34" charset="-120"/>
-              </a:rPr>
-              <a:t>, identify the two anchor days </a:t>
-            </a:r>
-            <a:pPr algn="l" indent="0" marL="0">
-              <a:lnSpc>
-                <a:spcPts val="1680"/>
-              </a:lnSpc>
-              <a:spcBef>
-                <a:spcPts val="300"/>
-              </a:spcBef>
-              <a:spcAft>
-                <a:spcPts val="300"/>
-              </a:spcAft>
-              <a:buNone/>
-            </a:pPr>
-            <a:r>
-              <a:rPr lang="en-US" sz="1200" i="1" dirty="0">
-                <a:solidFill>
-                  <a:srgbClr val="1C2833"/>
-                </a:solidFill>
-                <a:latin typeface="Arial" pitchFamily="34" charset="0"/>
-                <a:ea typeface="Arial" pitchFamily="34" charset="-122"/>
-                <a:cs typeface="Arial" pitchFamily="34" charset="-120"/>
-              </a:rPr>
-              <a:t>amāvasyā</a:t>
-            </a:r>
-            <a:pPr algn="l" indent="0" marL="0">
-              <a:lnSpc>
-                <a:spcPts val="1680"/>
-              </a:lnSpc>
-              <a:spcBef>
-                <a:spcPts val="300"/>
-              </a:spcBef>
-              <a:spcAft>
-                <a:spcPts val="300"/>
-              </a:spcAft>
-              <a:buNone/>
-            </a:pPr>
-            <a:r>
-              <a:rPr lang="en-US" sz="1200" dirty="0">
-                <a:solidFill>
-                  <a:srgbClr val="1C2833"/>
-                </a:solidFill>
-                <a:latin typeface="Arial" pitchFamily="34" charset="0"/>
-                <a:ea typeface="Arial" pitchFamily="34" charset="-122"/>
-                <a:cs typeface="Arial" pitchFamily="34" charset="-120"/>
-              </a:rPr>
-              <a:t> and </a:t>
-            </a:r>
-            <a:pPr algn="l" indent="0" marL="0">
-              <a:lnSpc>
-                <a:spcPts val="1680"/>
-              </a:lnSpc>
-              <a:spcBef>
-                <a:spcPts val="300"/>
-              </a:spcBef>
-              <a:spcAft>
-                <a:spcPts val="300"/>
-              </a:spcAft>
-              <a:buNone/>
-            </a:pPr>
-            <a:r>
-              <a:rPr lang="en-US" sz="1200" i="1" dirty="0">
-                <a:solidFill>
-                  <a:srgbClr val="1C2833"/>
-                </a:solidFill>
-                <a:latin typeface="Arial" pitchFamily="34" charset="0"/>
-                <a:ea typeface="Arial" pitchFamily="34" charset="-122"/>
-                <a:cs typeface="Arial" pitchFamily="34" charset="-120"/>
-              </a:rPr>
-              <a:t>pūrṇimā</a:t>
-            </a:r>
-            <a:pPr algn="l" indent="0" marL="0">
-              <a:lnSpc>
-                <a:spcPts val="1680"/>
-              </a:lnSpc>
-              <a:spcBef>
-                <a:spcPts val="300"/>
-              </a:spcBef>
-              <a:spcAft>
-                <a:spcPts val="300"/>
-              </a:spcAft>
-              <a:buNone/>
-            </a:pPr>
-            <a:r>
-              <a:rPr lang="en-US" sz="1200" dirty="0">
-                <a:solidFill>
-                  <a:srgbClr val="1C2833"/>
-                </a:solidFill>
-                <a:latin typeface="Arial" pitchFamily="34" charset="0"/>
-                <a:ea typeface="Arial" pitchFamily="34" charset="-122"/>
-                <a:cs typeface="Arial" pitchFamily="34" charset="-120"/>
-              </a:rPr>
-              <a:t>, and place yesterday's observed Moon shape into one of the two pakṣas.</a:t>
-            </a:r>
-            <a:endParaRPr lang="en-US" sz="1200" dirty="0"/>
-          </a:p>
-        </p:txBody>
-      </p:sp>
-      <p:sp>
-        <p:nvSpPr>
-          <p:cNvPr id="7" name="Text 5"/>
-          <p:cNvSpPr/>
-          <p:nvPr/>
-        </p:nvSpPr>
-        <p:spPr>
-          <a:xfrm>
             <a:off x="406301" y="4434929"/>
             <a:ext cx="8498026" cy="213271"/>
           </a:xfrm>
@@ -2524,7 +2956,7 @@
                 <a:ea typeface="Georgia" pitchFamily="34" charset="-122"/>
                 <a:cs typeface="Georgia" pitchFamily="34" charset="-120"/>
               </a:rPr>
-              <a:t>Differentiation</a:t>
+              <a:t>Core (20 min) (cont.)</a:t>
             </a:r>
             <a:endParaRPr lang="en-US" sz="1800" dirty="0"/>
           </a:p>
@@ -2539,7 +2971,7 @@
         <p:spPr>
           <a:xfrm>
             <a:off x="634901" y="883593"/>
-            <a:ext cx="8102798" cy="731341"/>
+            <a:ext cx="8102798" cy="487561"/>
           </a:xfrm>
           <a:prstGeom prst="rect">
             <a:avLst/>
@@ -2570,7 +3002,7 @@
                 <a:ea typeface="Arial" pitchFamily="34" charset="-122"/>
                 <a:cs typeface="Arial" pitchFamily="34" charset="-120"/>
               </a:rPr>
-              <a:t>One tier up:</a:t>
+              <a:t>Why these names?</a:t>
             </a:r>
             <a:pPr algn="l" indent="0" marL="0">
               <a:lnSpc>
@@ -2590,7 +3022,7 @@
                 <a:ea typeface="Arial" pitchFamily="34" charset="-122"/>
                 <a:cs typeface="Arial" pitchFamily="34" charset="-120"/>
               </a:rPr>
-              <a:t> Look up the meaning of the words </a:t>
+              <a:t> </a:t>
             </a:r>
             <a:pPr algn="l" indent="0" marL="0">
               <a:lnSpc>
@@ -2610,7 +3042,7 @@
                 <a:ea typeface="Arial" pitchFamily="34" charset="-122"/>
                 <a:cs typeface="Arial" pitchFamily="34" charset="-120"/>
               </a:rPr>
-              <a:t>śukla</a:t>
+              <a:t>Śukla</a:t>
             </a:r>
             <a:pPr algn="l" indent="0" marL="0">
               <a:lnSpc>
@@ -2630,7 +3062,7 @@
                 <a:ea typeface="Arial" pitchFamily="34" charset="-122"/>
                 <a:cs typeface="Arial" pitchFamily="34" charset="-120"/>
               </a:rPr>
-              <a:t> and </a:t>
+              <a:t> (शुक्ल) means "bright, white"; </a:t>
             </a:r>
             <a:pPr algn="l" indent="0" marL="0">
               <a:lnSpc>
@@ -2670,10 +3102,32 @@
                 <a:ea typeface="Arial" pitchFamily="34" charset="-122"/>
                 <a:cs typeface="Arial" pitchFamily="34" charset="-120"/>
               </a:rPr>
-              <a:t> in any Sanskrit dictionary. Are they used only for the Moon, or in other contexts? (They are general-purpose words for "bright/white" and "dark/black.")</a:t>
+              <a:t> (कृष्ण) means "dark, black." Naming the fortnights by the direction the brightness is heading — toward full or toward new — is precise and useful.</a:t>
             </a:r>
             <a:endParaRPr lang="en-US" sz="1200" dirty="0"/>
           </a:p>
+        </p:txBody>
+      </p:sp>
+      <p:sp>
+        <p:nvSpPr>
+          <p:cNvPr id="5" name="Text 3"/>
+          <p:cNvSpPr/>
+          <p:nvPr/>
+        </p:nvSpPr>
+        <p:spPr>
+          <a:xfrm>
+            <a:off x="634901" y="1472654"/>
+            <a:ext cx="8102798" cy="693241"/>
+          </a:xfrm>
+          <a:prstGeom prst="rect">
+            <a:avLst/>
+          </a:prstGeom>
+          <a:noFill/>
+          <a:ln/>
+        </p:spPr>
+        <p:txBody>
+          <a:bodyPr wrap="square" lIns="0" tIns="0" rIns="0" bIns="0" rtlCol="0" anchor="t"/>
+          <a:lstStyle/>
           <a:p>
             <a:pPr algn="l" marL="342900" indent="-342900">
               <a:lnSpc>
@@ -2694,7 +3148,7 @@
                 <a:ea typeface="Arial" pitchFamily="34" charset="-122"/>
                 <a:cs typeface="Arial" pitchFamily="34" charset="-120"/>
               </a:rPr>
-              <a:t>One tier down:</a:t>
+              <a:t>A common confusion to head off:</a:t>
             </a:r>
             <a:pPr algn="l" indent="0" marL="0">
               <a:lnSpc>
@@ -2714,7 +3168,7 @@
                 <a:ea typeface="Arial" pitchFamily="34" charset="-122"/>
                 <a:cs typeface="Arial" pitchFamily="34" charset="-120"/>
               </a:rPr>
-              <a:t> Memorise only </a:t>
+              <a:t> Neither pakṣa is "good" or "bad." Both are simply astronomical halves of the lunar cycle. Some festivals fall in </a:t>
             </a:r>
             <a:pPr algn="l" indent="0" marL="0">
               <a:lnSpc>
@@ -2734,7 +3188,7 @@
                 <a:ea typeface="Arial" pitchFamily="34" charset="-122"/>
                 <a:cs typeface="Arial" pitchFamily="34" charset="-120"/>
               </a:rPr>
-              <a:t>amāvasyā</a:t>
+              <a:t>śukla</a:t>
             </a:r>
             <a:pPr algn="l" indent="0" marL="0">
               <a:lnSpc>
@@ -2754,7 +3208,7 @@
                 <a:ea typeface="Arial" pitchFamily="34" charset="-122"/>
                 <a:cs typeface="Arial" pitchFamily="34" charset="-120"/>
               </a:rPr>
-              <a:t> and </a:t>
+              <a:t> (e.g. Rāma Navamī, Vaikuṇṭha Ekādaśī), some in </a:t>
             </a:r>
             <a:pPr algn="l" indent="0" marL="0">
               <a:lnSpc>
@@ -2774,7 +3228,7 @@
                 <a:ea typeface="Arial" pitchFamily="34" charset="-122"/>
                 <a:cs typeface="Arial" pitchFamily="34" charset="-120"/>
               </a:rPr>
-              <a:t>pūrṇimā</a:t>
+              <a:t>kṛṣṇa</a:t>
             </a:r>
             <a:pPr algn="l" indent="0" marL="0">
               <a:lnSpc>
@@ -2794,7 +3248,7 @@
                 <a:ea typeface="Arial" pitchFamily="34" charset="-122"/>
                 <a:cs typeface="Arial" pitchFamily="34" charset="-120"/>
               </a:rPr>
-              <a:t> for now. The pakṣa terms can wait one more day.</a:t>
+              <a:t> (e.g. Janmāṣṭamī, Mahā-śivarātri).</a:t>
             </a:r>
             <a:endParaRPr lang="en-US" sz="1200" dirty="0"/>
           </a:p>
@@ -2802,7 +3256,7 @@
       </p:sp>
       <p:sp>
         <p:nvSpPr>
-          <p:cNvPr id="5" name="Text 3"/>
+          <p:cNvPr id="6" name="Text 4"/>
           <p:cNvSpPr/>
           <p:nvPr/>
         </p:nvSpPr>
@@ -2952,7 +3406,7 @@
                 <a:ea typeface="Georgia" pitchFamily="34" charset="-122"/>
                 <a:cs typeface="Georgia" pitchFamily="34" charset="-120"/>
               </a:rPr>
-              <a:t>Teacher notes</a:t>
+              <a:t>Core (20 min) (cont.)</a:t>
             </a:r>
             <a:endParaRPr lang="en-US" sz="1800" dirty="0"/>
           </a:p>
@@ -2966,8 +3420,8 @@
         </p:nvSpPr>
         <p:spPr>
           <a:xfrm>
-            <a:off x="406301" y="870942"/>
-            <a:ext cx="8498026" cy="853083"/>
+            <a:off x="634901" y="883593"/>
+            <a:ext cx="8102798" cy="281880"/>
           </a:xfrm>
           <a:prstGeom prst="rect">
             <a:avLst/>
@@ -2979,13 +3433,77 @@
           <a:bodyPr wrap="square" lIns="0" tIns="0" rIns="0" bIns="0" rtlCol="0" anchor="t"/>
           <a:lstStyle/>
           <a:p>
-            <a:pPr algn="l" indent="0" marL="0">
-              <a:lnSpc>
-                <a:spcPts val="1680"/>
-              </a:lnSpc>
-              <a:spcBef>
-                <a:spcPts val="300"/>
-              </a:spcBef>
+            <a:pPr algn="l" marL="342900" indent="-342900">
+              <a:lnSpc>
+                <a:spcPts val="1620"/>
+              </a:lnSpc>
+              <a:spcAft>
+                <a:spcPts val="300"/>
+              </a:spcAft>
+              <a:buSzPct val="100000"/>
+              <a:buChar char="•"/>
+            </a:pPr>
+            <a:r>
+              <a:rPr lang="en-US" sz="1200" b="1" dirty="0">
+                <a:solidFill>
+                  <a:srgbClr val="1C2833"/>
+                </a:solidFill>
+                <a:latin typeface="Arial" pitchFamily="34" charset="0"/>
+                <a:ea typeface="Arial" pitchFamily="34" charset="-122"/>
+                <a:cs typeface="Arial" pitchFamily="34" charset="-120"/>
+              </a:rPr>
+              <a:t>The two anchor days deserve their names:</a:t>
+            </a:r>
+            <a:endParaRPr lang="en-US" sz="1200" dirty="0"/>
+          </a:p>
+        </p:txBody>
+      </p:sp>
+      <p:sp>
+        <p:nvSpPr>
+          <p:cNvPr id="5" name="Text 3"/>
+          <p:cNvSpPr/>
+          <p:nvPr/>
+        </p:nvSpPr>
+        <p:spPr>
+          <a:xfrm>
+            <a:off x="634901" y="1266974"/>
+            <a:ext cx="8102798" cy="1142702"/>
+          </a:xfrm>
+          <a:prstGeom prst="rect">
+            <a:avLst/>
+          </a:prstGeom>
+          <a:noFill/>
+          <a:ln/>
+        </p:spPr>
+        <p:txBody>
+          <a:bodyPr wrap="square" lIns="0" tIns="0" rIns="0" bIns="0" rtlCol="0" anchor="t"/>
+          <a:lstStyle/>
+          <a:p>
+            <a:pPr algn="l" marL="342900" indent="-342900">
+              <a:lnSpc>
+                <a:spcPts val="1620"/>
+              </a:lnSpc>
+              <a:spcAft>
+                <a:spcPts val="300"/>
+              </a:spcAft>
+              <a:buSzPct val="100000"/>
+              <a:buChar char="•"/>
+            </a:pPr>
+            <a:r>
+              <a:rPr lang="en-US" sz="1200" i="1" dirty="0">
+                <a:solidFill>
+                  <a:srgbClr val="1C2833"/>
+                </a:solidFill>
+                <a:latin typeface="Arial" pitchFamily="34" charset="0"/>
+                <a:ea typeface="Arial" pitchFamily="34" charset="-122"/>
+                <a:cs typeface="Arial" pitchFamily="34" charset="-120"/>
+              </a:rPr>
+              <a:t>amāvasyā</a:t>
+            </a:r>
+            <a:pPr algn="l" indent="0" marL="0">
+              <a:lnSpc>
+                <a:spcPts val="1620"/>
+              </a:lnSpc>
               <a:spcAft>
                 <a:spcPts val="300"/>
               </a:spcAft>
@@ -3000,19 +3518,20 @@
                 <a:ea typeface="Arial" pitchFamily="34" charset="-122"/>
                 <a:cs typeface="Arial" pitchFamily="34" charset="-120"/>
               </a:rPr>
-              <a:t>– Watch for the misconception that </a:t>
-            </a:r>
-            <a:pPr algn="l" indent="0" marL="0">
-              <a:lnSpc>
-                <a:spcPts val="1680"/>
-              </a:lnSpc>
-              <a:spcBef>
-                <a:spcPts val="300"/>
-              </a:spcBef>
-              <a:spcAft>
-                <a:spcPts val="300"/>
-              </a:spcAft>
-              <a:buNone/>
+              <a:t> — literally "dwelling-together." The Sun and Moon are in the same direction in the sky (Moon is between Earth and Sun-ish, near the same celestial longitude). The Moon is up during the day, invisible against the sky's brightness.</a:t>
+            </a:r>
+            <a:endParaRPr lang="en-US" sz="1200" dirty="0"/>
+          </a:p>
+          <a:p>
+            <a:pPr algn="l" marL="342900" indent="-342900">
+              <a:lnSpc>
+                <a:spcPts val="1620"/>
+              </a:lnSpc>
+              <a:spcAft>
+                <a:spcPts val="300"/>
+              </a:spcAft>
+              <a:buSzPct val="100000"/>
+              <a:buChar char="•"/>
             </a:pPr>
             <a:r>
               <a:rPr lang="en-US" sz="1200" i="1" dirty="0">
@@ -3023,15 +3542,12 @@
                 <a:ea typeface="Arial" pitchFamily="34" charset="-122"/>
                 <a:cs typeface="Arial" pitchFamily="34" charset="-120"/>
               </a:rPr>
-              <a:t>kṛṣṇa pakṣa</a:t>
-            </a:r>
-            <a:pPr algn="l" indent="0" marL="0">
-              <a:lnSpc>
-                <a:spcPts val="1680"/>
-              </a:lnSpc>
-              <a:spcBef>
-                <a:spcPts val="300"/>
-              </a:spcBef>
+              <a:t>pūrṇimā</a:t>
+            </a:r>
+            <a:pPr algn="l" indent="0" marL="0">
+              <a:lnSpc>
+                <a:spcPts val="1620"/>
+              </a:lnSpc>
               <a:spcAft>
                 <a:spcPts val="300"/>
               </a:spcAft>
@@ -3046,145 +3562,7 @@
                 <a:ea typeface="Arial" pitchFamily="34" charset="-122"/>
                 <a:cs typeface="Arial" pitchFamily="34" charset="-120"/>
               </a:rPr>
-              <a:t> is "the dark side of the Moon" — these are completely different concepts. </a:t>
-            </a:r>
-            <a:pPr algn="l" indent="0" marL="0">
-              <a:lnSpc>
-                <a:spcPts val="1680"/>
-              </a:lnSpc>
-              <a:spcBef>
-                <a:spcPts val="300"/>
-              </a:spcBef>
-              <a:spcAft>
-                <a:spcPts val="300"/>
-              </a:spcAft>
-              <a:buNone/>
-            </a:pPr>
-            <a:r>
-              <a:rPr lang="en-US" sz="1200" i="1" dirty="0">
-                <a:solidFill>
-                  <a:srgbClr val="1C2833"/>
-                </a:solidFill>
-                <a:latin typeface="Arial" pitchFamily="34" charset="0"/>
-                <a:ea typeface="Arial" pitchFamily="34" charset="-122"/>
-                <a:cs typeface="Arial" pitchFamily="34" charset="-120"/>
-              </a:rPr>
-              <a:t>Kṛṣṇa pakṣa</a:t>
-            </a:r>
-            <a:pPr algn="l" indent="0" marL="0">
-              <a:lnSpc>
-                <a:spcPts val="1680"/>
-              </a:lnSpc>
-              <a:spcBef>
-                <a:spcPts val="300"/>
-              </a:spcBef>
-              <a:spcAft>
-                <a:spcPts val="300"/>
-              </a:spcAft>
-              <a:buNone/>
-            </a:pPr>
-            <a:r>
-              <a:rPr lang="en-US" sz="1200" dirty="0">
-                <a:solidFill>
-                  <a:srgbClr val="1C2833"/>
-                </a:solidFill>
-                <a:latin typeface="Arial" pitchFamily="34" charset="0"/>
-                <a:ea typeface="Arial" pitchFamily="34" charset="-122"/>
-                <a:cs typeface="Arial" pitchFamily="34" charset="-120"/>
-              </a:rPr>
-              <a:t> is a fortnight of the calendar; the "far side" of the Moon is a separate thing about which face we always see. – Pronunciation hint: the </a:t>
-            </a:r>
-            <a:pPr algn="l" indent="0" marL="0">
-              <a:lnSpc>
-                <a:spcPts val="1680"/>
-              </a:lnSpc>
-              <a:spcBef>
-                <a:spcPts val="300"/>
-              </a:spcBef>
-              <a:spcAft>
-                <a:spcPts val="300"/>
-              </a:spcAft>
-              <a:buNone/>
-            </a:pPr>
-            <a:r>
-              <a:rPr lang="en-US" sz="1200" i="1" dirty="0">
-                <a:solidFill>
-                  <a:srgbClr val="1C2833"/>
-                </a:solidFill>
-                <a:latin typeface="Arial" pitchFamily="34" charset="0"/>
-                <a:ea typeface="Arial" pitchFamily="34" charset="-122"/>
-                <a:cs typeface="Arial" pitchFamily="34" charset="-120"/>
-              </a:rPr>
-              <a:t>ṣ</a:t>
-            </a:r>
-            <a:pPr algn="l" indent="0" marL="0">
-              <a:lnSpc>
-                <a:spcPts val="1680"/>
-              </a:lnSpc>
-              <a:spcBef>
-                <a:spcPts val="300"/>
-              </a:spcBef>
-              <a:spcAft>
-                <a:spcPts val="300"/>
-              </a:spcAft>
-              <a:buNone/>
-            </a:pPr>
-            <a:r>
-              <a:rPr lang="en-US" sz="1200" dirty="0">
-                <a:solidFill>
-                  <a:srgbClr val="1C2833"/>
-                </a:solidFill>
-                <a:latin typeface="Arial" pitchFamily="34" charset="0"/>
-                <a:ea typeface="Arial" pitchFamily="34" charset="-122"/>
-                <a:cs typeface="Arial" pitchFamily="34" charset="-120"/>
-              </a:rPr>
-              <a:t> in </a:t>
-            </a:r>
-            <a:pPr algn="l" indent="0" marL="0">
-              <a:lnSpc>
-                <a:spcPts val="1680"/>
-              </a:lnSpc>
-              <a:spcBef>
-                <a:spcPts val="300"/>
-              </a:spcBef>
-              <a:spcAft>
-                <a:spcPts val="300"/>
-              </a:spcAft>
-              <a:buNone/>
-            </a:pPr>
-            <a:r>
-              <a:rPr lang="en-US" sz="1200" i="1" dirty="0">
-                <a:solidFill>
-                  <a:srgbClr val="1C2833"/>
-                </a:solidFill>
-                <a:latin typeface="Arial" pitchFamily="34" charset="0"/>
-                <a:ea typeface="Arial" pitchFamily="34" charset="-122"/>
-                <a:cs typeface="Arial" pitchFamily="34" charset="-120"/>
-              </a:rPr>
-              <a:t>pakṣa</a:t>
-            </a:r>
-            <a:pPr algn="l" indent="0" marL="0">
-              <a:lnSpc>
-                <a:spcPts val="1680"/>
-              </a:lnSpc>
-              <a:spcBef>
-                <a:spcPts val="300"/>
-              </a:spcBef>
-              <a:spcAft>
-                <a:spcPts val="300"/>
-              </a:spcAft>
-              <a:buNone/>
-            </a:pPr>
-            <a:r>
-              <a:rPr lang="en-US" sz="1200" dirty="0">
-                <a:solidFill>
-                  <a:srgbClr val="1C2833"/>
-                </a:solidFill>
-                <a:latin typeface="Arial" pitchFamily="34" charset="0"/>
-                <a:ea typeface="Arial" pitchFamily="34" charset="-122"/>
-                <a:cs typeface="Arial" pitchFamily="34" charset="-120"/>
-              </a:rPr>
-              <a:t> is retroflex — closer to English "puk-sha" than "puk-sa." Don't worry about perfection; insist on "pakṣa," not "paksha-aaa."</a:t>
+              <a:t> — "fullness." Moon is opposite the Sun. It rises as the Sun sets, stays up all night, sets as the Sun rises. It is fully illuminated.</a:t>
             </a:r>
             <a:endParaRPr lang="en-US" sz="1200" dirty="0"/>
           </a:p>
@@ -3192,7 +3570,7 @@
       </p:sp>
       <p:sp>
         <p:nvSpPr>
-          <p:cNvPr id="5" name="Text 3"/>
+          <p:cNvPr id="6" name="Text 4"/>
           <p:cNvSpPr/>
           <p:nvPr/>
         </p:nvSpPr>
@@ -3342,7 +3720,7 @@
                 <a:ea typeface="Georgia" pitchFamily="34" charset="-122"/>
                 <a:cs typeface="Georgia" pitchFamily="34" charset="-120"/>
               </a:rPr>
-              <a:t>Citation(s) used in this lesson</a:t>
+              <a:t>Core (20 min) (cont.)</a:t>
             </a:r>
             <a:endParaRPr lang="en-US" sz="1800" dirty="0"/>
           </a:p>
@@ -3356,8 +3734,8 @@
         </p:nvSpPr>
         <p:spPr>
           <a:xfrm>
-            <a:off x="406301" y="870942"/>
-            <a:ext cx="8498026" cy="426541"/>
+            <a:off x="634901" y="883593"/>
+            <a:ext cx="8102798" cy="487561"/>
           </a:xfrm>
           <a:prstGeom prst="rect">
             <a:avLst/>
@@ -3369,6 +3747,92 @@
           <a:bodyPr wrap="square" lIns="0" tIns="0" rIns="0" bIns="0" rtlCol="0" anchor="t"/>
           <a:lstStyle/>
           <a:p>
+            <a:pPr algn="l" marL="342900" indent="-342900">
+              <a:lnSpc>
+                <a:spcPts val="1620"/>
+              </a:lnSpc>
+              <a:spcAft>
+                <a:spcPts val="300"/>
+              </a:spcAft>
+              <a:buSzPct val="100000"/>
+              <a:buChar char="•"/>
+            </a:pPr>
+            <a:r>
+              <a:rPr lang="en-US" sz="1200" b="1" dirty="0">
+                <a:solidFill>
+                  <a:srgbClr val="1C2833"/>
+                </a:solidFill>
+                <a:latin typeface="Arial" pitchFamily="34" charset="0"/>
+                <a:ea typeface="Arial" pitchFamily="34" charset="-122"/>
+                <a:cs typeface="Arial" pitchFamily="34" charset="-120"/>
+              </a:rPr>
+              <a:t>Connecting to yesterday's diary.</a:t>
+            </a:r>
+            <a:pPr algn="l" indent="0" marL="0">
+              <a:lnSpc>
+                <a:spcPts val="1620"/>
+              </a:lnSpc>
+              <a:spcAft>
+                <a:spcPts val="300"/>
+              </a:spcAft>
+              <a:buNone/>
+            </a:pPr>
+            <a:r>
+              <a:rPr lang="en-US" sz="1200" dirty="0">
+                <a:solidFill>
+                  <a:srgbClr val="1C2833"/>
+                </a:solidFill>
+                <a:latin typeface="Arial" pitchFamily="34" charset="0"/>
+                <a:ea typeface="Arial" pitchFamily="34" charset="-122"/>
+                <a:cs typeface="Arial" pitchFamily="34" charset="-120"/>
+              </a:rPr>
+              <a:t> Hold up your own diary — </a:t>
+            </a:r>
+            <a:pPr algn="l" indent="0" marL="0">
+              <a:lnSpc>
+                <a:spcPts val="1620"/>
+              </a:lnSpc>
+              <a:spcAft>
+                <a:spcPts val="300"/>
+              </a:spcAft>
+              <a:buNone/>
+            </a:pPr>
+            <a:r>
+              <a:rPr lang="en-US" sz="1200" i="1" dirty="0">
+                <a:solidFill>
+                  <a:srgbClr val="1C2833"/>
+                </a:solidFill>
+                <a:latin typeface="Arial" pitchFamily="34" charset="0"/>
+                <a:ea typeface="Arial" pitchFamily="34" charset="-122"/>
+                <a:cs typeface="Arial" pitchFamily="34" charset="-120"/>
+              </a:rPr>
+              <a:t>"I observed last night, it was a thin crescent right after sunset on the western horizon. That's a waxing crescent — I'm in śukla pakṣa, just a few days after amāvasyā."</a:t>
+            </a:r>
+            <a:endParaRPr lang="en-US" sz="1200" dirty="0"/>
+          </a:p>
+        </p:txBody>
+      </p:sp>
+      <p:sp>
+        <p:nvSpPr>
+          <p:cNvPr id="5" name="Text 3"/>
+          <p:cNvSpPr/>
+          <p:nvPr/>
+        </p:nvSpPr>
+        <p:spPr>
+          <a:xfrm>
+            <a:off x="406301" y="1460004"/>
+            <a:ext cx="8498026" cy="213271"/>
+          </a:xfrm>
+          <a:prstGeom prst="rect">
+            <a:avLst/>
+          </a:prstGeom>
+          <a:noFill/>
+          <a:ln/>
+        </p:spPr>
+        <p:txBody>
+          <a:bodyPr wrap="square" lIns="0" tIns="0" rIns="0" bIns="0" rtlCol="0" anchor="t"/>
+          <a:lstStyle/>
+          <a:p>
             <a:pPr algn="l" indent="0" marL="0">
               <a:lnSpc>
                 <a:spcPts val="1680"/>
@@ -3390,8 +3854,33 @@
                 <a:ea typeface="Arial" pitchFamily="34" charset="-122"/>
                 <a:cs typeface="Arial" pitchFamily="34" charset="-120"/>
               </a:rPr>
-              <a:t>– Paraphrase from </a:t>
-            </a:r>
+              <a:t>Have 3 students share theirs: which pakṣa, how do they know?</a:t>
+            </a:r>
+            <a:endParaRPr lang="en-US" sz="1200" dirty="0"/>
+          </a:p>
+        </p:txBody>
+      </p:sp>
+      <p:sp>
+        <p:nvSpPr>
+          <p:cNvPr id="6" name="Text 4"/>
+          <p:cNvSpPr/>
+          <p:nvPr/>
+        </p:nvSpPr>
+        <p:spPr>
+          <a:xfrm>
+            <a:off x="406301" y="4434929"/>
+            <a:ext cx="8498026" cy="213271"/>
+          </a:xfrm>
+          <a:prstGeom prst="rect">
+            <a:avLst/>
+          </a:prstGeom>
+          <a:noFill/>
+          <a:ln/>
+        </p:spPr>
+        <p:txBody>
+          <a:bodyPr wrap="square" lIns="0" tIns="0" rIns="0" bIns="0" rtlCol="0" anchor="t"/>
+          <a:lstStyle/>
+          <a:p>
             <a:pPr algn="l" indent="0" marL="0">
               <a:lnSpc>
                 <a:spcPts val="1680"/>
@@ -3405,6 +3894,460 @@
               <a:buNone/>
             </a:pPr>
             <a:r>
+              <a:rPr lang="en-US" sz="1200" dirty="0">
+                <a:solidFill>
+                  <a:srgbClr val="1C2833"/>
+                </a:solidFill>
+                <a:latin typeface="Arial" pitchFamily="34" charset="0"/>
+                <a:ea typeface="Arial" pitchFamily="34" charset="-122"/>
+                <a:cs typeface="Arial" pitchFamily="34" charset="-120"/>
+              </a:rPr>
+              <a:t>Middle ·  · IKS Curriculum</a:t>
+            </a:r>
+            <a:endParaRPr lang="en-US" sz="1200" dirty="0"/>
+          </a:p>
+        </p:txBody>
+      </p:sp>
+    </p:spTree>
+  </p:cSld>
+  <p:clrMapOvr>
+    <a:masterClrMapping/>
+  </p:clrMapOvr>
+</p:sld>
+</file>
+
+<file path=ppt/slides/slide13.xml><?xml version="1.0" encoding="utf-8"?>
+<p:sld xmlns:a="http://schemas.openxmlformats.org/drawingml/2006/main" xmlns:r="http://schemas.openxmlformats.org/officeDocument/2006/relationships" xmlns:p="http://schemas.openxmlformats.org/presentationml/2006/main">
+  <p:cSld name="Slide 13">
+    <p:bg>
+      <p:bgPr>
+        <a:solidFill>
+          <a:srgbClr val="FFFFFF"/>
+        </a:solidFill>
+      </p:bgPr>
+    </p:bg>
+    <p:spTree>
+      <p:nvGrpSpPr>
+        <p:cNvPr id="1" name=""/>
+        <p:cNvGrpSpPr/>
+        <p:nvPr/>
+      </p:nvGrpSpPr>
+      <p:grpSpPr>
+        <a:xfrm>
+          <a:off x="0" y="0"/>
+          <a:ext cx="0" cy="0"/>
+          <a:chOff x="0" y="0"/>
+          <a:chExt cx="0" cy="0"/>
+        </a:xfrm>
+      </p:grpSpPr>
+      <p:sp>
+        <p:nvSpPr>
+          <p:cNvPr id="2" name="Text 0"/>
+          <p:cNvSpPr/>
+          <p:nvPr/>
+        </p:nvSpPr>
+        <p:spPr>
+          <a:xfrm>
+            <a:off x="0" y="0"/>
+            <a:ext cx="9144000" cy="101501"/>
+          </a:xfrm>
+          <a:prstGeom prst="rect">
+            <a:avLst/>
+          </a:prstGeom>
+          <a:solidFill>
+            <a:srgbClr val="277884"/>
+          </a:solidFill>
+          <a:ln/>
+        </p:spPr>
+        <p:txBody>
+          <a:bodyPr wrap="square" rtlCol="0" anchor="ctr"/>
+          <a:lstStyle/>
+          <a:p>
+            <a:pPr indent="0" marL="0">
+              <a:buNone/>
+            </a:pPr>
+            <a:endParaRPr lang="en-US" dirty="0"/>
+          </a:p>
+        </p:txBody>
+      </p:sp>
+      <p:sp>
+        <p:nvSpPr>
+          <p:cNvPr id="3" name="Text 1"/>
+          <p:cNvSpPr/>
+          <p:nvPr/>
+        </p:nvSpPr>
+        <p:spPr>
+          <a:xfrm>
+            <a:off x="406301" y="457051"/>
+            <a:ext cx="8498026" cy="274290"/>
+          </a:xfrm>
+          <a:prstGeom prst="rect">
+            <a:avLst/>
+          </a:prstGeom>
+          <a:noFill/>
+          <a:ln/>
+        </p:spPr>
+        <p:txBody>
+          <a:bodyPr wrap="square" lIns="0" tIns="0" rIns="0" bIns="0" rtlCol="0" anchor="t"/>
+          <a:lstStyle/>
+          <a:p>
+            <a:pPr algn="l" indent="0" marL="0">
+              <a:lnSpc>
+                <a:spcPts val="2160"/>
+              </a:lnSpc>
+              <a:spcBef>
+                <a:spcPts val="600"/>
+              </a:spcBef>
+              <a:spcAft>
+                <a:spcPts val="800"/>
+              </a:spcAft>
+              <a:buNone/>
+            </a:pPr>
+            <a:r>
+              <a:rPr lang="en-US" sz="1800" b="1" dirty="0">
+                <a:solidFill>
+                  <a:srgbClr val="FE4447"/>
+                </a:solidFill>
+                <a:latin typeface="Georgia" pitchFamily="34" charset="0"/>
+                <a:ea typeface="Georgia" pitchFamily="34" charset="-122"/>
+                <a:cs typeface="Georgia" pitchFamily="34" charset="-120"/>
+              </a:rPr>
+              <a:t>Activity (15 min) — Sort the shapes</a:t>
+            </a:r>
+            <a:endParaRPr lang="en-US" sz="1800" dirty="0"/>
+          </a:p>
+        </p:txBody>
+      </p:sp>
+      <p:sp>
+        <p:nvSpPr>
+          <p:cNvPr id="4" name="Text 2"/>
+          <p:cNvSpPr/>
+          <p:nvPr/>
+        </p:nvSpPr>
+        <p:spPr>
+          <a:xfrm>
+            <a:off x="406301" y="870942"/>
+            <a:ext cx="8498026" cy="213271"/>
+          </a:xfrm>
+          <a:prstGeom prst="rect">
+            <a:avLst/>
+          </a:prstGeom>
+          <a:noFill/>
+          <a:ln/>
+        </p:spPr>
+        <p:txBody>
+          <a:bodyPr wrap="square" lIns="0" tIns="0" rIns="0" bIns="0" rtlCol="0" anchor="t"/>
+          <a:lstStyle/>
+          <a:p>
+            <a:pPr algn="l" indent="0" marL="0">
+              <a:lnSpc>
+                <a:spcPts val="1680"/>
+              </a:lnSpc>
+              <a:spcBef>
+                <a:spcPts val="300"/>
+              </a:spcBef>
+              <a:spcAft>
+                <a:spcPts val="300"/>
+              </a:spcAft>
+              <a:buNone/>
+            </a:pPr>
+            <a:r>
+              <a:rPr lang="en-US" sz="1200" dirty="0">
+                <a:solidFill>
+                  <a:srgbClr val="1C2833"/>
+                </a:solidFill>
+                <a:latin typeface="Arial" pitchFamily="34" charset="0"/>
+                <a:ea typeface="Arial" pitchFamily="34" charset="-122"/>
+                <a:cs typeface="Arial" pitchFamily="34" charset="-120"/>
+              </a:rPr>
+              <a:t>On the board, draw 8 Moon shapes (you sketched these yesterday in the demo). Number them 1–8 in random order.</a:t>
+            </a:r>
+            <a:endParaRPr lang="en-US" sz="1200" dirty="0"/>
+          </a:p>
+        </p:txBody>
+      </p:sp>
+      <p:sp>
+        <p:nvSpPr>
+          <p:cNvPr id="5" name="Text 3"/>
+          <p:cNvSpPr/>
+          <p:nvPr/>
+        </p:nvSpPr>
+        <p:spPr>
+          <a:xfrm>
+            <a:off x="406301" y="1160413"/>
+            <a:ext cx="8498026" cy="213271"/>
+          </a:xfrm>
+          <a:prstGeom prst="rect">
+            <a:avLst/>
+          </a:prstGeom>
+          <a:noFill/>
+          <a:ln/>
+        </p:spPr>
+        <p:txBody>
+          <a:bodyPr wrap="square" lIns="0" tIns="0" rIns="0" bIns="0" rtlCol="0" anchor="t"/>
+          <a:lstStyle/>
+          <a:p>
+            <a:pPr algn="l" indent="0" marL="0">
+              <a:lnSpc>
+                <a:spcPts val="1680"/>
+              </a:lnSpc>
+              <a:spcBef>
+                <a:spcPts val="300"/>
+              </a:spcBef>
+              <a:spcAft>
+                <a:spcPts val="300"/>
+              </a:spcAft>
+              <a:buNone/>
+            </a:pPr>
+            <a:r>
+              <a:rPr lang="en-US" sz="1200" dirty="0">
+                <a:solidFill>
+                  <a:srgbClr val="1C2833"/>
+                </a:solidFill>
+                <a:latin typeface="Arial" pitchFamily="34" charset="0"/>
+                <a:ea typeface="Arial" pitchFamily="34" charset="-122"/>
+                <a:cs typeface="Arial" pitchFamily="34" charset="-120"/>
+              </a:rPr>
+              <a:t>In pairs, students:</a:t>
+            </a:r>
+            <a:endParaRPr lang="en-US" sz="1200" dirty="0"/>
+          </a:p>
+        </p:txBody>
+      </p:sp>
+      <p:sp>
+        <p:nvSpPr>
+          <p:cNvPr id="6" name="Text 4"/>
+          <p:cNvSpPr/>
+          <p:nvPr/>
+        </p:nvSpPr>
+        <p:spPr>
+          <a:xfrm>
+            <a:off x="406301" y="4434929"/>
+            <a:ext cx="8498026" cy="213271"/>
+          </a:xfrm>
+          <a:prstGeom prst="rect">
+            <a:avLst/>
+          </a:prstGeom>
+          <a:noFill/>
+          <a:ln/>
+        </p:spPr>
+        <p:txBody>
+          <a:bodyPr wrap="square" lIns="0" tIns="0" rIns="0" bIns="0" rtlCol="0" anchor="t"/>
+          <a:lstStyle/>
+          <a:p>
+            <a:pPr algn="l" indent="0" marL="0">
+              <a:lnSpc>
+                <a:spcPts val="1680"/>
+              </a:lnSpc>
+              <a:spcBef>
+                <a:spcPts val="300"/>
+              </a:spcBef>
+              <a:spcAft>
+                <a:spcPts val="300"/>
+              </a:spcAft>
+              <a:buNone/>
+            </a:pPr>
+            <a:r>
+              <a:rPr lang="en-US" sz="1200" dirty="0">
+                <a:solidFill>
+                  <a:srgbClr val="1C2833"/>
+                </a:solidFill>
+                <a:latin typeface="Arial" pitchFamily="34" charset="0"/>
+                <a:ea typeface="Arial" pitchFamily="34" charset="-122"/>
+                <a:cs typeface="Arial" pitchFamily="34" charset="-120"/>
+              </a:rPr>
+              <a:t>Middle ·  · IKS Curriculum</a:t>
+            </a:r>
+            <a:endParaRPr lang="en-US" sz="1200" dirty="0"/>
+          </a:p>
+        </p:txBody>
+      </p:sp>
+    </p:spTree>
+  </p:cSld>
+  <p:clrMapOvr>
+    <a:masterClrMapping/>
+  </p:clrMapOvr>
+</p:sld>
+</file>
+
+<file path=ppt/slides/slide14.xml><?xml version="1.0" encoding="utf-8"?>
+<p:sld xmlns:a="http://schemas.openxmlformats.org/drawingml/2006/main" xmlns:r="http://schemas.openxmlformats.org/officeDocument/2006/relationships" xmlns:p="http://schemas.openxmlformats.org/presentationml/2006/main">
+  <p:cSld name="Slide 14">
+    <p:bg>
+      <p:bgPr>
+        <a:solidFill>
+          <a:srgbClr val="FFFFFF"/>
+        </a:solidFill>
+      </p:bgPr>
+    </p:bg>
+    <p:spTree>
+      <p:nvGrpSpPr>
+        <p:cNvPr id="1" name=""/>
+        <p:cNvGrpSpPr/>
+        <p:nvPr/>
+      </p:nvGrpSpPr>
+      <p:grpSpPr>
+        <a:xfrm>
+          <a:off x="0" y="0"/>
+          <a:ext cx="0" cy="0"/>
+          <a:chOff x="0" y="0"/>
+          <a:chExt cx="0" cy="0"/>
+        </a:xfrm>
+      </p:grpSpPr>
+      <p:sp>
+        <p:nvSpPr>
+          <p:cNvPr id="2" name="Text 0"/>
+          <p:cNvSpPr/>
+          <p:nvPr/>
+        </p:nvSpPr>
+        <p:spPr>
+          <a:xfrm>
+            <a:off x="0" y="0"/>
+            <a:ext cx="9144000" cy="101501"/>
+          </a:xfrm>
+          <a:prstGeom prst="rect">
+            <a:avLst/>
+          </a:prstGeom>
+          <a:solidFill>
+            <a:srgbClr val="277884"/>
+          </a:solidFill>
+          <a:ln/>
+        </p:spPr>
+        <p:txBody>
+          <a:bodyPr wrap="square" rtlCol="0" anchor="ctr"/>
+          <a:lstStyle/>
+          <a:p>
+            <a:pPr indent="0" marL="0">
+              <a:buNone/>
+            </a:pPr>
+            <a:endParaRPr lang="en-US" dirty="0"/>
+          </a:p>
+        </p:txBody>
+      </p:sp>
+      <p:sp>
+        <p:nvSpPr>
+          <p:cNvPr id="3" name="Text 1"/>
+          <p:cNvSpPr/>
+          <p:nvPr/>
+        </p:nvSpPr>
+        <p:spPr>
+          <a:xfrm>
+            <a:off x="406301" y="457051"/>
+            <a:ext cx="8498026" cy="274290"/>
+          </a:xfrm>
+          <a:prstGeom prst="rect">
+            <a:avLst/>
+          </a:prstGeom>
+          <a:noFill/>
+          <a:ln/>
+        </p:spPr>
+        <p:txBody>
+          <a:bodyPr wrap="square" lIns="0" tIns="0" rIns="0" bIns="0" rtlCol="0" anchor="t"/>
+          <a:lstStyle/>
+          <a:p>
+            <a:pPr algn="l" indent="0" marL="0">
+              <a:lnSpc>
+                <a:spcPts val="2160"/>
+              </a:lnSpc>
+              <a:spcBef>
+                <a:spcPts val="600"/>
+              </a:spcBef>
+              <a:spcAft>
+                <a:spcPts val="800"/>
+              </a:spcAft>
+              <a:buNone/>
+            </a:pPr>
+            <a:r>
+              <a:rPr lang="en-US" sz="1800" b="1" dirty="0">
+                <a:solidFill>
+                  <a:srgbClr val="FE4447"/>
+                </a:solidFill>
+                <a:latin typeface="Georgia" pitchFamily="34" charset="0"/>
+                <a:ea typeface="Georgia" pitchFamily="34" charset="-122"/>
+                <a:cs typeface="Georgia" pitchFamily="34" charset="-120"/>
+              </a:rPr>
+              <a:t>Activity (15 min) — Sort the shapes (cont.)</a:t>
+            </a:r>
+            <a:endParaRPr lang="en-US" sz="1800" dirty="0"/>
+          </a:p>
+        </p:txBody>
+      </p:sp>
+      <p:sp>
+        <p:nvSpPr>
+          <p:cNvPr id="4" name="Text 2"/>
+          <p:cNvSpPr/>
+          <p:nvPr/>
+        </p:nvSpPr>
+        <p:spPr>
+          <a:xfrm>
+            <a:off x="634901" y="883593"/>
+            <a:ext cx="8102798" cy="769441"/>
+          </a:xfrm>
+          <a:prstGeom prst="rect">
+            <a:avLst/>
+          </a:prstGeom>
+          <a:noFill/>
+          <a:ln/>
+        </p:spPr>
+        <p:txBody>
+          <a:bodyPr wrap="square" lIns="0" tIns="0" rIns="0" bIns="0" rtlCol="0" anchor="t"/>
+          <a:lstStyle/>
+          <a:p>
+            <a:pPr algn="l" marL="342900" indent="-342900">
+              <a:lnSpc>
+                <a:spcPts val="1620"/>
+              </a:lnSpc>
+              <a:spcAft>
+                <a:spcPts val="300"/>
+              </a:spcAft>
+              <a:buSzPct val="100000"/>
+              <a:buChar char="•"/>
+            </a:pPr>
+            <a:r>
+              <a:rPr lang="en-US" sz="1200" dirty="0">
+                <a:solidFill>
+                  <a:srgbClr val="1C2833"/>
+                </a:solidFill>
+                <a:latin typeface="Arial" pitchFamily="34" charset="0"/>
+                <a:ea typeface="Arial" pitchFamily="34" charset="-122"/>
+                <a:cs typeface="Arial" pitchFamily="34" charset="-120"/>
+              </a:rPr>
+              <a:t>Copy the 8 shapes (small, in a row) in their notebook.</a:t>
+            </a:r>
+            <a:endParaRPr lang="en-US" sz="1200" dirty="0"/>
+          </a:p>
+          <a:p>
+            <a:pPr algn="l" marL="342900" indent="-342900">
+              <a:lnSpc>
+                <a:spcPts val="1620"/>
+              </a:lnSpc>
+              <a:spcAft>
+                <a:spcPts val="300"/>
+              </a:spcAft>
+              <a:buSzPct val="100000"/>
+              <a:buChar char="•"/>
+            </a:pPr>
+            <a:r>
+              <a:rPr lang="en-US" sz="1200" dirty="0">
+                <a:solidFill>
+                  <a:srgbClr val="1C2833"/>
+                </a:solidFill>
+                <a:latin typeface="Arial" pitchFamily="34" charset="0"/>
+                <a:ea typeface="Arial" pitchFamily="34" charset="-122"/>
+                <a:cs typeface="Arial" pitchFamily="34" charset="-120"/>
+              </a:rPr>
+              <a:t>Label each as </a:t>
+            </a:r>
+            <a:pPr algn="l" indent="0" marL="0">
+              <a:lnSpc>
+                <a:spcPts val="1620"/>
+              </a:lnSpc>
+              <a:spcAft>
+                <a:spcPts val="300"/>
+              </a:spcAft>
+              <a:buNone/>
+            </a:pPr>
+            <a:r>
               <a:rPr lang="en-US" sz="1200" i="1" dirty="0">
                 <a:solidFill>
                   <a:srgbClr val="1C2833"/>
@@ -3413,8 +4356,157 @@
                 <a:ea typeface="Arial" pitchFamily="34" charset="-122"/>
                 <a:cs typeface="Arial" pitchFamily="34" charset="-120"/>
               </a:rPr>
-              <a:t>Sūrya-siddhānta</a:t>
-            </a:r>
+              <a:t>śukla</a:t>
+            </a:r>
+            <a:pPr algn="l" indent="0" marL="0">
+              <a:lnSpc>
+                <a:spcPts val="1620"/>
+              </a:lnSpc>
+              <a:spcAft>
+                <a:spcPts val="300"/>
+              </a:spcAft>
+              <a:buNone/>
+            </a:pPr>
+            <a:r>
+              <a:rPr lang="en-US" sz="1200" dirty="0">
+                <a:solidFill>
+                  <a:srgbClr val="1C2833"/>
+                </a:solidFill>
+                <a:latin typeface="Arial" pitchFamily="34" charset="0"/>
+                <a:ea typeface="Arial" pitchFamily="34" charset="-122"/>
+                <a:cs typeface="Arial" pitchFamily="34" charset="-120"/>
+              </a:rPr>
+              <a:t> or </a:t>
+            </a:r>
+            <a:pPr algn="l" indent="0" marL="0">
+              <a:lnSpc>
+                <a:spcPts val="1620"/>
+              </a:lnSpc>
+              <a:spcAft>
+                <a:spcPts val="300"/>
+              </a:spcAft>
+              <a:buNone/>
+            </a:pPr>
+            <a:r>
+              <a:rPr lang="en-US" sz="1200" i="1" dirty="0">
+                <a:solidFill>
+                  <a:srgbClr val="1C2833"/>
+                </a:solidFill>
+                <a:latin typeface="Arial" pitchFamily="34" charset="0"/>
+                <a:ea typeface="Arial" pitchFamily="34" charset="-122"/>
+                <a:cs typeface="Arial" pitchFamily="34" charset="-120"/>
+              </a:rPr>
+              <a:t>kṛṣṇa</a:t>
+            </a:r>
+            <a:pPr algn="l" indent="0" marL="0">
+              <a:lnSpc>
+                <a:spcPts val="1620"/>
+              </a:lnSpc>
+              <a:spcAft>
+                <a:spcPts val="300"/>
+              </a:spcAft>
+              <a:buNone/>
+            </a:pPr>
+            <a:r>
+              <a:rPr lang="en-US" sz="1200" dirty="0">
+                <a:solidFill>
+                  <a:srgbClr val="1C2833"/>
+                </a:solidFill>
+                <a:latin typeface="Arial" pitchFamily="34" charset="0"/>
+                <a:ea typeface="Arial" pitchFamily="34" charset="-122"/>
+                <a:cs typeface="Arial" pitchFamily="34" charset="-120"/>
+              </a:rPr>
+              <a:t> — and give a reason.</a:t>
+            </a:r>
+            <a:endParaRPr lang="en-US" sz="1200" dirty="0"/>
+          </a:p>
+          <a:p>
+            <a:pPr algn="l" marL="342900" indent="-342900">
+              <a:lnSpc>
+                <a:spcPts val="1620"/>
+              </a:lnSpc>
+              <a:spcAft>
+                <a:spcPts val="300"/>
+              </a:spcAft>
+              <a:buSzPct val="100000"/>
+              <a:buChar char="•"/>
+            </a:pPr>
+            <a:r>
+              <a:rPr lang="en-US" sz="1200" dirty="0">
+                <a:solidFill>
+                  <a:srgbClr val="1C2833"/>
+                </a:solidFill>
+                <a:latin typeface="Arial" pitchFamily="34" charset="0"/>
+                <a:ea typeface="Arial" pitchFamily="34" charset="-122"/>
+                <a:cs typeface="Arial" pitchFamily="34" charset="-120"/>
+              </a:rPr>
+              <a:t>Number them in the order they would appear across a lunar month, starting from </a:t>
+            </a:r>
+            <a:pPr algn="l" indent="0" marL="0">
+              <a:lnSpc>
+                <a:spcPts val="1620"/>
+              </a:lnSpc>
+              <a:spcAft>
+                <a:spcPts val="300"/>
+              </a:spcAft>
+              <a:buNone/>
+            </a:pPr>
+            <a:r>
+              <a:rPr lang="en-US" sz="1200" i="1" dirty="0">
+                <a:solidFill>
+                  <a:srgbClr val="1C2833"/>
+                </a:solidFill>
+                <a:latin typeface="Arial" pitchFamily="34" charset="0"/>
+                <a:ea typeface="Arial" pitchFamily="34" charset="-122"/>
+                <a:cs typeface="Arial" pitchFamily="34" charset="-120"/>
+              </a:rPr>
+              <a:t>amāvasyā</a:t>
+            </a:r>
+            <a:pPr algn="l" indent="0" marL="0">
+              <a:lnSpc>
+                <a:spcPts val="1620"/>
+              </a:lnSpc>
+              <a:spcAft>
+                <a:spcPts val="300"/>
+              </a:spcAft>
+              <a:buNone/>
+            </a:pPr>
+            <a:r>
+              <a:rPr lang="en-US" sz="1200" dirty="0">
+                <a:solidFill>
+                  <a:srgbClr val="1C2833"/>
+                </a:solidFill>
+                <a:latin typeface="Arial" pitchFamily="34" charset="0"/>
+                <a:ea typeface="Arial" pitchFamily="34" charset="-122"/>
+                <a:cs typeface="Arial" pitchFamily="34" charset="-120"/>
+              </a:rPr>
+              <a:t>.</a:t>
+            </a:r>
+            <a:endParaRPr lang="en-US" sz="1200" dirty="0"/>
+          </a:p>
+        </p:txBody>
+      </p:sp>
+      <p:sp>
+        <p:nvSpPr>
+          <p:cNvPr id="5" name="Text 3"/>
+          <p:cNvSpPr/>
+          <p:nvPr/>
+        </p:nvSpPr>
+        <p:spPr>
+          <a:xfrm>
+            <a:off x="406301" y="1741884"/>
+            <a:ext cx="8498026" cy="213271"/>
+          </a:xfrm>
+          <a:prstGeom prst="rect">
+            <a:avLst/>
+          </a:prstGeom>
+          <a:noFill/>
+          <a:ln/>
+        </p:spPr>
+        <p:txBody>
+          <a:bodyPr wrap="square" lIns="0" tIns="0" rIns="0" bIns="0" rtlCol="0" anchor="t"/>
+          <a:lstStyle/>
+          <a:p>
             <a:pPr algn="l" indent="0" marL="0">
               <a:lnSpc>
                 <a:spcPts val="1680"/>
@@ -3436,7 +4528,2228 @@
                 <a:ea typeface="Arial" pitchFamily="34" charset="-122"/>
                 <a:cs typeface="Arial" pitchFamily="34" charset="-120"/>
               </a:rPr>
-              <a:t>, chapter 2 (lunar motion): the lunar month is divided into 30 tithis, distributed 15 each across the two pakṣas. Cited by text name only.</a:t>
+              <a:t>Discuss with a different pair (3 min): did you disagree on any? Which?</a:t>
+            </a:r>
+            <a:endParaRPr lang="en-US" sz="1200" dirty="0"/>
+          </a:p>
+        </p:txBody>
+      </p:sp>
+      <p:sp>
+        <p:nvSpPr>
+          <p:cNvPr id="6" name="Text 4"/>
+          <p:cNvSpPr/>
+          <p:nvPr/>
+        </p:nvSpPr>
+        <p:spPr>
+          <a:xfrm>
+            <a:off x="406301" y="4434929"/>
+            <a:ext cx="8498026" cy="213271"/>
+          </a:xfrm>
+          <a:prstGeom prst="rect">
+            <a:avLst/>
+          </a:prstGeom>
+          <a:noFill/>
+          <a:ln/>
+        </p:spPr>
+        <p:txBody>
+          <a:bodyPr wrap="square" lIns="0" tIns="0" rIns="0" bIns="0" rtlCol="0" anchor="t"/>
+          <a:lstStyle/>
+          <a:p>
+            <a:pPr algn="l" indent="0" marL="0">
+              <a:lnSpc>
+                <a:spcPts val="1680"/>
+              </a:lnSpc>
+              <a:spcBef>
+                <a:spcPts val="300"/>
+              </a:spcBef>
+              <a:spcAft>
+                <a:spcPts val="300"/>
+              </a:spcAft>
+              <a:buNone/>
+            </a:pPr>
+            <a:r>
+              <a:rPr lang="en-US" sz="1200" dirty="0">
+                <a:solidFill>
+                  <a:srgbClr val="1C2833"/>
+                </a:solidFill>
+                <a:latin typeface="Arial" pitchFamily="34" charset="0"/>
+                <a:ea typeface="Arial" pitchFamily="34" charset="-122"/>
+                <a:cs typeface="Arial" pitchFamily="34" charset="-120"/>
+              </a:rPr>
+              <a:t>Middle ·  · IKS Curriculum</a:t>
+            </a:r>
+            <a:endParaRPr lang="en-US" sz="1200" dirty="0"/>
+          </a:p>
+        </p:txBody>
+      </p:sp>
+    </p:spTree>
+  </p:cSld>
+  <p:clrMapOvr>
+    <a:masterClrMapping/>
+  </p:clrMapOvr>
+</p:sld>
+</file>
+
+<file path=ppt/slides/slide15.xml><?xml version="1.0" encoding="utf-8"?>
+<p:sld xmlns:a="http://schemas.openxmlformats.org/drawingml/2006/main" xmlns:r="http://schemas.openxmlformats.org/officeDocument/2006/relationships" xmlns:p="http://schemas.openxmlformats.org/presentationml/2006/main">
+  <p:cSld name="Slide 15">
+    <p:bg>
+      <p:bgPr>
+        <a:solidFill>
+          <a:srgbClr val="FFFFFF"/>
+        </a:solidFill>
+      </p:bgPr>
+    </p:bg>
+    <p:spTree>
+      <p:nvGrpSpPr>
+        <p:cNvPr id="1" name=""/>
+        <p:cNvGrpSpPr/>
+        <p:nvPr/>
+      </p:nvGrpSpPr>
+      <p:grpSpPr>
+        <a:xfrm>
+          <a:off x="0" y="0"/>
+          <a:ext cx="0" cy="0"/>
+          <a:chOff x="0" y="0"/>
+          <a:chExt cx="0" cy="0"/>
+        </a:xfrm>
+      </p:grpSpPr>
+      <p:sp>
+        <p:nvSpPr>
+          <p:cNvPr id="2" name="Text 0"/>
+          <p:cNvSpPr/>
+          <p:nvPr/>
+        </p:nvSpPr>
+        <p:spPr>
+          <a:xfrm>
+            <a:off x="0" y="0"/>
+            <a:ext cx="9144000" cy="101501"/>
+          </a:xfrm>
+          <a:prstGeom prst="rect">
+            <a:avLst/>
+          </a:prstGeom>
+          <a:solidFill>
+            <a:srgbClr val="277884"/>
+          </a:solidFill>
+          <a:ln/>
+        </p:spPr>
+        <p:txBody>
+          <a:bodyPr wrap="square" rtlCol="0" anchor="ctr"/>
+          <a:lstStyle/>
+          <a:p>
+            <a:pPr indent="0" marL="0">
+              <a:buNone/>
+            </a:pPr>
+            <a:endParaRPr lang="en-US" dirty="0"/>
+          </a:p>
+        </p:txBody>
+      </p:sp>
+      <p:sp>
+        <p:nvSpPr>
+          <p:cNvPr id="3" name="Text 1"/>
+          <p:cNvSpPr/>
+          <p:nvPr/>
+        </p:nvSpPr>
+        <p:spPr>
+          <a:xfrm>
+            <a:off x="406301" y="457051"/>
+            <a:ext cx="8498026" cy="274290"/>
+          </a:xfrm>
+          <a:prstGeom prst="rect">
+            <a:avLst/>
+          </a:prstGeom>
+          <a:noFill/>
+          <a:ln/>
+        </p:spPr>
+        <p:txBody>
+          <a:bodyPr wrap="square" lIns="0" tIns="0" rIns="0" bIns="0" rtlCol="0" anchor="t"/>
+          <a:lstStyle/>
+          <a:p>
+            <a:pPr algn="l" indent="0" marL="0">
+              <a:lnSpc>
+                <a:spcPts val="2160"/>
+              </a:lnSpc>
+              <a:spcBef>
+                <a:spcPts val="600"/>
+              </a:spcBef>
+              <a:spcAft>
+                <a:spcPts val="800"/>
+              </a:spcAft>
+              <a:buNone/>
+            </a:pPr>
+            <a:r>
+              <a:rPr lang="en-US" sz="1800" b="1" dirty="0">
+                <a:solidFill>
+                  <a:srgbClr val="FE4447"/>
+                </a:solidFill>
+                <a:latin typeface="Georgia" pitchFamily="34" charset="0"/>
+                <a:ea typeface="Georgia" pitchFamily="34" charset="-122"/>
+                <a:cs typeface="Georgia" pitchFamily="34" charset="-120"/>
+              </a:rPr>
+              <a:t>Wrap-up (5 min)</a:t>
+            </a:r>
+            <a:endParaRPr lang="en-US" sz="1800" dirty="0"/>
+          </a:p>
+        </p:txBody>
+      </p:sp>
+      <p:sp>
+        <p:nvSpPr>
+          <p:cNvPr id="4" name="Text 2"/>
+          <p:cNvSpPr/>
+          <p:nvPr/>
+        </p:nvSpPr>
+        <p:spPr>
+          <a:xfrm>
+            <a:off x="634901" y="883593"/>
+            <a:ext cx="8102798" cy="525661"/>
+          </a:xfrm>
+          <a:prstGeom prst="rect">
+            <a:avLst/>
+          </a:prstGeom>
+          <a:noFill/>
+          <a:ln/>
+        </p:spPr>
+        <p:txBody>
+          <a:bodyPr wrap="square" lIns="0" tIns="0" rIns="0" bIns="0" rtlCol="0" anchor="t"/>
+          <a:lstStyle/>
+          <a:p>
+            <a:pPr algn="l" marL="342900" indent="-342900">
+              <a:lnSpc>
+                <a:spcPts val="1620"/>
+              </a:lnSpc>
+              <a:spcAft>
+                <a:spcPts val="300"/>
+              </a:spcAft>
+              <a:buSzPct val="100000"/>
+              <a:buChar char="•"/>
+            </a:pPr>
+            <a:r>
+              <a:rPr lang="en-US" sz="1200" b="1" dirty="0">
+                <a:solidFill>
+                  <a:srgbClr val="1C2833"/>
+                </a:solidFill>
+                <a:latin typeface="Arial" pitchFamily="34" charset="0"/>
+                <a:ea typeface="Arial" pitchFamily="34" charset="-122"/>
+                <a:cs typeface="Arial" pitchFamily="34" charset="-120"/>
+              </a:rPr>
+              <a:t>Exit ticket (1 min):</a:t>
+            </a:r>
+            <a:pPr algn="l" indent="0" marL="0">
+              <a:lnSpc>
+                <a:spcPts val="1620"/>
+              </a:lnSpc>
+              <a:spcAft>
+                <a:spcPts val="300"/>
+              </a:spcAft>
+              <a:buNone/>
+            </a:pPr>
+            <a:r>
+              <a:rPr lang="en-US" sz="1200" dirty="0">
+                <a:solidFill>
+                  <a:srgbClr val="1C2833"/>
+                </a:solidFill>
+                <a:latin typeface="Arial" pitchFamily="34" charset="0"/>
+                <a:ea typeface="Arial" pitchFamily="34" charset="-122"/>
+                <a:cs typeface="Arial" pitchFamily="34" charset="-120"/>
+              </a:rPr>
+              <a:t> </a:t>
+            </a:r>
+            <a:pPr algn="l" indent="0" marL="0">
+              <a:lnSpc>
+                <a:spcPts val="1620"/>
+              </a:lnSpc>
+              <a:spcAft>
+                <a:spcPts val="300"/>
+              </a:spcAft>
+              <a:buNone/>
+            </a:pPr>
+            <a:r>
+              <a:rPr lang="en-US" sz="1200" i="1" dirty="0">
+                <a:solidFill>
+                  <a:srgbClr val="1C2833"/>
+                </a:solidFill>
+                <a:latin typeface="Arial" pitchFamily="34" charset="0"/>
+                <a:ea typeface="Arial" pitchFamily="34" charset="-122"/>
+                <a:cs typeface="Arial" pitchFamily="34" charset="-120"/>
+              </a:rPr>
+              <a:t>"What is the difference between śukla pakṣa and kṛṣṇa pakṣa? Use one sentence."</a:t>
+            </a:r>
+            <a:endParaRPr lang="en-US" sz="1200" dirty="0"/>
+          </a:p>
+          <a:p>
+            <a:pPr algn="l" marL="342900" indent="-342900">
+              <a:lnSpc>
+                <a:spcPts val="1620"/>
+              </a:lnSpc>
+              <a:spcAft>
+                <a:spcPts val="300"/>
+              </a:spcAft>
+              <a:buSzPct val="100000"/>
+              <a:buChar char="•"/>
+            </a:pPr>
+            <a:r>
+              <a:rPr lang="en-US" sz="1200" dirty="0">
+                <a:solidFill>
+                  <a:srgbClr val="1C2833"/>
+                </a:solidFill>
+                <a:latin typeface="Arial" pitchFamily="34" charset="0"/>
+                <a:ea typeface="Arial" pitchFamily="34" charset="-122"/>
+                <a:cs typeface="Arial" pitchFamily="34" charset="-120"/>
+              </a:rPr>
+              <a:t>Preview Day 3: </a:t>
+            </a:r>
+            <a:pPr algn="l" indent="0" marL="0">
+              <a:lnSpc>
+                <a:spcPts val="1620"/>
+              </a:lnSpc>
+              <a:spcAft>
+                <a:spcPts val="300"/>
+              </a:spcAft>
+              <a:buNone/>
+            </a:pPr>
+            <a:r>
+              <a:rPr lang="en-US" sz="1200" i="1" dirty="0">
+                <a:solidFill>
+                  <a:srgbClr val="1C2833"/>
+                </a:solidFill>
+                <a:latin typeface="Arial" pitchFamily="34" charset="0"/>
+                <a:ea typeface="Arial" pitchFamily="34" charset="-122"/>
+                <a:cs typeface="Arial" pitchFamily="34" charset="-120"/>
+              </a:rPr>
+              <a:t>"Tomorrow we name the 15 days within each pakṣa — the tithis."</a:t>
+            </a:r>
+            <a:endParaRPr lang="en-US" sz="1200" dirty="0"/>
+          </a:p>
+        </p:txBody>
+      </p:sp>
+      <p:sp>
+        <p:nvSpPr>
+          <p:cNvPr id="5" name="Text 3"/>
+          <p:cNvSpPr/>
+          <p:nvPr/>
+        </p:nvSpPr>
+        <p:spPr>
+          <a:xfrm>
+            <a:off x="406301" y="4434929"/>
+            <a:ext cx="8498026" cy="213271"/>
+          </a:xfrm>
+          <a:prstGeom prst="rect">
+            <a:avLst/>
+          </a:prstGeom>
+          <a:noFill/>
+          <a:ln/>
+        </p:spPr>
+        <p:txBody>
+          <a:bodyPr wrap="square" lIns="0" tIns="0" rIns="0" bIns="0" rtlCol="0" anchor="t"/>
+          <a:lstStyle/>
+          <a:p>
+            <a:pPr algn="l" indent="0" marL="0">
+              <a:lnSpc>
+                <a:spcPts val="1680"/>
+              </a:lnSpc>
+              <a:spcBef>
+                <a:spcPts val="300"/>
+              </a:spcBef>
+              <a:spcAft>
+                <a:spcPts val="300"/>
+              </a:spcAft>
+              <a:buNone/>
+            </a:pPr>
+            <a:r>
+              <a:rPr lang="en-US" sz="1200" dirty="0">
+                <a:solidFill>
+                  <a:srgbClr val="1C2833"/>
+                </a:solidFill>
+                <a:latin typeface="Arial" pitchFamily="34" charset="0"/>
+                <a:ea typeface="Arial" pitchFamily="34" charset="-122"/>
+                <a:cs typeface="Arial" pitchFamily="34" charset="-120"/>
+              </a:rPr>
+              <a:t>Middle ·  · IKS Curriculum</a:t>
+            </a:r>
+            <a:endParaRPr lang="en-US" sz="1200" dirty="0"/>
+          </a:p>
+        </p:txBody>
+      </p:sp>
+    </p:spTree>
+  </p:cSld>
+  <p:clrMapOvr>
+    <a:masterClrMapping/>
+  </p:clrMapOvr>
+</p:sld>
+</file>
+
+<file path=ppt/slides/slide16.xml><?xml version="1.0" encoding="utf-8"?>
+<p:sld xmlns:a="http://schemas.openxmlformats.org/drawingml/2006/main" xmlns:r="http://schemas.openxmlformats.org/officeDocument/2006/relationships" xmlns:p="http://schemas.openxmlformats.org/presentationml/2006/main">
+  <p:cSld name="Slide 16">
+    <p:bg>
+      <p:bgPr>
+        <a:solidFill>
+          <a:srgbClr val="FFFFFF"/>
+        </a:solidFill>
+      </p:bgPr>
+    </p:bg>
+    <p:spTree>
+      <p:nvGrpSpPr>
+        <p:cNvPr id="1" name=""/>
+        <p:cNvGrpSpPr/>
+        <p:nvPr/>
+      </p:nvGrpSpPr>
+      <p:grpSpPr>
+        <a:xfrm>
+          <a:off x="0" y="0"/>
+          <a:ext cx="0" cy="0"/>
+          <a:chOff x="0" y="0"/>
+          <a:chExt cx="0" cy="0"/>
+        </a:xfrm>
+      </p:grpSpPr>
+      <p:sp>
+        <p:nvSpPr>
+          <p:cNvPr id="2" name="Text 0"/>
+          <p:cNvSpPr/>
+          <p:nvPr/>
+        </p:nvSpPr>
+        <p:spPr>
+          <a:xfrm>
+            <a:off x="0" y="0"/>
+            <a:ext cx="9144000" cy="101501"/>
+          </a:xfrm>
+          <a:prstGeom prst="rect">
+            <a:avLst/>
+          </a:prstGeom>
+          <a:solidFill>
+            <a:srgbClr val="277884"/>
+          </a:solidFill>
+          <a:ln/>
+        </p:spPr>
+        <p:txBody>
+          <a:bodyPr wrap="square" rtlCol="0" anchor="ctr"/>
+          <a:lstStyle/>
+          <a:p>
+            <a:pPr indent="0" marL="0">
+              <a:buNone/>
+            </a:pPr>
+            <a:endParaRPr lang="en-US" dirty="0"/>
+          </a:p>
+        </p:txBody>
+      </p:sp>
+      <p:sp>
+        <p:nvSpPr>
+          <p:cNvPr id="3" name="Text 1"/>
+          <p:cNvSpPr/>
+          <p:nvPr/>
+        </p:nvSpPr>
+        <p:spPr>
+          <a:xfrm>
+            <a:off x="406301" y="457051"/>
+            <a:ext cx="8498026" cy="274290"/>
+          </a:xfrm>
+          <a:prstGeom prst="rect">
+            <a:avLst/>
+          </a:prstGeom>
+          <a:noFill/>
+          <a:ln/>
+        </p:spPr>
+        <p:txBody>
+          <a:bodyPr wrap="square" lIns="0" tIns="0" rIns="0" bIns="0" rtlCol="0" anchor="t"/>
+          <a:lstStyle/>
+          <a:p>
+            <a:pPr algn="l" indent="0" marL="0">
+              <a:lnSpc>
+                <a:spcPts val="2160"/>
+              </a:lnSpc>
+              <a:spcBef>
+                <a:spcPts val="600"/>
+              </a:spcBef>
+              <a:spcAft>
+                <a:spcPts val="800"/>
+              </a:spcAft>
+              <a:buNone/>
+            </a:pPr>
+            <a:r>
+              <a:rPr lang="en-US" sz="1800" b="1" dirty="0">
+                <a:solidFill>
+                  <a:srgbClr val="FE4447"/>
+                </a:solidFill>
+                <a:latin typeface="Georgia" pitchFamily="34" charset="0"/>
+                <a:ea typeface="Georgia" pitchFamily="34" charset="-122"/>
+                <a:cs typeface="Georgia" pitchFamily="34" charset="-120"/>
+              </a:rPr>
+              <a:t>Student-facing content</a:t>
+            </a:r>
+            <a:endParaRPr lang="en-US" sz="1800" dirty="0"/>
+          </a:p>
+        </p:txBody>
+      </p:sp>
+      <p:sp>
+        <p:nvSpPr>
+          <p:cNvPr id="4" name="Text 2"/>
+          <p:cNvSpPr/>
+          <p:nvPr/>
+        </p:nvSpPr>
+        <p:spPr>
+          <a:xfrm>
+            <a:off x="406301" y="883593"/>
+            <a:ext cx="8331398" cy="2419350"/>
+          </a:xfrm>
+          <a:prstGeom prst="rect">
+            <a:avLst/>
+          </a:prstGeom>
+          <a:solidFill>
+            <a:srgbClr val="F4F8F9"/>
+          </a:solidFill>
+          <a:ln/>
+        </p:spPr>
+        <p:txBody>
+          <a:bodyPr wrap="square" rtlCol="0" anchor="ctr"/>
+          <a:lstStyle/>
+          <a:p>
+            <a:pPr indent="0" marL="0">
+              <a:buNone/>
+            </a:pPr>
+            <a:endParaRPr lang="en-US" dirty="0"/>
+          </a:p>
+        </p:txBody>
+      </p:sp>
+      <p:sp>
+        <p:nvSpPr>
+          <p:cNvPr id="5" name="Shape 3"/>
+          <p:cNvSpPr/>
+          <p:nvPr/>
+        </p:nvSpPr>
+        <p:spPr>
+          <a:xfrm>
+            <a:off x="434876" y="883593"/>
+            <a:ext cx="0" cy="2419350"/>
+          </a:xfrm>
+          <a:prstGeom prst="line">
+            <a:avLst/>
+          </a:prstGeom>
+          <a:noFill/>
+          <a:ln w="57150">
+            <a:solidFill>
+              <a:srgbClr val="FE4447"/>
+            </a:solidFill>
+            <a:prstDash val="solid"/>
+          </a:ln>
+        </p:spPr>
+      </p:sp>
+      <p:sp>
+        <p:nvSpPr>
+          <p:cNvPr id="6" name="Text 4"/>
+          <p:cNvSpPr/>
+          <p:nvPr/>
+        </p:nvSpPr>
+        <p:spPr>
+          <a:xfrm>
+            <a:off x="692051" y="1074093"/>
+            <a:ext cx="7973389" cy="230981"/>
+          </a:xfrm>
+          <a:prstGeom prst="rect">
+            <a:avLst/>
+          </a:prstGeom>
+          <a:noFill/>
+          <a:ln/>
+        </p:spPr>
+        <p:txBody>
+          <a:bodyPr wrap="square" lIns="0" tIns="0" rIns="0" bIns="0" rtlCol="0" anchor="t"/>
+          <a:lstStyle/>
+          <a:p>
+            <a:pPr algn="l" indent="0" marL="0">
+              <a:lnSpc>
+                <a:spcPts val="1820"/>
+              </a:lnSpc>
+              <a:spcBef>
+                <a:spcPts val="300"/>
+              </a:spcBef>
+              <a:spcAft>
+                <a:spcPts val="300"/>
+              </a:spcAft>
+              <a:buNone/>
+            </a:pPr>
+            <a:r>
+              <a:rPr lang="en-US" sz="1300" dirty="0">
+                <a:solidFill>
+                  <a:srgbClr val="1C2833"/>
+                </a:solidFill>
+                <a:latin typeface="Georgia" pitchFamily="34" charset="0"/>
+                <a:ea typeface="Georgia" pitchFamily="34" charset="-122"/>
+                <a:cs typeface="Georgia" pitchFamily="34" charset="-120"/>
+              </a:rPr>
+              <a:t>*</a:t>
+            </a:r>
+            <a:pPr algn="l" indent="0" marL="0">
+              <a:lnSpc>
+                <a:spcPts val="1820"/>
+              </a:lnSpc>
+              <a:spcBef>
+                <a:spcPts val="300"/>
+              </a:spcBef>
+              <a:spcAft>
+                <a:spcPts val="300"/>
+              </a:spcAft>
+              <a:buNone/>
+            </a:pPr>
+            <a:r>
+              <a:rPr lang="en-US" sz="1300" i="1" dirty="0">
+                <a:solidFill>
+                  <a:srgbClr val="1C2833"/>
+                </a:solidFill>
+                <a:latin typeface="Georgia" pitchFamily="34" charset="0"/>
+                <a:ea typeface="Georgia" pitchFamily="34" charset="-122"/>
+                <a:cs typeface="Georgia" pitchFamily="34" charset="-120"/>
+              </a:rPr>
+              <a:t>A lunar month has two halves — two</a:t>
+            </a:r>
+            <a:pPr algn="l" indent="0" marL="0">
+              <a:lnSpc>
+                <a:spcPts val="1820"/>
+              </a:lnSpc>
+              <a:spcBef>
+                <a:spcPts val="300"/>
+              </a:spcBef>
+              <a:spcAft>
+                <a:spcPts val="300"/>
+              </a:spcAft>
+              <a:buNone/>
+            </a:pPr>
+            <a:r>
+              <a:rPr lang="en-US" sz="1300" dirty="0">
+                <a:solidFill>
+                  <a:srgbClr val="1C2833"/>
+                </a:solidFill>
+                <a:latin typeface="Georgia" pitchFamily="34" charset="0"/>
+                <a:ea typeface="Georgia" pitchFamily="34" charset="-122"/>
+                <a:cs typeface="Georgia" pitchFamily="34" charset="-120"/>
+              </a:rPr>
+              <a:t>pakṣas</a:t>
+            </a:r>
+            <a:pPr algn="l" indent="0" marL="0">
+              <a:lnSpc>
+                <a:spcPts val="1820"/>
+              </a:lnSpc>
+              <a:spcBef>
+                <a:spcPts val="300"/>
+              </a:spcBef>
+              <a:spcAft>
+                <a:spcPts val="300"/>
+              </a:spcAft>
+              <a:buNone/>
+            </a:pPr>
+            <a:r>
+              <a:rPr lang="en-US" sz="1300" i="1" dirty="0">
+                <a:solidFill>
+                  <a:srgbClr val="1C2833"/>
+                </a:solidFill>
+                <a:latin typeface="Georgia" pitchFamily="34" charset="0"/>
+                <a:ea typeface="Georgia" pitchFamily="34" charset="-122"/>
+                <a:cs typeface="Georgia" pitchFamily="34" charset="-120"/>
+              </a:rPr>
+              <a:t>.</a:t>
+            </a:r>
+            <a:pPr algn="l" indent="0" marL="0">
+              <a:lnSpc>
+                <a:spcPts val="1820"/>
+              </a:lnSpc>
+              <a:spcBef>
+                <a:spcPts val="300"/>
+              </a:spcBef>
+              <a:spcAft>
+                <a:spcPts val="300"/>
+              </a:spcAft>
+              <a:buNone/>
+            </a:pPr>
+            <a:r>
+              <a:rPr lang="en-US" sz="1300" dirty="0">
+                <a:solidFill>
+                  <a:srgbClr val="1C2833"/>
+                </a:solidFill>
+                <a:latin typeface="Georgia" pitchFamily="34" charset="0"/>
+                <a:ea typeface="Georgia" pitchFamily="34" charset="-122"/>
+                <a:cs typeface="Georgia" pitchFamily="34" charset="-120"/>
+              </a:rPr>
+              <a:t>*</a:t>
+            </a:r>
+            <a:endParaRPr lang="en-US" sz="1300" dirty="0"/>
+          </a:p>
+        </p:txBody>
+      </p:sp>
+      <p:sp>
+        <p:nvSpPr>
+          <p:cNvPr id="7" name="Text 5"/>
+          <p:cNvSpPr/>
+          <p:nvPr/>
+        </p:nvSpPr>
+        <p:spPr>
+          <a:xfrm>
+            <a:off x="692051" y="1343174"/>
+            <a:ext cx="7973389" cy="692944"/>
+          </a:xfrm>
+          <a:prstGeom prst="rect">
+            <a:avLst/>
+          </a:prstGeom>
+          <a:noFill/>
+          <a:ln/>
+        </p:spPr>
+        <p:txBody>
+          <a:bodyPr wrap="square" lIns="0" tIns="0" rIns="0" bIns="0" rtlCol="0" anchor="t"/>
+          <a:lstStyle/>
+          <a:p>
+            <a:pPr algn="l" indent="0" marL="0">
+              <a:lnSpc>
+                <a:spcPts val="1820"/>
+              </a:lnSpc>
+              <a:spcBef>
+                <a:spcPts val="300"/>
+              </a:spcBef>
+              <a:spcAft>
+                <a:spcPts val="300"/>
+              </a:spcAft>
+              <a:buNone/>
+            </a:pPr>
+            <a:r>
+              <a:rPr lang="en-US" sz="1300" dirty="0">
+                <a:solidFill>
+                  <a:srgbClr val="1C2833"/>
+                </a:solidFill>
+                <a:latin typeface="Georgia" pitchFamily="34" charset="0"/>
+                <a:ea typeface="Georgia" pitchFamily="34" charset="-122"/>
+                <a:cs typeface="Georgia" pitchFamily="34" charset="-120"/>
+              </a:rPr>
+              <a:t>| Sanskrit | English | Direction the Moon is heading | |----------|---------|--------------------------------| | </a:t>
+            </a:r>
+            <a:pPr algn="l" indent="0" marL="0">
+              <a:lnSpc>
+                <a:spcPts val="1820"/>
+              </a:lnSpc>
+              <a:spcBef>
+                <a:spcPts val="300"/>
+              </a:spcBef>
+              <a:spcAft>
+                <a:spcPts val="300"/>
+              </a:spcAft>
+              <a:buNone/>
+            </a:pPr>
+            <a:r>
+              <a:rPr lang="en-US" sz="1300" i="1" dirty="0">
+                <a:solidFill>
+                  <a:srgbClr val="1C2833"/>
+                </a:solidFill>
+                <a:latin typeface="Georgia" pitchFamily="34" charset="0"/>
+                <a:ea typeface="Georgia" pitchFamily="34" charset="-122"/>
+                <a:cs typeface="Georgia" pitchFamily="34" charset="-120"/>
+              </a:rPr>
+              <a:t>śukla pakṣa</a:t>
+            </a:r>
+            <a:pPr algn="l" indent="0" marL="0">
+              <a:lnSpc>
+                <a:spcPts val="1820"/>
+              </a:lnSpc>
+              <a:spcBef>
+                <a:spcPts val="300"/>
+              </a:spcBef>
+              <a:spcAft>
+                <a:spcPts val="300"/>
+              </a:spcAft>
+              <a:buNone/>
+            </a:pPr>
+            <a:r>
+              <a:rPr lang="en-US" sz="1300" dirty="0">
+                <a:solidFill>
+                  <a:srgbClr val="1C2833"/>
+                </a:solidFill>
+                <a:latin typeface="Georgia" pitchFamily="34" charset="0"/>
+                <a:ea typeface="Georgia" pitchFamily="34" charset="-122"/>
+                <a:cs typeface="Georgia" pitchFamily="34" charset="-120"/>
+              </a:rPr>
+              <a:t> | bright fortnight | growing — new moon → full moon | | </a:t>
+            </a:r>
+            <a:pPr algn="l" indent="0" marL="0">
+              <a:lnSpc>
+                <a:spcPts val="1820"/>
+              </a:lnSpc>
+              <a:spcBef>
+                <a:spcPts val="300"/>
+              </a:spcBef>
+              <a:spcAft>
+                <a:spcPts val="300"/>
+              </a:spcAft>
+              <a:buNone/>
+            </a:pPr>
+            <a:r>
+              <a:rPr lang="en-US" sz="1300" i="1" dirty="0">
+                <a:solidFill>
+                  <a:srgbClr val="1C2833"/>
+                </a:solidFill>
+                <a:latin typeface="Georgia" pitchFamily="34" charset="0"/>
+                <a:ea typeface="Georgia" pitchFamily="34" charset="-122"/>
+                <a:cs typeface="Georgia" pitchFamily="34" charset="-120"/>
+              </a:rPr>
+              <a:t>kṛṣṇa pakṣa</a:t>
+            </a:r>
+            <a:pPr algn="l" indent="0" marL="0">
+              <a:lnSpc>
+                <a:spcPts val="1820"/>
+              </a:lnSpc>
+              <a:spcBef>
+                <a:spcPts val="300"/>
+              </a:spcBef>
+              <a:spcAft>
+                <a:spcPts val="300"/>
+              </a:spcAft>
+              <a:buNone/>
+            </a:pPr>
+            <a:r>
+              <a:rPr lang="en-US" sz="1300" dirty="0">
+                <a:solidFill>
+                  <a:srgbClr val="1C2833"/>
+                </a:solidFill>
+                <a:latin typeface="Georgia" pitchFamily="34" charset="0"/>
+                <a:ea typeface="Georgia" pitchFamily="34" charset="-122"/>
+                <a:cs typeface="Georgia" pitchFamily="34" charset="-120"/>
+              </a:rPr>
+              <a:t> | dark fortnight | shrinking — full moon → new moon |</a:t>
+            </a:r>
+            <a:endParaRPr lang="en-US" sz="1300" dirty="0"/>
+          </a:p>
+        </p:txBody>
+      </p:sp>
+      <p:sp>
+        <p:nvSpPr>
+          <p:cNvPr id="8" name="Text 6"/>
+          <p:cNvSpPr/>
+          <p:nvPr/>
+        </p:nvSpPr>
+        <p:spPr>
+          <a:xfrm>
+            <a:off x="692051" y="2074218"/>
+            <a:ext cx="7973389" cy="230981"/>
+          </a:xfrm>
+          <a:prstGeom prst="rect">
+            <a:avLst/>
+          </a:prstGeom>
+          <a:noFill/>
+          <a:ln/>
+        </p:spPr>
+        <p:txBody>
+          <a:bodyPr wrap="square" lIns="0" tIns="0" rIns="0" bIns="0" rtlCol="0" anchor="t"/>
+          <a:lstStyle/>
+          <a:p>
+            <a:pPr algn="l" indent="0" marL="0">
+              <a:lnSpc>
+                <a:spcPts val="1820"/>
+              </a:lnSpc>
+              <a:spcBef>
+                <a:spcPts val="300"/>
+              </a:spcBef>
+              <a:spcAft>
+                <a:spcPts val="300"/>
+              </a:spcAft>
+              <a:buNone/>
+            </a:pPr>
+            <a:r>
+              <a:rPr lang="en-US" sz="1300" i="1" dirty="0">
+                <a:solidFill>
+                  <a:srgbClr val="1C2833"/>
+                </a:solidFill>
+                <a:latin typeface="Georgia" pitchFamily="34" charset="0"/>
+                <a:ea typeface="Georgia" pitchFamily="34" charset="-122"/>
+                <a:cs typeface="Georgia" pitchFamily="34" charset="-120"/>
+              </a:rPr>
+              <a:t>Two anchor days bookend the pakṣas:</a:t>
+            </a:r>
+            <a:endParaRPr lang="en-US" sz="1300" dirty="0"/>
+          </a:p>
+        </p:txBody>
+      </p:sp>
+      <p:sp>
+        <p:nvSpPr>
+          <p:cNvPr id="9" name="Text 7"/>
+          <p:cNvSpPr/>
+          <p:nvPr/>
+        </p:nvSpPr>
+        <p:spPr>
+          <a:xfrm>
+            <a:off x="692051" y="2343299"/>
+            <a:ext cx="7973389" cy="230981"/>
+          </a:xfrm>
+          <a:prstGeom prst="rect">
+            <a:avLst/>
+          </a:prstGeom>
+          <a:noFill/>
+          <a:ln/>
+        </p:spPr>
+        <p:txBody>
+          <a:bodyPr wrap="square" lIns="0" tIns="0" rIns="0" bIns="0" rtlCol="0" anchor="t"/>
+          <a:lstStyle/>
+          <a:p>
+            <a:pPr algn="l" indent="0" marL="0">
+              <a:lnSpc>
+                <a:spcPts val="1820"/>
+              </a:lnSpc>
+              <a:spcBef>
+                <a:spcPts val="300"/>
+              </a:spcBef>
+              <a:spcAft>
+                <a:spcPts val="300"/>
+              </a:spcAft>
+              <a:buNone/>
+            </a:pPr>
+            <a:r>
+              <a:rPr lang="en-US" sz="1300" i="1" dirty="0">
+                <a:solidFill>
+                  <a:srgbClr val="1C2833"/>
+                </a:solidFill>
+                <a:latin typeface="Georgia" pitchFamily="34" charset="0"/>
+                <a:ea typeface="Georgia" pitchFamily="34" charset="-122"/>
+                <a:cs typeface="Georgia" pitchFamily="34" charset="-120"/>
+              </a:rPr>
+              <a:t>amāvasyā</a:t>
+            </a:r>
+            <a:pPr algn="l" indent="0" marL="0">
+              <a:lnSpc>
+                <a:spcPts val="1820"/>
+              </a:lnSpc>
+              <a:spcBef>
+                <a:spcPts val="300"/>
+              </a:spcBef>
+              <a:spcAft>
+                <a:spcPts val="300"/>
+              </a:spcAft>
+              <a:buNone/>
+            </a:pPr>
+            <a:r>
+              <a:rPr lang="en-US" sz="1300" dirty="0">
+                <a:solidFill>
+                  <a:srgbClr val="1C2833"/>
+                </a:solidFill>
+                <a:latin typeface="Georgia" pitchFamily="34" charset="0"/>
+                <a:ea typeface="Georgia" pitchFamily="34" charset="-122"/>
+                <a:cs typeface="Georgia" pitchFamily="34" charset="-120"/>
+              </a:rPr>
+              <a:t> (new moon) — Moon invisible, "dwelling together with" the Sun</a:t>
+            </a:r>
+            <a:endParaRPr lang="en-US" sz="1300" dirty="0"/>
+          </a:p>
+        </p:txBody>
+      </p:sp>
+      <p:sp>
+        <p:nvSpPr>
+          <p:cNvPr id="10" name="Text 8"/>
+          <p:cNvSpPr/>
+          <p:nvPr/>
+        </p:nvSpPr>
+        <p:spPr>
+          <a:xfrm>
+            <a:off x="692051" y="2612380"/>
+            <a:ext cx="7973389" cy="230981"/>
+          </a:xfrm>
+          <a:prstGeom prst="rect">
+            <a:avLst/>
+          </a:prstGeom>
+          <a:noFill/>
+          <a:ln/>
+        </p:spPr>
+        <p:txBody>
+          <a:bodyPr wrap="square" lIns="0" tIns="0" rIns="0" bIns="0" rtlCol="0" anchor="t"/>
+          <a:lstStyle/>
+          <a:p>
+            <a:pPr algn="l" indent="0" marL="0">
+              <a:lnSpc>
+                <a:spcPts val="1820"/>
+              </a:lnSpc>
+              <a:spcBef>
+                <a:spcPts val="300"/>
+              </a:spcBef>
+              <a:spcAft>
+                <a:spcPts val="300"/>
+              </a:spcAft>
+              <a:buNone/>
+            </a:pPr>
+            <a:r>
+              <a:rPr lang="en-US" sz="1300" i="1" dirty="0">
+                <a:solidFill>
+                  <a:srgbClr val="1C2833"/>
+                </a:solidFill>
+                <a:latin typeface="Georgia" pitchFamily="34" charset="0"/>
+                <a:ea typeface="Georgia" pitchFamily="34" charset="-122"/>
+                <a:cs typeface="Georgia" pitchFamily="34" charset="-120"/>
+              </a:rPr>
+              <a:t>pūrṇimā</a:t>
+            </a:r>
+            <a:pPr algn="l" indent="0" marL="0">
+              <a:lnSpc>
+                <a:spcPts val="1820"/>
+              </a:lnSpc>
+              <a:spcBef>
+                <a:spcPts val="300"/>
+              </a:spcBef>
+              <a:spcAft>
+                <a:spcPts val="300"/>
+              </a:spcAft>
+              <a:buNone/>
+            </a:pPr>
+            <a:r>
+              <a:rPr lang="en-US" sz="1300" dirty="0">
+                <a:solidFill>
+                  <a:srgbClr val="1C2833"/>
+                </a:solidFill>
+                <a:latin typeface="Georgia" pitchFamily="34" charset="0"/>
+                <a:ea typeface="Georgia" pitchFamily="34" charset="-122"/>
+                <a:cs typeface="Georgia" pitchFamily="34" charset="-120"/>
+              </a:rPr>
+              <a:t> (full moon) — Moon fully lit, opposite the Sun</a:t>
+            </a:r>
+            <a:endParaRPr lang="en-US" sz="1300" dirty="0"/>
+          </a:p>
+        </p:txBody>
+      </p:sp>
+      <p:sp>
+        <p:nvSpPr>
+          <p:cNvPr id="11" name="Text 9"/>
+          <p:cNvSpPr/>
+          <p:nvPr/>
+        </p:nvSpPr>
+        <p:spPr>
+          <a:xfrm>
+            <a:off x="692051" y="2881461"/>
+            <a:ext cx="7973389" cy="230981"/>
+          </a:xfrm>
+          <a:prstGeom prst="rect">
+            <a:avLst/>
+          </a:prstGeom>
+          <a:noFill/>
+          <a:ln/>
+        </p:spPr>
+        <p:txBody>
+          <a:bodyPr wrap="square" lIns="0" tIns="0" rIns="0" bIns="0" rtlCol="0" anchor="t"/>
+          <a:lstStyle/>
+          <a:p>
+            <a:pPr algn="l" indent="0" marL="0">
+              <a:lnSpc>
+                <a:spcPts val="1820"/>
+              </a:lnSpc>
+              <a:spcBef>
+                <a:spcPts val="300"/>
+              </a:spcBef>
+              <a:spcAft>
+                <a:spcPts val="300"/>
+              </a:spcAft>
+              <a:buNone/>
+            </a:pPr>
+            <a:r>
+              <a:rPr lang="en-US" sz="1300" i="1" dirty="0">
+                <a:solidFill>
+                  <a:srgbClr val="1C2833"/>
+                </a:solidFill>
+                <a:latin typeface="Georgia" pitchFamily="34" charset="0"/>
+                <a:ea typeface="Georgia" pitchFamily="34" charset="-122"/>
+                <a:cs typeface="Georgia" pitchFamily="34" charset="-120"/>
+              </a:rPr>
+              <a:t>Neither pakṣa is "good" or "bad." They are astronomical halves of the cycle.</a:t>
+            </a:r>
+            <a:endParaRPr lang="en-US" sz="1300" dirty="0"/>
+          </a:p>
+        </p:txBody>
+      </p:sp>
+      <p:sp>
+        <p:nvSpPr>
+          <p:cNvPr id="12" name="Text 10"/>
+          <p:cNvSpPr/>
+          <p:nvPr/>
+        </p:nvSpPr>
+        <p:spPr>
+          <a:xfrm>
+            <a:off x="406301" y="4434929"/>
+            <a:ext cx="8498026" cy="213271"/>
+          </a:xfrm>
+          <a:prstGeom prst="rect">
+            <a:avLst/>
+          </a:prstGeom>
+          <a:noFill/>
+          <a:ln/>
+        </p:spPr>
+        <p:txBody>
+          <a:bodyPr wrap="square" lIns="0" tIns="0" rIns="0" bIns="0" rtlCol="0" anchor="t"/>
+          <a:lstStyle/>
+          <a:p>
+            <a:pPr algn="l" indent="0" marL="0">
+              <a:lnSpc>
+                <a:spcPts val="1680"/>
+              </a:lnSpc>
+              <a:spcBef>
+                <a:spcPts val="300"/>
+              </a:spcBef>
+              <a:spcAft>
+                <a:spcPts val="300"/>
+              </a:spcAft>
+              <a:buNone/>
+            </a:pPr>
+            <a:r>
+              <a:rPr lang="en-US" sz="1200" dirty="0">
+                <a:solidFill>
+                  <a:srgbClr val="1C2833"/>
+                </a:solidFill>
+                <a:latin typeface="Arial" pitchFamily="34" charset="0"/>
+                <a:ea typeface="Arial" pitchFamily="34" charset="-122"/>
+                <a:cs typeface="Arial" pitchFamily="34" charset="-120"/>
+              </a:rPr>
+              <a:t>Middle ·  · IKS Curriculum</a:t>
+            </a:r>
+            <a:endParaRPr lang="en-US" sz="1200" dirty="0"/>
+          </a:p>
+        </p:txBody>
+      </p:sp>
+    </p:spTree>
+  </p:cSld>
+  <p:clrMapOvr>
+    <a:masterClrMapping/>
+  </p:clrMapOvr>
+</p:sld>
+</file>
+
+<file path=ppt/slides/slide17.xml><?xml version="1.0" encoding="utf-8"?>
+<p:sld xmlns:a="http://schemas.openxmlformats.org/drawingml/2006/main" xmlns:r="http://schemas.openxmlformats.org/officeDocument/2006/relationships" xmlns:p="http://schemas.openxmlformats.org/presentationml/2006/main">
+  <p:cSld name="Slide 17">
+    <p:bg>
+      <p:bgPr>
+        <a:solidFill>
+          <a:srgbClr val="FFFFFF"/>
+        </a:solidFill>
+      </p:bgPr>
+    </p:bg>
+    <p:spTree>
+      <p:nvGrpSpPr>
+        <p:cNvPr id="1" name=""/>
+        <p:cNvGrpSpPr/>
+        <p:nvPr/>
+      </p:nvGrpSpPr>
+      <p:grpSpPr>
+        <a:xfrm>
+          <a:off x="0" y="0"/>
+          <a:ext cx="0" cy="0"/>
+          <a:chOff x="0" y="0"/>
+          <a:chExt cx="0" cy="0"/>
+        </a:xfrm>
+      </p:grpSpPr>
+      <p:sp>
+        <p:nvSpPr>
+          <p:cNvPr id="2" name="Text 0"/>
+          <p:cNvSpPr/>
+          <p:nvPr/>
+        </p:nvSpPr>
+        <p:spPr>
+          <a:xfrm>
+            <a:off x="0" y="0"/>
+            <a:ext cx="9144000" cy="101501"/>
+          </a:xfrm>
+          <a:prstGeom prst="rect">
+            <a:avLst/>
+          </a:prstGeom>
+          <a:solidFill>
+            <a:srgbClr val="277884"/>
+          </a:solidFill>
+          <a:ln/>
+        </p:spPr>
+        <p:txBody>
+          <a:bodyPr wrap="square" rtlCol="0" anchor="ctr"/>
+          <a:lstStyle/>
+          <a:p>
+            <a:pPr indent="0" marL="0">
+              <a:buNone/>
+            </a:pPr>
+            <a:endParaRPr lang="en-US" dirty="0"/>
+          </a:p>
+        </p:txBody>
+      </p:sp>
+      <p:sp>
+        <p:nvSpPr>
+          <p:cNvPr id="3" name="Text 1"/>
+          <p:cNvSpPr/>
+          <p:nvPr/>
+        </p:nvSpPr>
+        <p:spPr>
+          <a:xfrm>
+            <a:off x="406301" y="457051"/>
+            <a:ext cx="8498026" cy="274290"/>
+          </a:xfrm>
+          <a:prstGeom prst="rect">
+            <a:avLst/>
+          </a:prstGeom>
+          <a:noFill/>
+          <a:ln/>
+        </p:spPr>
+        <p:txBody>
+          <a:bodyPr wrap="square" lIns="0" tIns="0" rIns="0" bIns="0" rtlCol="0" anchor="t"/>
+          <a:lstStyle/>
+          <a:p>
+            <a:pPr algn="l" indent="0" marL="0">
+              <a:lnSpc>
+                <a:spcPts val="2160"/>
+              </a:lnSpc>
+              <a:spcBef>
+                <a:spcPts val="600"/>
+              </a:spcBef>
+              <a:spcAft>
+                <a:spcPts val="800"/>
+              </a:spcAft>
+              <a:buNone/>
+            </a:pPr>
+            <a:r>
+              <a:rPr lang="en-US" sz="1800" b="1" dirty="0">
+                <a:solidFill>
+                  <a:srgbClr val="FE4447"/>
+                </a:solidFill>
+                <a:latin typeface="Georgia" pitchFamily="34" charset="0"/>
+                <a:ea typeface="Georgia" pitchFamily="34" charset="-122"/>
+                <a:cs typeface="Georgia" pitchFamily="34" charset="-120"/>
+              </a:rPr>
+              <a:t>Homework</a:t>
+            </a:r>
+            <a:endParaRPr lang="en-US" sz="1800" dirty="0"/>
+          </a:p>
+        </p:txBody>
+      </p:sp>
+      <p:sp>
+        <p:nvSpPr>
+          <p:cNvPr id="4" name="Text 2"/>
+          <p:cNvSpPr/>
+          <p:nvPr/>
+        </p:nvSpPr>
+        <p:spPr>
+          <a:xfrm>
+            <a:off x="634901" y="883593"/>
+            <a:ext cx="8102798" cy="525661"/>
+          </a:xfrm>
+          <a:prstGeom prst="rect">
+            <a:avLst/>
+          </a:prstGeom>
+          <a:noFill/>
+          <a:ln/>
+        </p:spPr>
+        <p:txBody>
+          <a:bodyPr wrap="square" lIns="0" tIns="0" rIns="0" bIns="0" rtlCol="0" anchor="t"/>
+          <a:lstStyle/>
+          <a:p>
+            <a:pPr algn="l" marL="342900" indent="-342900">
+              <a:lnSpc>
+                <a:spcPts val="1620"/>
+              </a:lnSpc>
+              <a:spcAft>
+                <a:spcPts val="300"/>
+              </a:spcAft>
+              <a:buSzPct val="100000"/>
+              <a:buChar char="•"/>
+            </a:pPr>
+            <a:r>
+              <a:rPr lang="en-US" sz="1200" dirty="0">
+                <a:solidFill>
+                  <a:srgbClr val="1C2833"/>
+                </a:solidFill>
+                <a:latin typeface="Arial" pitchFamily="34" charset="0"/>
+                <a:ea typeface="Arial" pitchFamily="34" charset="-122"/>
+                <a:cs typeface="Arial" pitchFamily="34" charset="-120"/>
+              </a:rPr>
+              <a:t>Continue the Moon diary. Tonight, add </a:t>
+            </a:r>
+            <a:pPr algn="l" indent="0" marL="0">
+              <a:lnSpc>
+                <a:spcPts val="1620"/>
+              </a:lnSpc>
+              <a:spcAft>
+                <a:spcPts val="300"/>
+              </a:spcAft>
+              <a:buNone/>
+            </a:pPr>
+            <a:r>
+              <a:rPr lang="en-US" sz="1200" b="1" dirty="0">
+                <a:solidFill>
+                  <a:srgbClr val="1C2833"/>
+                </a:solidFill>
+                <a:latin typeface="Arial" pitchFamily="34" charset="0"/>
+                <a:ea typeface="Arial" pitchFamily="34" charset="-122"/>
+                <a:cs typeface="Arial" pitchFamily="34" charset="-120"/>
+              </a:rPr>
+              <a:t>which pakṣa you are in</a:t>
+            </a:r>
+            <a:pPr algn="l" indent="0" marL="0">
+              <a:lnSpc>
+                <a:spcPts val="1620"/>
+              </a:lnSpc>
+              <a:spcAft>
+                <a:spcPts val="300"/>
+              </a:spcAft>
+              <a:buNone/>
+            </a:pPr>
+            <a:r>
+              <a:rPr lang="en-US" sz="1200" dirty="0">
+                <a:solidFill>
+                  <a:srgbClr val="1C2833"/>
+                </a:solidFill>
+                <a:latin typeface="Arial" pitchFamily="34" charset="0"/>
+                <a:ea typeface="Arial" pitchFamily="34" charset="-122"/>
+                <a:cs typeface="Arial" pitchFamily="34" charset="-120"/>
+              </a:rPr>
+              <a:t> to your sketch.</a:t>
+            </a:r>
+            <a:endParaRPr lang="en-US" sz="1200" dirty="0"/>
+          </a:p>
+          <a:p>
+            <a:pPr algn="l" marL="342900" indent="-342900">
+              <a:lnSpc>
+                <a:spcPts val="1620"/>
+              </a:lnSpc>
+              <a:spcAft>
+                <a:spcPts val="300"/>
+              </a:spcAft>
+              <a:buSzPct val="100000"/>
+              <a:buChar char="•"/>
+            </a:pPr>
+            <a:r>
+              <a:rPr lang="en-US" sz="1200" dirty="0">
+                <a:solidFill>
+                  <a:srgbClr val="1C2833"/>
+                </a:solidFill>
+                <a:latin typeface="Arial" pitchFamily="34" charset="0"/>
+                <a:ea typeface="Arial" pitchFamily="34" charset="-122"/>
+                <a:cs typeface="Arial" pitchFamily="34" charset="-120"/>
+              </a:rPr>
+              <a:t>For Day 3, *</a:t>
+            </a:r>
+            <a:pPr algn="l" indent="0" marL="0">
+              <a:lnSpc>
+                <a:spcPts val="1620"/>
+              </a:lnSpc>
+              <a:spcAft>
+                <a:spcPts val="300"/>
+              </a:spcAft>
+              <a:buNone/>
+            </a:pPr>
+            <a:r>
+              <a:rPr lang="en-US" sz="1200" i="1" dirty="0">
+                <a:solidFill>
+                  <a:srgbClr val="1C2833"/>
+                </a:solidFill>
+                <a:latin typeface="Arial" pitchFamily="34" charset="0"/>
+                <a:ea typeface="Arial" pitchFamily="34" charset="-122"/>
+                <a:cs typeface="Arial" pitchFamily="34" charset="-120"/>
+              </a:rPr>
+              <a:t>memorise the names</a:t>
+            </a:r>
+            <a:pPr algn="l" indent="0" marL="0">
+              <a:lnSpc>
+                <a:spcPts val="1620"/>
+              </a:lnSpc>
+              <a:spcAft>
+                <a:spcPts val="300"/>
+              </a:spcAft>
+              <a:buNone/>
+            </a:pPr>
+            <a:r>
+              <a:rPr lang="en-US" sz="1200" dirty="0">
+                <a:solidFill>
+                  <a:srgbClr val="1C2833"/>
+                </a:solidFill>
+                <a:latin typeface="Arial" pitchFamily="34" charset="0"/>
+                <a:ea typeface="Arial" pitchFamily="34" charset="-122"/>
+                <a:cs typeface="Arial" pitchFamily="34" charset="-120"/>
+              </a:rPr>
+              <a:t>amāvasyā</a:t>
+            </a:r>
+            <a:pPr algn="l" indent="0" marL="0">
+              <a:lnSpc>
+                <a:spcPts val="1620"/>
+              </a:lnSpc>
+              <a:spcAft>
+                <a:spcPts val="300"/>
+              </a:spcAft>
+              <a:buNone/>
+            </a:pPr>
+            <a:r>
+              <a:rPr lang="en-US" sz="1200" i="1" dirty="0">
+                <a:solidFill>
+                  <a:srgbClr val="1C2833"/>
+                </a:solidFill>
+                <a:latin typeface="Arial" pitchFamily="34" charset="0"/>
+                <a:ea typeface="Arial" pitchFamily="34" charset="-122"/>
+                <a:cs typeface="Arial" pitchFamily="34" charset="-120"/>
+              </a:rPr>
+              <a:t> and</a:t>
+            </a:r>
+            <a:pPr algn="l" indent="0" marL="0">
+              <a:lnSpc>
+                <a:spcPts val="1620"/>
+              </a:lnSpc>
+              <a:spcAft>
+                <a:spcPts val="300"/>
+              </a:spcAft>
+              <a:buNone/>
+            </a:pPr>
+            <a:r>
+              <a:rPr lang="en-US" sz="1200" dirty="0">
+                <a:solidFill>
+                  <a:srgbClr val="1C2833"/>
+                </a:solidFill>
+                <a:latin typeface="Arial" pitchFamily="34" charset="0"/>
+                <a:ea typeface="Arial" pitchFamily="34" charset="-122"/>
+                <a:cs typeface="Arial" pitchFamily="34" charset="-120"/>
+              </a:rPr>
+              <a:t>pūrṇimā</a:t>
+            </a:r>
+            <a:pPr algn="l" indent="0" marL="0">
+              <a:lnSpc>
+                <a:spcPts val="1620"/>
+              </a:lnSpc>
+              <a:spcAft>
+                <a:spcPts val="300"/>
+              </a:spcAft>
+              <a:buNone/>
+            </a:pPr>
+            <a:r>
+              <a:rPr lang="en-US" sz="1200" i="1" dirty="0">
+                <a:solidFill>
+                  <a:srgbClr val="1C2833"/>
+                </a:solidFill>
+                <a:latin typeface="Arial" pitchFamily="34" charset="0"/>
+                <a:ea typeface="Arial" pitchFamily="34" charset="-122"/>
+                <a:cs typeface="Arial" pitchFamily="34" charset="-120"/>
+              </a:rPr>
+              <a:t> and the two pakṣa names</a:t>
+            </a:r>
+            <a:pPr algn="l" indent="0" marL="0">
+              <a:lnSpc>
+                <a:spcPts val="1620"/>
+              </a:lnSpc>
+              <a:spcAft>
+                <a:spcPts val="300"/>
+              </a:spcAft>
+              <a:buNone/>
+            </a:pPr>
+            <a:r>
+              <a:rPr lang="en-US" sz="1200" dirty="0">
+                <a:solidFill>
+                  <a:srgbClr val="1C2833"/>
+                </a:solidFill>
+                <a:latin typeface="Arial" pitchFamily="34" charset="0"/>
+                <a:ea typeface="Arial" pitchFamily="34" charset="-122"/>
+                <a:cs typeface="Arial" pitchFamily="34" charset="-120"/>
+              </a:rPr>
+              <a:t>*.</a:t>
+            </a:r>
+            <a:endParaRPr lang="en-US" sz="1200" dirty="0"/>
+          </a:p>
+        </p:txBody>
+      </p:sp>
+      <p:sp>
+        <p:nvSpPr>
+          <p:cNvPr id="5" name="Text 3"/>
+          <p:cNvSpPr/>
+          <p:nvPr/>
+        </p:nvSpPr>
+        <p:spPr>
+          <a:xfrm>
+            <a:off x="406301" y="4434929"/>
+            <a:ext cx="8498026" cy="213271"/>
+          </a:xfrm>
+          <a:prstGeom prst="rect">
+            <a:avLst/>
+          </a:prstGeom>
+          <a:noFill/>
+          <a:ln/>
+        </p:spPr>
+        <p:txBody>
+          <a:bodyPr wrap="square" lIns="0" tIns="0" rIns="0" bIns="0" rtlCol="0" anchor="t"/>
+          <a:lstStyle/>
+          <a:p>
+            <a:pPr algn="l" indent="0" marL="0">
+              <a:lnSpc>
+                <a:spcPts val="1680"/>
+              </a:lnSpc>
+              <a:spcBef>
+                <a:spcPts val="300"/>
+              </a:spcBef>
+              <a:spcAft>
+                <a:spcPts val="300"/>
+              </a:spcAft>
+              <a:buNone/>
+            </a:pPr>
+            <a:r>
+              <a:rPr lang="en-US" sz="1200" dirty="0">
+                <a:solidFill>
+                  <a:srgbClr val="1C2833"/>
+                </a:solidFill>
+                <a:latin typeface="Arial" pitchFamily="34" charset="0"/>
+                <a:ea typeface="Arial" pitchFamily="34" charset="-122"/>
+                <a:cs typeface="Arial" pitchFamily="34" charset="-120"/>
+              </a:rPr>
+              <a:t>Middle ·  · IKS Curriculum</a:t>
+            </a:r>
+            <a:endParaRPr lang="en-US" sz="1200" dirty="0"/>
+          </a:p>
+        </p:txBody>
+      </p:sp>
+    </p:spTree>
+  </p:cSld>
+  <p:clrMapOvr>
+    <a:masterClrMapping/>
+  </p:clrMapOvr>
+</p:sld>
+</file>
+
+<file path=ppt/slides/slide18.xml><?xml version="1.0" encoding="utf-8"?>
+<p:sld xmlns:a="http://schemas.openxmlformats.org/drawingml/2006/main" xmlns:r="http://schemas.openxmlformats.org/officeDocument/2006/relationships" xmlns:p="http://schemas.openxmlformats.org/presentationml/2006/main">
+  <p:cSld name="Slide 18">
+    <p:bg>
+      <p:bgPr>
+        <a:solidFill>
+          <a:srgbClr val="FFFFFF"/>
+        </a:solidFill>
+      </p:bgPr>
+    </p:bg>
+    <p:spTree>
+      <p:nvGrpSpPr>
+        <p:cNvPr id="1" name=""/>
+        <p:cNvGrpSpPr/>
+        <p:nvPr/>
+      </p:nvGrpSpPr>
+      <p:grpSpPr>
+        <a:xfrm>
+          <a:off x="0" y="0"/>
+          <a:ext cx="0" cy="0"/>
+          <a:chOff x="0" y="0"/>
+          <a:chExt cx="0" cy="0"/>
+        </a:xfrm>
+      </p:grpSpPr>
+      <p:sp>
+        <p:nvSpPr>
+          <p:cNvPr id="2" name="Text 0"/>
+          <p:cNvSpPr/>
+          <p:nvPr/>
+        </p:nvSpPr>
+        <p:spPr>
+          <a:xfrm>
+            <a:off x="0" y="0"/>
+            <a:ext cx="9144000" cy="101501"/>
+          </a:xfrm>
+          <a:prstGeom prst="rect">
+            <a:avLst/>
+          </a:prstGeom>
+          <a:solidFill>
+            <a:srgbClr val="277884"/>
+          </a:solidFill>
+          <a:ln/>
+        </p:spPr>
+        <p:txBody>
+          <a:bodyPr wrap="square" rtlCol="0" anchor="ctr"/>
+          <a:lstStyle/>
+          <a:p>
+            <a:pPr indent="0" marL="0">
+              <a:buNone/>
+            </a:pPr>
+            <a:endParaRPr lang="en-US" dirty="0"/>
+          </a:p>
+        </p:txBody>
+      </p:sp>
+      <p:sp>
+        <p:nvSpPr>
+          <p:cNvPr id="3" name="Text 1"/>
+          <p:cNvSpPr/>
+          <p:nvPr/>
+        </p:nvSpPr>
+        <p:spPr>
+          <a:xfrm>
+            <a:off x="406301" y="457051"/>
+            <a:ext cx="8498026" cy="274290"/>
+          </a:xfrm>
+          <a:prstGeom prst="rect">
+            <a:avLst/>
+          </a:prstGeom>
+          <a:noFill/>
+          <a:ln/>
+        </p:spPr>
+        <p:txBody>
+          <a:bodyPr wrap="square" lIns="0" tIns="0" rIns="0" bIns="0" rtlCol="0" anchor="t"/>
+          <a:lstStyle/>
+          <a:p>
+            <a:pPr algn="l" indent="0" marL="0">
+              <a:lnSpc>
+                <a:spcPts val="2160"/>
+              </a:lnSpc>
+              <a:spcBef>
+                <a:spcPts val="600"/>
+              </a:spcBef>
+              <a:spcAft>
+                <a:spcPts val="800"/>
+              </a:spcAft>
+              <a:buNone/>
+            </a:pPr>
+            <a:r>
+              <a:rPr lang="en-US" sz="1800" b="1" dirty="0">
+                <a:solidFill>
+                  <a:srgbClr val="FE4447"/>
+                </a:solidFill>
+                <a:latin typeface="Georgia" pitchFamily="34" charset="0"/>
+                <a:ea typeface="Georgia" pitchFamily="34" charset="-122"/>
+                <a:cs typeface="Georgia" pitchFamily="34" charset="-120"/>
+              </a:rPr>
+              <a:t>Differentiation</a:t>
+            </a:r>
+            <a:endParaRPr lang="en-US" sz="1800" dirty="0"/>
+          </a:p>
+        </p:txBody>
+      </p:sp>
+      <p:sp>
+        <p:nvSpPr>
+          <p:cNvPr id="4" name="Text 2"/>
+          <p:cNvSpPr/>
+          <p:nvPr/>
+        </p:nvSpPr>
+        <p:spPr>
+          <a:xfrm>
+            <a:off x="634901" y="883593"/>
+            <a:ext cx="8102798" cy="731341"/>
+          </a:xfrm>
+          <a:prstGeom prst="rect">
+            <a:avLst/>
+          </a:prstGeom>
+          <a:noFill/>
+          <a:ln/>
+        </p:spPr>
+        <p:txBody>
+          <a:bodyPr wrap="square" lIns="0" tIns="0" rIns="0" bIns="0" rtlCol="0" anchor="t"/>
+          <a:lstStyle/>
+          <a:p>
+            <a:pPr algn="l" marL="342900" indent="-342900">
+              <a:lnSpc>
+                <a:spcPts val="1620"/>
+              </a:lnSpc>
+              <a:spcAft>
+                <a:spcPts val="300"/>
+              </a:spcAft>
+              <a:buSzPct val="100000"/>
+              <a:buChar char="•"/>
+            </a:pPr>
+            <a:r>
+              <a:rPr lang="en-US" sz="1200" b="1" dirty="0">
+                <a:solidFill>
+                  <a:srgbClr val="1C2833"/>
+                </a:solidFill>
+                <a:latin typeface="Arial" pitchFamily="34" charset="0"/>
+                <a:ea typeface="Arial" pitchFamily="34" charset="-122"/>
+                <a:cs typeface="Arial" pitchFamily="34" charset="-120"/>
+              </a:rPr>
+              <a:t>One tier up:</a:t>
+            </a:r>
+            <a:pPr algn="l" indent="0" marL="0">
+              <a:lnSpc>
+                <a:spcPts val="1620"/>
+              </a:lnSpc>
+              <a:spcAft>
+                <a:spcPts val="300"/>
+              </a:spcAft>
+              <a:buNone/>
+            </a:pPr>
+            <a:r>
+              <a:rPr lang="en-US" sz="1200" dirty="0">
+                <a:solidFill>
+                  <a:srgbClr val="1C2833"/>
+                </a:solidFill>
+                <a:latin typeface="Arial" pitchFamily="34" charset="0"/>
+                <a:ea typeface="Arial" pitchFamily="34" charset="-122"/>
+                <a:cs typeface="Arial" pitchFamily="34" charset="-120"/>
+              </a:rPr>
+              <a:t> Look up the meaning of the words </a:t>
+            </a:r>
+            <a:pPr algn="l" indent="0" marL="0">
+              <a:lnSpc>
+                <a:spcPts val="1620"/>
+              </a:lnSpc>
+              <a:spcAft>
+                <a:spcPts val="300"/>
+              </a:spcAft>
+              <a:buNone/>
+            </a:pPr>
+            <a:r>
+              <a:rPr lang="en-US" sz="1200" i="1" dirty="0">
+                <a:solidFill>
+                  <a:srgbClr val="1C2833"/>
+                </a:solidFill>
+                <a:latin typeface="Arial" pitchFamily="34" charset="0"/>
+                <a:ea typeface="Arial" pitchFamily="34" charset="-122"/>
+                <a:cs typeface="Arial" pitchFamily="34" charset="-120"/>
+              </a:rPr>
+              <a:t>śukla</a:t>
+            </a:r>
+            <a:pPr algn="l" indent="0" marL="0">
+              <a:lnSpc>
+                <a:spcPts val="1620"/>
+              </a:lnSpc>
+              <a:spcAft>
+                <a:spcPts val="300"/>
+              </a:spcAft>
+              <a:buNone/>
+            </a:pPr>
+            <a:r>
+              <a:rPr lang="en-US" sz="1200" dirty="0">
+                <a:solidFill>
+                  <a:srgbClr val="1C2833"/>
+                </a:solidFill>
+                <a:latin typeface="Arial" pitchFamily="34" charset="0"/>
+                <a:ea typeface="Arial" pitchFamily="34" charset="-122"/>
+                <a:cs typeface="Arial" pitchFamily="34" charset="-120"/>
+              </a:rPr>
+              <a:t> and </a:t>
+            </a:r>
+            <a:pPr algn="l" indent="0" marL="0">
+              <a:lnSpc>
+                <a:spcPts val="1620"/>
+              </a:lnSpc>
+              <a:spcAft>
+                <a:spcPts val="300"/>
+              </a:spcAft>
+              <a:buNone/>
+            </a:pPr>
+            <a:r>
+              <a:rPr lang="en-US" sz="1200" i="1" dirty="0">
+                <a:solidFill>
+                  <a:srgbClr val="1C2833"/>
+                </a:solidFill>
+                <a:latin typeface="Arial" pitchFamily="34" charset="0"/>
+                <a:ea typeface="Arial" pitchFamily="34" charset="-122"/>
+                <a:cs typeface="Arial" pitchFamily="34" charset="-120"/>
+              </a:rPr>
+              <a:t>kṛṣṇa</a:t>
+            </a:r>
+            <a:pPr algn="l" indent="0" marL="0">
+              <a:lnSpc>
+                <a:spcPts val="1620"/>
+              </a:lnSpc>
+              <a:spcAft>
+                <a:spcPts val="300"/>
+              </a:spcAft>
+              <a:buNone/>
+            </a:pPr>
+            <a:r>
+              <a:rPr lang="en-US" sz="1200" dirty="0">
+                <a:solidFill>
+                  <a:srgbClr val="1C2833"/>
+                </a:solidFill>
+                <a:latin typeface="Arial" pitchFamily="34" charset="0"/>
+                <a:ea typeface="Arial" pitchFamily="34" charset="-122"/>
+                <a:cs typeface="Arial" pitchFamily="34" charset="-120"/>
+              </a:rPr>
+              <a:t> in any Sanskrit dictionary. Are they used only for the Moon, or in other contexts? (They are general-purpose words for "bright/white" and "dark/black.")</a:t>
+            </a:r>
+            <a:endParaRPr lang="en-US" sz="1200" dirty="0"/>
+          </a:p>
+          <a:p>
+            <a:pPr algn="l" marL="342900" indent="-342900">
+              <a:lnSpc>
+                <a:spcPts val="1620"/>
+              </a:lnSpc>
+              <a:spcAft>
+                <a:spcPts val="300"/>
+              </a:spcAft>
+              <a:buSzPct val="100000"/>
+              <a:buChar char="•"/>
+            </a:pPr>
+            <a:r>
+              <a:rPr lang="en-US" sz="1200" b="1" dirty="0">
+                <a:solidFill>
+                  <a:srgbClr val="1C2833"/>
+                </a:solidFill>
+                <a:latin typeface="Arial" pitchFamily="34" charset="0"/>
+                <a:ea typeface="Arial" pitchFamily="34" charset="-122"/>
+                <a:cs typeface="Arial" pitchFamily="34" charset="-120"/>
+              </a:rPr>
+              <a:t>One tier down:</a:t>
+            </a:r>
+            <a:pPr algn="l" indent="0" marL="0">
+              <a:lnSpc>
+                <a:spcPts val="1620"/>
+              </a:lnSpc>
+              <a:spcAft>
+                <a:spcPts val="300"/>
+              </a:spcAft>
+              <a:buNone/>
+            </a:pPr>
+            <a:r>
+              <a:rPr lang="en-US" sz="1200" dirty="0">
+                <a:solidFill>
+                  <a:srgbClr val="1C2833"/>
+                </a:solidFill>
+                <a:latin typeface="Arial" pitchFamily="34" charset="0"/>
+                <a:ea typeface="Arial" pitchFamily="34" charset="-122"/>
+                <a:cs typeface="Arial" pitchFamily="34" charset="-120"/>
+              </a:rPr>
+              <a:t> Memorise only </a:t>
+            </a:r>
+            <a:pPr algn="l" indent="0" marL="0">
+              <a:lnSpc>
+                <a:spcPts val="1620"/>
+              </a:lnSpc>
+              <a:spcAft>
+                <a:spcPts val="300"/>
+              </a:spcAft>
+              <a:buNone/>
+            </a:pPr>
+            <a:r>
+              <a:rPr lang="en-US" sz="1200" i="1" dirty="0">
+                <a:solidFill>
+                  <a:srgbClr val="1C2833"/>
+                </a:solidFill>
+                <a:latin typeface="Arial" pitchFamily="34" charset="0"/>
+                <a:ea typeface="Arial" pitchFamily="34" charset="-122"/>
+                <a:cs typeface="Arial" pitchFamily="34" charset="-120"/>
+              </a:rPr>
+              <a:t>amāvasyā</a:t>
+            </a:r>
+            <a:pPr algn="l" indent="0" marL="0">
+              <a:lnSpc>
+                <a:spcPts val="1620"/>
+              </a:lnSpc>
+              <a:spcAft>
+                <a:spcPts val="300"/>
+              </a:spcAft>
+              <a:buNone/>
+            </a:pPr>
+            <a:r>
+              <a:rPr lang="en-US" sz="1200" dirty="0">
+                <a:solidFill>
+                  <a:srgbClr val="1C2833"/>
+                </a:solidFill>
+                <a:latin typeface="Arial" pitchFamily="34" charset="0"/>
+                <a:ea typeface="Arial" pitchFamily="34" charset="-122"/>
+                <a:cs typeface="Arial" pitchFamily="34" charset="-120"/>
+              </a:rPr>
+              <a:t> and </a:t>
+            </a:r>
+            <a:pPr algn="l" indent="0" marL="0">
+              <a:lnSpc>
+                <a:spcPts val="1620"/>
+              </a:lnSpc>
+              <a:spcAft>
+                <a:spcPts val="300"/>
+              </a:spcAft>
+              <a:buNone/>
+            </a:pPr>
+            <a:r>
+              <a:rPr lang="en-US" sz="1200" i="1" dirty="0">
+                <a:solidFill>
+                  <a:srgbClr val="1C2833"/>
+                </a:solidFill>
+                <a:latin typeface="Arial" pitchFamily="34" charset="0"/>
+                <a:ea typeface="Arial" pitchFamily="34" charset="-122"/>
+                <a:cs typeface="Arial" pitchFamily="34" charset="-120"/>
+              </a:rPr>
+              <a:t>pūrṇimā</a:t>
+            </a:r>
+            <a:pPr algn="l" indent="0" marL="0">
+              <a:lnSpc>
+                <a:spcPts val="1620"/>
+              </a:lnSpc>
+              <a:spcAft>
+                <a:spcPts val="300"/>
+              </a:spcAft>
+              <a:buNone/>
+            </a:pPr>
+            <a:r>
+              <a:rPr lang="en-US" sz="1200" dirty="0">
+                <a:solidFill>
+                  <a:srgbClr val="1C2833"/>
+                </a:solidFill>
+                <a:latin typeface="Arial" pitchFamily="34" charset="0"/>
+                <a:ea typeface="Arial" pitchFamily="34" charset="-122"/>
+                <a:cs typeface="Arial" pitchFamily="34" charset="-120"/>
+              </a:rPr>
+              <a:t> for now. The pakṣa terms can wait one more day.</a:t>
+            </a:r>
+            <a:endParaRPr lang="en-US" sz="1200" dirty="0"/>
+          </a:p>
+        </p:txBody>
+      </p:sp>
+      <p:sp>
+        <p:nvSpPr>
+          <p:cNvPr id="5" name="Text 3"/>
+          <p:cNvSpPr/>
+          <p:nvPr/>
+        </p:nvSpPr>
+        <p:spPr>
+          <a:xfrm>
+            <a:off x="406301" y="4434929"/>
+            <a:ext cx="8498026" cy="213271"/>
+          </a:xfrm>
+          <a:prstGeom prst="rect">
+            <a:avLst/>
+          </a:prstGeom>
+          <a:noFill/>
+          <a:ln/>
+        </p:spPr>
+        <p:txBody>
+          <a:bodyPr wrap="square" lIns="0" tIns="0" rIns="0" bIns="0" rtlCol="0" anchor="t"/>
+          <a:lstStyle/>
+          <a:p>
+            <a:pPr algn="l" indent="0" marL="0">
+              <a:lnSpc>
+                <a:spcPts val="1680"/>
+              </a:lnSpc>
+              <a:spcBef>
+                <a:spcPts val="300"/>
+              </a:spcBef>
+              <a:spcAft>
+                <a:spcPts val="300"/>
+              </a:spcAft>
+              <a:buNone/>
+            </a:pPr>
+            <a:r>
+              <a:rPr lang="en-US" sz="1200" dirty="0">
+                <a:solidFill>
+                  <a:srgbClr val="1C2833"/>
+                </a:solidFill>
+                <a:latin typeface="Arial" pitchFamily="34" charset="0"/>
+                <a:ea typeface="Arial" pitchFamily="34" charset="-122"/>
+                <a:cs typeface="Arial" pitchFamily="34" charset="-120"/>
+              </a:rPr>
+              <a:t>Middle ·  · IKS Curriculum</a:t>
+            </a:r>
+            <a:endParaRPr lang="en-US" sz="1200" dirty="0"/>
+          </a:p>
+        </p:txBody>
+      </p:sp>
+    </p:spTree>
+  </p:cSld>
+  <p:clrMapOvr>
+    <a:masterClrMapping/>
+  </p:clrMapOvr>
+</p:sld>
+</file>
+
+<file path=ppt/slides/slide19.xml><?xml version="1.0" encoding="utf-8"?>
+<p:sld xmlns:a="http://schemas.openxmlformats.org/drawingml/2006/main" xmlns:r="http://schemas.openxmlformats.org/officeDocument/2006/relationships" xmlns:p="http://schemas.openxmlformats.org/presentationml/2006/main">
+  <p:cSld name="Slide 19">
+    <p:bg>
+      <p:bgPr>
+        <a:solidFill>
+          <a:srgbClr val="FFFFFF"/>
+        </a:solidFill>
+      </p:bgPr>
+    </p:bg>
+    <p:spTree>
+      <p:nvGrpSpPr>
+        <p:cNvPr id="1" name=""/>
+        <p:cNvGrpSpPr/>
+        <p:nvPr/>
+      </p:nvGrpSpPr>
+      <p:grpSpPr>
+        <a:xfrm>
+          <a:off x="0" y="0"/>
+          <a:ext cx="0" cy="0"/>
+          <a:chOff x="0" y="0"/>
+          <a:chExt cx="0" cy="0"/>
+        </a:xfrm>
+      </p:grpSpPr>
+      <p:sp>
+        <p:nvSpPr>
+          <p:cNvPr id="2" name="Text 0"/>
+          <p:cNvSpPr/>
+          <p:nvPr/>
+        </p:nvSpPr>
+        <p:spPr>
+          <a:xfrm>
+            <a:off x="0" y="0"/>
+            <a:ext cx="9144000" cy="101501"/>
+          </a:xfrm>
+          <a:prstGeom prst="rect">
+            <a:avLst/>
+          </a:prstGeom>
+          <a:solidFill>
+            <a:srgbClr val="277884"/>
+          </a:solidFill>
+          <a:ln/>
+        </p:spPr>
+        <p:txBody>
+          <a:bodyPr wrap="square" rtlCol="0" anchor="ctr"/>
+          <a:lstStyle/>
+          <a:p>
+            <a:pPr indent="0" marL="0">
+              <a:buNone/>
+            </a:pPr>
+            <a:endParaRPr lang="en-US" dirty="0"/>
+          </a:p>
+        </p:txBody>
+      </p:sp>
+      <p:sp>
+        <p:nvSpPr>
+          <p:cNvPr id="3" name="Text 1"/>
+          <p:cNvSpPr/>
+          <p:nvPr/>
+        </p:nvSpPr>
+        <p:spPr>
+          <a:xfrm>
+            <a:off x="406301" y="457051"/>
+            <a:ext cx="8498026" cy="274290"/>
+          </a:xfrm>
+          <a:prstGeom prst="rect">
+            <a:avLst/>
+          </a:prstGeom>
+          <a:noFill/>
+          <a:ln/>
+        </p:spPr>
+        <p:txBody>
+          <a:bodyPr wrap="square" lIns="0" tIns="0" rIns="0" bIns="0" rtlCol="0" anchor="t"/>
+          <a:lstStyle/>
+          <a:p>
+            <a:pPr algn="l" indent="0" marL="0">
+              <a:lnSpc>
+                <a:spcPts val="2160"/>
+              </a:lnSpc>
+              <a:spcBef>
+                <a:spcPts val="600"/>
+              </a:spcBef>
+              <a:spcAft>
+                <a:spcPts val="800"/>
+              </a:spcAft>
+              <a:buNone/>
+            </a:pPr>
+            <a:r>
+              <a:rPr lang="en-US" sz="1800" b="1" dirty="0">
+                <a:solidFill>
+                  <a:srgbClr val="FE4447"/>
+                </a:solidFill>
+                <a:latin typeface="Georgia" pitchFamily="34" charset="0"/>
+                <a:ea typeface="Georgia" pitchFamily="34" charset="-122"/>
+                <a:cs typeface="Georgia" pitchFamily="34" charset="-120"/>
+              </a:rPr>
+              <a:t>Teacher notes</a:t>
+            </a:r>
+            <a:endParaRPr lang="en-US" sz="1800" dirty="0"/>
+          </a:p>
+        </p:txBody>
+      </p:sp>
+      <p:sp>
+        <p:nvSpPr>
+          <p:cNvPr id="4" name="Text 2"/>
+          <p:cNvSpPr/>
+          <p:nvPr/>
+        </p:nvSpPr>
+        <p:spPr>
+          <a:xfrm>
+            <a:off x="634901" y="883593"/>
+            <a:ext cx="8102798" cy="1142702"/>
+          </a:xfrm>
+          <a:prstGeom prst="rect">
+            <a:avLst/>
+          </a:prstGeom>
+          <a:noFill/>
+          <a:ln/>
+        </p:spPr>
+        <p:txBody>
+          <a:bodyPr wrap="square" lIns="0" tIns="0" rIns="0" bIns="0" rtlCol="0" anchor="t"/>
+          <a:lstStyle/>
+          <a:p>
+            <a:pPr algn="l" marL="342900" indent="-342900">
+              <a:lnSpc>
+                <a:spcPts val="1620"/>
+              </a:lnSpc>
+              <a:spcAft>
+                <a:spcPts val="300"/>
+              </a:spcAft>
+              <a:buSzPct val="100000"/>
+              <a:buChar char="•"/>
+            </a:pPr>
+            <a:r>
+              <a:rPr lang="en-US" sz="1200" dirty="0">
+                <a:solidFill>
+                  <a:srgbClr val="1C2833"/>
+                </a:solidFill>
+                <a:latin typeface="Arial" pitchFamily="34" charset="0"/>
+                <a:ea typeface="Arial" pitchFamily="34" charset="-122"/>
+                <a:cs typeface="Arial" pitchFamily="34" charset="-120"/>
+              </a:rPr>
+              <a:t>Watch for the misconception that </a:t>
+            </a:r>
+            <a:pPr algn="l" indent="0" marL="0">
+              <a:lnSpc>
+                <a:spcPts val="1620"/>
+              </a:lnSpc>
+              <a:spcAft>
+                <a:spcPts val="300"/>
+              </a:spcAft>
+              <a:buNone/>
+            </a:pPr>
+            <a:r>
+              <a:rPr lang="en-US" sz="1200" i="1" dirty="0">
+                <a:solidFill>
+                  <a:srgbClr val="1C2833"/>
+                </a:solidFill>
+                <a:latin typeface="Arial" pitchFamily="34" charset="0"/>
+                <a:ea typeface="Arial" pitchFamily="34" charset="-122"/>
+                <a:cs typeface="Arial" pitchFamily="34" charset="-120"/>
+              </a:rPr>
+              <a:t>kṛṣṇa pakṣa</a:t>
+            </a:r>
+            <a:pPr algn="l" indent="0" marL="0">
+              <a:lnSpc>
+                <a:spcPts val="1620"/>
+              </a:lnSpc>
+              <a:spcAft>
+                <a:spcPts val="300"/>
+              </a:spcAft>
+              <a:buNone/>
+            </a:pPr>
+            <a:r>
+              <a:rPr lang="en-US" sz="1200" dirty="0">
+                <a:solidFill>
+                  <a:srgbClr val="1C2833"/>
+                </a:solidFill>
+                <a:latin typeface="Arial" pitchFamily="34" charset="0"/>
+                <a:ea typeface="Arial" pitchFamily="34" charset="-122"/>
+                <a:cs typeface="Arial" pitchFamily="34" charset="-120"/>
+              </a:rPr>
+              <a:t> is "the dark side of the Moon" — these are completely different concepts. </a:t>
+            </a:r>
+            <a:pPr algn="l" indent="0" marL="0">
+              <a:lnSpc>
+                <a:spcPts val="1620"/>
+              </a:lnSpc>
+              <a:spcAft>
+                <a:spcPts val="300"/>
+              </a:spcAft>
+              <a:buNone/>
+            </a:pPr>
+            <a:r>
+              <a:rPr lang="en-US" sz="1200" i="1" dirty="0">
+                <a:solidFill>
+                  <a:srgbClr val="1C2833"/>
+                </a:solidFill>
+                <a:latin typeface="Arial" pitchFamily="34" charset="0"/>
+                <a:ea typeface="Arial" pitchFamily="34" charset="-122"/>
+                <a:cs typeface="Arial" pitchFamily="34" charset="-120"/>
+              </a:rPr>
+              <a:t>Kṛṣṇa pakṣa</a:t>
+            </a:r>
+            <a:pPr algn="l" indent="0" marL="0">
+              <a:lnSpc>
+                <a:spcPts val="1620"/>
+              </a:lnSpc>
+              <a:spcAft>
+                <a:spcPts val="300"/>
+              </a:spcAft>
+              <a:buNone/>
+            </a:pPr>
+            <a:r>
+              <a:rPr lang="en-US" sz="1200" dirty="0">
+                <a:solidFill>
+                  <a:srgbClr val="1C2833"/>
+                </a:solidFill>
+                <a:latin typeface="Arial" pitchFamily="34" charset="0"/>
+                <a:ea typeface="Arial" pitchFamily="34" charset="-122"/>
+                <a:cs typeface="Arial" pitchFamily="34" charset="-120"/>
+              </a:rPr>
+              <a:t> is a fortnight of the calendar; the "far side" of the Moon is a separate thing about which face we always see.</a:t>
+            </a:r>
+            <a:endParaRPr lang="en-US" sz="1200" dirty="0"/>
+          </a:p>
+          <a:p>
+            <a:pPr algn="l" marL="342900" indent="-342900">
+              <a:lnSpc>
+                <a:spcPts val="1620"/>
+              </a:lnSpc>
+              <a:spcAft>
+                <a:spcPts val="300"/>
+              </a:spcAft>
+              <a:buSzPct val="100000"/>
+              <a:buChar char="•"/>
+            </a:pPr>
+            <a:r>
+              <a:rPr lang="en-US" sz="1200" dirty="0">
+                <a:solidFill>
+                  <a:srgbClr val="1C2833"/>
+                </a:solidFill>
+                <a:latin typeface="Arial" pitchFamily="34" charset="0"/>
+                <a:ea typeface="Arial" pitchFamily="34" charset="-122"/>
+                <a:cs typeface="Arial" pitchFamily="34" charset="-120"/>
+              </a:rPr>
+              <a:t>Pronunciation hint: the </a:t>
+            </a:r>
+            <a:pPr algn="l" indent="0" marL="0">
+              <a:lnSpc>
+                <a:spcPts val="1620"/>
+              </a:lnSpc>
+              <a:spcAft>
+                <a:spcPts val="300"/>
+              </a:spcAft>
+              <a:buNone/>
+            </a:pPr>
+            <a:r>
+              <a:rPr lang="en-US" sz="1200" i="1" dirty="0">
+                <a:solidFill>
+                  <a:srgbClr val="1C2833"/>
+                </a:solidFill>
+                <a:latin typeface="Arial" pitchFamily="34" charset="0"/>
+                <a:ea typeface="Arial" pitchFamily="34" charset="-122"/>
+                <a:cs typeface="Arial" pitchFamily="34" charset="-120"/>
+              </a:rPr>
+              <a:t>ṣ</a:t>
+            </a:r>
+            <a:pPr algn="l" indent="0" marL="0">
+              <a:lnSpc>
+                <a:spcPts val="1620"/>
+              </a:lnSpc>
+              <a:spcAft>
+                <a:spcPts val="300"/>
+              </a:spcAft>
+              <a:buNone/>
+            </a:pPr>
+            <a:r>
+              <a:rPr lang="en-US" sz="1200" dirty="0">
+                <a:solidFill>
+                  <a:srgbClr val="1C2833"/>
+                </a:solidFill>
+                <a:latin typeface="Arial" pitchFamily="34" charset="0"/>
+                <a:ea typeface="Arial" pitchFamily="34" charset="-122"/>
+                <a:cs typeface="Arial" pitchFamily="34" charset="-120"/>
+              </a:rPr>
+              <a:t> in </a:t>
+            </a:r>
+            <a:pPr algn="l" indent="0" marL="0">
+              <a:lnSpc>
+                <a:spcPts val="1620"/>
+              </a:lnSpc>
+              <a:spcAft>
+                <a:spcPts val="300"/>
+              </a:spcAft>
+              <a:buNone/>
+            </a:pPr>
+            <a:r>
+              <a:rPr lang="en-US" sz="1200" i="1" dirty="0">
+                <a:solidFill>
+                  <a:srgbClr val="1C2833"/>
+                </a:solidFill>
+                <a:latin typeface="Arial" pitchFamily="34" charset="0"/>
+                <a:ea typeface="Arial" pitchFamily="34" charset="-122"/>
+                <a:cs typeface="Arial" pitchFamily="34" charset="-120"/>
+              </a:rPr>
+              <a:t>pakṣa</a:t>
+            </a:r>
+            <a:pPr algn="l" indent="0" marL="0">
+              <a:lnSpc>
+                <a:spcPts val="1620"/>
+              </a:lnSpc>
+              <a:spcAft>
+                <a:spcPts val="300"/>
+              </a:spcAft>
+              <a:buNone/>
+            </a:pPr>
+            <a:r>
+              <a:rPr lang="en-US" sz="1200" dirty="0">
+                <a:solidFill>
+                  <a:srgbClr val="1C2833"/>
+                </a:solidFill>
+                <a:latin typeface="Arial" pitchFamily="34" charset="0"/>
+                <a:ea typeface="Arial" pitchFamily="34" charset="-122"/>
+                <a:cs typeface="Arial" pitchFamily="34" charset="-120"/>
+              </a:rPr>
+              <a:t> is retroflex — closer to English "puk-sha" than "puk-sa." Don't worry about perfection; insist on "pakṣa," not "paksha-aaa."</a:t>
             </a:r>
             <a:endParaRPr lang="en-US" sz="1200" dirty="0"/>
           </a:p>
@@ -3594,7 +6907,7 @@
                 <a:ea typeface="Georgia" pitchFamily="34" charset="-122"/>
                 <a:cs typeface="Georgia" pitchFamily="34" charset="-120"/>
               </a:rPr>
-              <a:t>Materials</a:t>
+              <a:t>Learning objective</a:t>
             </a:r>
             <a:endParaRPr lang="en-US" sz="1800" dirty="0"/>
           </a:p>
@@ -3642,7 +6955,7 @@
                 <a:ea typeface="Arial" pitchFamily="34" charset="-122"/>
                 <a:cs typeface="Arial" pitchFamily="34" charset="-120"/>
               </a:rPr>
-              <a:t>– Yesterday's exit-ticket slips (skim before class) – Board with two columns ready: </a:t>
+              <a:t>Students will define </a:t>
             </a:r>
             <a:pPr algn="l" indent="0" marL="0">
               <a:lnSpc>
@@ -3734,7 +7047,343 @@
                 <a:ea typeface="Arial" pitchFamily="34" charset="-122"/>
                 <a:cs typeface="Arial" pitchFamily="34" charset="-120"/>
               </a:rPr>
-              <a:t> – The white ball and torch (for a 2-min recall demo) – Notebooks</a:t>
+              <a:t>, identify the two anchor days </a:t>
+            </a:r>
+            <a:pPr algn="l" indent="0" marL="0">
+              <a:lnSpc>
+                <a:spcPts val="1680"/>
+              </a:lnSpc>
+              <a:spcBef>
+                <a:spcPts val="300"/>
+              </a:spcBef>
+              <a:spcAft>
+                <a:spcPts val="300"/>
+              </a:spcAft>
+              <a:buNone/>
+            </a:pPr>
+            <a:r>
+              <a:rPr lang="en-US" sz="1200" i="1" dirty="0">
+                <a:solidFill>
+                  <a:srgbClr val="1C2833"/>
+                </a:solidFill>
+                <a:latin typeface="Arial" pitchFamily="34" charset="0"/>
+                <a:ea typeface="Arial" pitchFamily="34" charset="-122"/>
+                <a:cs typeface="Arial" pitchFamily="34" charset="-120"/>
+              </a:rPr>
+              <a:t>amāvasyā</a:t>
+            </a:r>
+            <a:pPr algn="l" indent="0" marL="0">
+              <a:lnSpc>
+                <a:spcPts val="1680"/>
+              </a:lnSpc>
+              <a:spcBef>
+                <a:spcPts val="300"/>
+              </a:spcBef>
+              <a:spcAft>
+                <a:spcPts val="300"/>
+              </a:spcAft>
+              <a:buNone/>
+            </a:pPr>
+            <a:r>
+              <a:rPr lang="en-US" sz="1200" dirty="0">
+                <a:solidFill>
+                  <a:srgbClr val="1C2833"/>
+                </a:solidFill>
+                <a:latin typeface="Arial" pitchFamily="34" charset="0"/>
+                <a:ea typeface="Arial" pitchFamily="34" charset="-122"/>
+                <a:cs typeface="Arial" pitchFamily="34" charset="-120"/>
+              </a:rPr>
+              <a:t> and </a:t>
+            </a:r>
+            <a:pPr algn="l" indent="0" marL="0">
+              <a:lnSpc>
+                <a:spcPts val="1680"/>
+              </a:lnSpc>
+              <a:spcBef>
+                <a:spcPts val="300"/>
+              </a:spcBef>
+              <a:spcAft>
+                <a:spcPts val="300"/>
+              </a:spcAft>
+              <a:buNone/>
+            </a:pPr>
+            <a:r>
+              <a:rPr lang="en-US" sz="1200" i="1" dirty="0">
+                <a:solidFill>
+                  <a:srgbClr val="1C2833"/>
+                </a:solidFill>
+                <a:latin typeface="Arial" pitchFamily="34" charset="0"/>
+                <a:ea typeface="Arial" pitchFamily="34" charset="-122"/>
+                <a:cs typeface="Arial" pitchFamily="34" charset="-120"/>
+              </a:rPr>
+              <a:t>pūrṇimā</a:t>
+            </a:r>
+            <a:pPr algn="l" indent="0" marL="0">
+              <a:lnSpc>
+                <a:spcPts val="1680"/>
+              </a:lnSpc>
+              <a:spcBef>
+                <a:spcPts val="300"/>
+              </a:spcBef>
+              <a:spcAft>
+                <a:spcPts val="300"/>
+              </a:spcAft>
+              <a:buNone/>
+            </a:pPr>
+            <a:r>
+              <a:rPr lang="en-US" sz="1200" dirty="0">
+                <a:solidFill>
+                  <a:srgbClr val="1C2833"/>
+                </a:solidFill>
+                <a:latin typeface="Arial" pitchFamily="34" charset="0"/>
+                <a:ea typeface="Arial" pitchFamily="34" charset="-122"/>
+                <a:cs typeface="Arial" pitchFamily="34" charset="-120"/>
+              </a:rPr>
+              <a:t>, and place yesterday's observed Moon shape into one of the two pakṣas.</a:t>
+            </a:r>
+            <a:endParaRPr lang="en-US" sz="1200" dirty="0"/>
+          </a:p>
+        </p:txBody>
+      </p:sp>
+      <p:sp>
+        <p:nvSpPr>
+          <p:cNvPr id="5" name="Text 3"/>
+          <p:cNvSpPr/>
+          <p:nvPr/>
+        </p:nvSpPr>
+        <p:spPr>
+          <a:xfrm>
+            <a:off x="406301" y="4434929"/>
+            <a:ext cx="8498026" cy="213271"/>
+          </a:xfrm>
+          <a:prstGeom prst="rect">
+            <a:avLst/>
+          </a:prstGeom>
+          <a:noFill/>
+          <a:ln/>
+        </p:spPr>
+        <p:txBody>
+          <a:bodyPr wrap="square" lIns="0" tIns="0" rIns="0" bIns="0" rtlCol="0" anchor="t"/>
+          <a:lstStyle/>
+          <a:p>
+            <a:pPr algn="l" indent="0" marL="0">
+              <a:lnSpc>
+                <a:spcPts val="1680"/>
+              </a:lnSpc>
+              <a:spcBef>
+                <a:spcPts val="300"/>
+              </a:spcBef>
+              <a:spcAft>
+                <a:spcPts val="300"/>
+              </a:spcAft>
+              <a:buNone/>
+            </a:pPr>
+            <a:r>
+              <a:rPr lang="en-US" sz="1200" dirty="0">
+                <a:solidFill>
+                  <a:srgbClr val="1C2833"/>
+                </a:solidFill>
+                <a:latin typeface="Arial" pitchFamily="34" charset="0"/>
+                <a:ea typeface="Arial" pitchFamily="34" charset="-122"/>
+                <a:cs typeface="Arial" pitchFamily="34" charset="-120"/>
+              </a:rPr>
+              <a:t>Middle ·  · IKS Curriculum</a:t>
+            </a:r>
+            <a:endParaRPr lang="en-US" sz="1200" dirty="0"/>
+          </a:p>
+        </p:txBody>
+      </p:sp>
+    </p:spTree>
+  </p:cSld>
+  <p:clrMapOvr>
+    <a:masterClrMapping/>
+  </p:clrMapOvr>
+</p:sld>
+</file>
+
+<file path=ppt/slides/slide20.xml><?xml version="1.0" encoding="utf-8"?>
+<p:sld xmlns:a="http://schemas.openxmlformats.org/drawingml/2006/main" xmlns:r="http://schemas.openxmlformats.org/officeDocument/2006/relationships" xmlns:p="http://schemas.openxmlformats.org/presentationml/2006/main">
+  <p:cSld name="Slide 20">
+    <p:bg>
+      <p:bgPr>
+        <a:solidFill>
+          <a:srgbClr val="FFFFFF"/>
+        </a:solidFill>
+      </p:bgPr>
+    </p:bg>
+    <p:spTree>
+      <p:nvGrpSpPr>
+        <p:cNvPr id="1" name=""/>
+        <p:cNvGrpSpPr/>
+        <p:nvPr/>
+      </p:nvGrpSpPr>
+      <p:grpSpPr>
+        <a:xfrm>
+          <a:off x="0" y="0"/>
+          <a:ext cx="0" cy="0"/>
+          <a:chOff x="0" y="0"/>
+          <a:chExt cx="0" cy="0"/>
+        </a:xfrm>
+      </p:grpSpPr>
+      <p:sp>
+        <p:nvSpPr>
+          <p:cNvPr id="2" name="Text 0"/>
+          <p:cNvSpPr/>
+          <p:nvPr/>
+        </p:nvSpPr>
+        <p:spPr>
+          <a:xfrm>
+            <a:off x="0" y="0"/>
+            <a:ext cx="9144000" cy="101501"/>
+          </a:xfrm>
+          <a:prstGeom prst="rect">
+            <a:avLst/>
+          </a:prstGeom>
+          <a:solidFill>
+            <a:srgbClr val="277884"/>
+          </a:solidFill>
+          <a:ln/>
+        </p:spPr>
+        <p:txBody>
+          <a:bodyPr wrap="square" rtlCol="0" anchor="ctr"/>
+          <a:lstStyle/>
+          <a:p>
+            <a:pPr indent="0" marL="0">
+              <a:buNone/>
+            </a:pPr>
+            <a:endParaRPr lang="en-US" dirty="0"/>
+          </a:p>
+        </p:txBody>
+      </p:sp>
+      <p:sp>
+        <p:nvSpPr>
+          <p:cNvPr id="3" name="Text 1"/>
+          <p:cNvSpPr/>
+          <p:nvPr/>
+        </p:nvSpPr>
+        <p:spPr>
+          <a:xfrm>
+            <a:off x="406301" y="457051"/>
+            <a:ext cx="8498026" cy="274290"/>
+          </a:xfrm>
+          <a:prstGeom prst="rect">
+            <a:avLst/>
+          </a:prstGeom>
+          <a:noFill/>
+          <a:ln/>
+        </p:spPr>
+        <p:txBody>
+          <a:bodyPr wrap="square" lIns="0" tIns="0" rIns="0" bIns="0" rtlCol="0" anchor="t"/>
+          <a:lstStyle/>
+          <a:p>
+            <a:pPr algn="l" indent="0" marL="0">
+              <a:lnSpc>
+                <a:spcPts val="2160"/>
+              </a:lnSpc>
+              <a:spcBef>
+                <a:spcPts val="600"/>
+              </a:spcBef>
+              <a:spcAft>
+                <a:spcPts val="800"/>
+              </a:spcAft>
+              <a:buNone/>
+            </a:pPr>
+            <a:r>
+              <a:rPr lang="en-US" sz="1800" b="1" dirty="0">
+                <a:solidFill>
+                  <a:srgbClr val="FE4447"/>
+                </a:solidFill>
+                <a:latin typeface="Georgia" pitchFamily="34" charset="0"/>
+                <a:ea typeface="Georgia" pitchFamily="34" charset="-122"/>
+                <a:cs typeface="Georgia" pitchFamily="34" charset="-120"/>
+              </a:rPr>
+              <a:t>Citation(s) used in this lesson</a:t>
+            </a:r>
+            <a:endParaRPr lang="en-US" sz="1800" dirty="0"/>
+          </a:p>
+        </p:txBody>
+      </p:sp>
+      <p:sp>
+        <p:nvSpPr>
+          <p:cNvPr id="4" name="Text 2"/>
+          <p:cNvSpPr/>
+          <p:nvPr/>
+        </p:nvSpPr>
+        <p:spPr>
+          <a:xfrm>
+            <a:off x="634901" y="883593"/>
+            <a:ext cx="8102798" cy="487561"/>
+          </a:xfrm>
+          <a:prstGeom prst="rect">
+            <a:avLst/>
+          </a:prstGeom>
+          <a:noFill/>
+          <a:ln/>
+        </p:spPr>
+        <p:txBody>
+          <a:bodyPr wrap="square" lIns="0" tIns="0" rIns="0" bIns="0" rtlCol="0" anchor="t"/>
+          <a:lstStyle/>
+          <a:p>
+            <a:pPr algn="l" marL="342900" indent="-342900">
+              <a:lnSpc>
+                <a:spcPts val="1620"/>
+              </a:lnSpc>
+              <a:spcAft>
+                <a:spcPts val="300"/>
+              </a:spcAft>
+              <a:buSzPct val="100000"/>
+              <a:buChar char="•"/>
+            </a:pPr>
+            <a:r>
+              <a:rPr lang="en-US" sz="1200" dirty="0">
+                <a:solidFill>
+                  <a:srgbClr val="1C2833"/>
+                </a:solidFill>
+                <a:latin typeface="Arial" pitchFamily="34" charset="0"/>
+                <a:ea typeface="Arial" pitchFamily="34" charset="-122"/>
+                <a:cs typeface="Arial" pitchFamily="34" charset="-120"/>
+              </a:rPr>
+              <a:t>Paraphrase from </a:t>
+            </a:r>
+            <a:pPr algn="l" indent="0" marL="0">
+              <a:lnSpc>
+                <a:spcPts val="1620"/>
+              </a:lnSpc>
+              <a:spcAft>
+                <a:spcPts val="300"/>
+              </a:spcAft>
+              <a:buNone/>
+            </a:pPr>
+            <a:r>
+              <a:rPr lang="en-US" sz="1200" i="1" dirty="0">
+                <a:solidFill>
+                  <a:srgbClr val="1C2833"/>
+                </a:solidFill>
+                <a:latin typeface="Arial" pitchFamily="34" charset="0"/>
+                <a:ea typeface="Arial" pitchFamily="34" charset="-122"/>
+                <a:cs typeface="Arial" pitchFamily="34" charset="-120"/>
+              </a:rPr>
+              <a:t>Sūrya-siddhānta</a:t>
+            </a:r>
+            <a:pPr algn="l" indent="0" marL="0">
+              <a:lnSpc>
+                <a:spcPts val="1620"/>
+              </a:lnSpc>
+              <a:spcAft>
+                <a:spcPts val="300"/>
+              </a:spcAft>
+              <a:buNone/>
+            </a:pPr>
+            <a:r>
+              <a:rPr lang="en-US" sz="1200" dirty="0">
+                <a:solidFill>
+                  <a:srgbClr val="1C2833"/>
+                </a:solidFill>
+                <a:latin typeface="Arial" pitchFamily="34" charset="0"/>
+                <a:ea typeface="Arial" pitchFamily="34" charset="-122"/>
+                <a:cs typeface="Arial" pitchFamily="34" charset="-120"/>
+              </a:rPr>
+              <a:t>, chapter 2 (lunar motion): the lunar month is divided into 30 tithis, distributed 15 each across the two pakṣas. Cited by text name only.</a:t>
             </a:r>
             <a:endParaRPr lang="en-US" sz="1200" dirty="0"/>
           </a:p>
@@ -3892,7 +7541,7 @@
                 <a:ea typeface="Georgia" pitchFamily="34" charset="-122"/>
                 <a:cs typeface="Georgia" pitchFamily="34" charset="-120"/>
               </a:rPr>
-              <a:t>Vocabulary introduced today</a:t>
+              <a:t>Materials</a:t>
             </a:r>
             <a:endParaRPr lang="en-US" sz="1800" dirty="0"/>
           </a:p>
@@ -3907,7 +7556,7 @@
         <p:spPr>
           <a:xfrm>
             <a:off x="634901" y="883593"/>
-            <a:ext cx="8102798" cy="1668363"/>
+            <a:ext cx="8102798" cy="1013222"/>
           </a:xfrm>
           <a:prstGeom prst="rect">
             <a:avLst/>
@@ -3930,26 +7579,6 @@
               <a:buChar char="•"/>
             </a:pPr>
             <a:r>
-              <a:rPr lang="en-US" sz="1200" i="1" dirty="0">
-                <a:solidFill>
-                  <a:srgbClr val="1C2833"/>
-                </a:solidFill>
-                <a:latin typeface="Arial" pitchFamily="34" charset="0"/>
-                <a:ea typeface="Arial" pitchFamily="34" charset="-122"/>
-                <a:cs typeface="Arial" pitchFamily="34" charset="-120"/>
-              </a:rPr>
-              <a:t>pakṣa</a:t>
-            </a:r>
-            <a:pPr algn="l" indent="0" marL="0">
-              <a:lnSpc>
-                <a:spcPts val="1620"/>
-              </a:lnSpc>
-              <a:spcAft>
-                <a:spcPts val="300"/>
-              </a:spcAft>
-              <a:buNone/>
-            </a:pPr>
-            <a:r>
               <a:rPr lang="en-US" sz="1200" dirty="0">
                 <a:solidFill>
                   <a:srgbClr val="1C2833"/>
@@ -3958,7 +7587,7 @@
                 <a:ea typeface="Arial" pitchFamily="34" charset="-122"/>
                 <a:cs typeface="Arial" pitchFamily="34" charset="-120"/>
               </a:rPr>
-              <a:t> (IAST: pakṣa; lit. "wing, side, fortnight") — half of a lunar month. There are exactly two pakṣas in every lunar month.</a:t>
+              <a:t>Yesterday's exit-ticket slips (skim before class)</a:t>
             </a:r>
             <a:endParaRPr lang="en-US" sz="1200" dirty="0"/>
           </a:p>
@@ -3974,6 +7603,26 @@
               <a:buChar char="•"/>
             </a:pPr>
             <a:r>
+              <a:rPr lang="en-US" sz="1200" dirty="0">
+                <a:solidFill>
+                  <a:srgbClr val="1C2833"/>
+                </a:solidFill>
+                <a:latin typeface="Arial" pitchFamily="34" charset="0"/>
+                <a:ea typeface="Arial" pitchFamily="34" charset="-122"/>
+                <a:cs typeface="Arial" pitchFamily="34" charset="-120"/>
+              </a:rPr>
+              <a:t>Board with two columns ready: </a:t>
+            </a:r>
+            <a:pPr algn="l" indent="0" marL="0">
+              <a:lnSpc>
+                <a:spcPts val="1620"/>
+              </a:lnSpc>
+              <a:spcAft>
+                <a:spcPts val="300"/>
+              </a:spcAft>
+              <a:buNone/>
+            </a:pPr>
+            <a:r>
               <a:rPr lang="en-US" sz="1200" i="1" dirty="0">
                 <a:solidFill>
                   <a:srgbClr val="1C2833"/>
@@ -4002,7 +7651,27 @@
                 <a:ea typeface="Arial" pitchFamily="34" charset="-122"/>
                 <a:cs typeface="Arial" pitchFamily="34" charset="-120"/>
               </a:rPr>
-              <a:t> (IAST: śukla-pakṣa; lit. "bright fortnight") — the waxing half: the Moon grows from invisible to full.</a:t>
+              <a:t> and </a:t>
+            </a:r>
+            <a:pPr algn="l" indent="0" marL="0">
+              <a:lnSpc>
+                <a:spcPts val="1620"/>
+              </a:lnSpc>
+              <a:spcAft>
+                <a:spcPts val="300"/>
+              </a:spcAft>
+              <a:buNone/>
+            </a:pPr>
+            <a:r>
+              <a:rPr lang="en-US" sz="1200" i="1" dirty="0">
+                <a:solidFill>
+                  <a:srgbClr val="1C2833"/>
+                </a:solidFill>
+                <a:latin typeface="Arial" pitchFamily="34" charset="0"/>
+                <a:ea typeface="Arial" pitchFamily="34" charset="-122"/>
+                <a:cs typeface="Arial" pitchFamily="34" charset="-120"/>
+              </a:rPr>
+              <a:t>kṛṣṇa pakṣa</a:t>
             </a:r>
             <a:endParaRPr lang="en-US" sz="1200" dirty="0"/>
           </a:p>
@@ -4018,26 +7687,6 @@
               <a:buChar char="•"/>
             </a:pPr>
             <a:r>
-              <a:rPr lang="en-US" sz="1200" i="1" dirty="0">
-                <a:solidFill>
-                  <a:srgbClr val="1C2833"/>
-                </a:solidFill>
-                <a:latin typeface="Arial" pitchFamily="34" charset="0"/>
-                <a:ea typeface="Arial" pitchFamily="34" charset="-122"/>
-                <a:cs typeface="Arial" pitchFamily="34" charset="-120"/>
-              </a:rPr>
-              <a:t>kṛṣṇa pakṣa</a:t>
-            </a:r>
-            <a:pPr algn="l" indent="0" marL="0">
-              <a:lnSpc>
-                <a:spcPts val="1620"/>
-              </a:lnSpc>
-              <a:spcAft>
-                <a:spcPts val="300"/>
-              </a:spcAft>
-              <a:buNone/>
-            </a:pPr>
-            <a:r>
               <a:rPr lang="en-US" sz="1200" dirty="0">
                 <a:solidFill>
                   <a:srgbClr val="1C2833"/>
@@ -4046,7 +7695,7 @@
                 <a:ea typeface="Arial" pitchFamily="34" charset="-122"/>
                 <a:cs typeface="Arial" pitchFamily="34" charset="-120"/>
               </a:rPr>
-              <a:t> (IAST: kṛṣṇa-pakṣa; lit. "dark fortnight") — the waning half: the Moon shrinks from full back to invisible.</a:t>
+              <a:t>The white ball and torch (for a 2-min recall demo)</a:t>
             </a:r>
             <a:endParaRPr lang="en-US" sz="1200" dirty="0"/>
           </a:p>
@@ -4062,26 +7711,6 @@
               <a:buChar char="•"/>
             </a:pPr>
             <a:r>
-              <a:rPr lang="en-US" sz="1200" i="1" dirty="0">
-                <a:solidFill>
-                  <a:srgbClr val="1C2833"/>
-                </a:solidFill>
-                <a:latin typeface="Arial" pitchFamily="34" charset="0"/>
-                <a:ea typeface="Arial" pitchFamily="34" charset="-122"/>
-                <a:cs typeface="Arial" pitchFamily="34" charset="-120"/>
-              </a:rPr>
-              <a:t>amāvasyā</a:t>
-            </a:r>
-            <a:pPr algn="l" indent="0" marL="0">
-              <a:lnSpc>
-                <a:spcPts val="1620"/>
-              </a:lnSpc>
-              <a:spcAft>
-                <a:spcPts val="300"/>
-              </a:spcAft>
-              <a:buNone/>
-            </a:pPr>
-            <a:r>
               <a:rPr lang="en-US" sz="1200" dirty="0">
                 <a:solidFill>
                   <a:srgbClr val="1C2833"/>
@@ -4090,51 +7719,7 @@
                 <a:ea typeface="Arial" pitchFamily="34" charset="-122"/>
                 <a:cs typeface="Arial" pitchFamily="34" charset="-120"/>
               </a:rPr>
-              <a:t> (IAST: amāvasyā; lit. "dwelling-together") — new moon; the Moon and Sun are in the same direction in the sky.</a:t>
-            </a:r>
-            <a:endParaRPr lang="en-US" sz="1200" dirty="0"/>
-          </a:p>
-          <a:p>
-            <a:pPr algn="l" marL="342900" indent="-342900">
-              <a:lnSpc>
-                <a:spcPts val="1620"/>
-              </a:lnSpc>
-              <a:spcAft>
-                <a:spcPts val="300"/>
-              </a:spcAft>
-              <a:buSzPct val="100000"/>
-              <a:buChar char="•"/>
-            </a:pPr>
-            <a:r>
-              <a:rPr lang="en-US" sz="1200" i="1" dirty="0">
-                <a:solidFill>
-                  <a:srgbClr val="1C2833"/>
-                </a:solidFill>
-                <a:latin typeface="Arial" pitchFamily="34" charset="0"/>
-                <a:ea typeface="Arial" pitchFamily="34" charset="-122"/>
-                <a:cs typeface="Arial" pitchFamily="34" charset="-120"/>
-              </a:rPr>
-              <a:t>pūrṇimā</a:t>
-            </a:r>
-            <a:pPr algn="l" indent="0" marL="0">
-              <a:lnSpc>
-                <a:spcPts val="1620"/>
-              </a:lnSpc>
-              <a:spcAft>
-                <a:spcPts val="300"/>
-              </a:spcAft>
-              <a:buNone/>
-            </a:pPr>
-            <a:r>
-              <a:rPr lang="en-US" sz="1200" dirty="0">
-                <a:solidFill>
-                  <a:srgbClr val="1C2833"/>
-                </a:solidFill>
-                <a:latin typeface="Arial" pitchFamily="34" charset="0"/>
-                <a:ea typeface="Arial" pitchFamily="34" charset="-122"/>
-                <a:cs typeface="Arial" pitchFamily="34" charset="-120"/>
-              </a:rPr>
-              <a:t> (IAST: pūrṇimā; lit. "fullness") — full moon; Moon directly opposite the Sun.</a:t>
+              <a:t>Notebooks</a:t>
             </a:r>
             <a:endParaRPr lang="en-US" sz="1200" dirty="0"/>
           </a:p>
@@ -4292,7 +7877,7 @@
                 <a:ea typeface="Georgia" pitchFamily="34" charset="-122"/>
                 <a:cs typeface="Georgia" pitchFamily="34" charset="-120"/>
               </a:rPr>
-              <a:t>Lesson flow</a:t>
+              <a:t>Vocabulary introduced today</a:t>
             </a:r>
             <a:endParaRPr lang="en-US" sz="1800" dirty="0"/>
           </a:p>
@@ -4301,6 +7886,248 @@
       <p:sp>
         <p:nvSpPr>
           <p:cNvPr id="4" name="Text 2"/>
+          <p:cNvSpPr/>
+          <p:nvPr/>
+        </p:nvSpPr>
+        <p:spPr>
+          <a:xfrm>
+            <a:off x="634901" y="883593"/>
+            <a:ext cx="8102798" cy="1668363"/>
+          </a:xfrm>
+          <a:prstGeom prst="rect">
+            <a:avLst/>
+          </a:prstGeom>
+          <a:noFill/>
+          <a:ln/>
+        </p:spPr>
+        <p:txBody>
+          <a:bodyPr wrap="square" lIns="0" tIns="0" rIns="0" bIns="0" rtlCol="0" anchor="t"/>
+          <a:lstStyle/>
+          <a:p>
+            <a:pPr algn="l" marL="342900" indent="-342900">
+              <a:lnSpc>
+                <a:spcPts val="1620"/>
+              </a:lnSpc>
+              <a:spcAft>
+                <a:spcPts val="300"/>
+              </a:spcAft>
+              <a:buSzPct val="100000"/>
+              <a:buChar char="•"/>
+            </a:pPr>
+            <a:r>
+              <a:rPr lang="en-US" sz="1200" i="1" dirty="0">
+                <a:solidFill>
+                  <a:srgbClr val="1C2833"/>
+                </a:solidFill>
+                <a:latin typeface="Arial" pitchFamily="34" charset="0"/>
+                <a:ea typeface="Arial" pitchFamily="34" charset="-122"/>
+                <a:cs typeface="Arial" pitchFamily="34" charset="-120"/>
+              </a:rPr>
+              <a:t>pakṣa</a:t>
+            </a:r>
+            <a:pPr algn="l" indent="0" marL="0">
+              <a:lnSpc>
+                <a:spcPts val="1620"/>
+              </a:lnSpc>
+              <a:spcAft>
+                <a:spcPts val="300"/>
+              </a:spcAft>
+              <a:buNone/>
+            </a:pPr>
+            <a:r>
+              <a:rPr lang="en-US" sz="1200" dirty="0">
+                <a:solidFill>
+                  <a:srgbClr val="1C2833"/>
+                </a:solidFill>
+                <a:latin typeface="Arial" pitchFamily="34" charset="0"/>
+                <a:ea typeface="Arial" pitchFamily="34" charset="-122"/>
+                <a:cs typeface="Arial" pitchFamily="34" charset="-120"/>
+              </a:rPr>
+              <a:t> (IAST: pakṣa; lit. "wing, side, fortnight") — half of a lunar month. There are exactly two pakṣas in every lunar month.</a:t>
+            </a:r>
+            <a:endParaRPr lang="en-US" sz="1200" dirty="0"/>
+          </a:p>
+          <a:p>
+            <a:pPr algn="l" marL="342900" indent="-342900">
+              <a:lnSpc>
+                <a:spcPts val="1620"/>
+              </a:lnSpc>
+              <a:spcAft>
+                <a:spcPts val="300"/>
+              </a:spcAft>
+              <a:buSzPct val="100000"/>
+              <a:buChar char="•"/>
+            </a:pPr>
+            <a:r>
+              <a:rPr lang="en-US" sz="1200" i="1" dirty="0">
+                <a:solidFill>
+                  <a:srgbClr val="1C2833"/>
+                </a:solidFill>
+                <a:latin typeface="Arial" pitchFamily="34" charset="0"/>
+                <a:ea typeface="Arial" pitchFamily="34" charset="-122"/>
+                <a:cs typeface="Arial" pitchFamily="34" charset="-120"/>
+              </a:rPr>
+              <a:t>śukla pakṣa</a:t>
+            </a:r>
+            <a:pPr algn="l" indent="0" marL="0">
+              <a:lnSpc>
+                <a:spcPts val="1620"/>
+              </a:lnSpc>
+              <a:spcAft>
+                <a:spcPts val="300"/>
+              </a:spcAft>
+              <a:buNone/>
+            </a:pPr>
+            <a:r>
+              <a:rPr lang="en-US" sz="1200" dirty="0">
+                <a:solidFill>
+                  <a:srgbClr val="1C2833"/>
+                </a:solidFill>
+                <a:latin typeface="Arial" pitchFamily="34" charset="0"/>
+                <a:ea typeface="Arial" pitchFamily="34" charset="-122"/>
+                <a:cs typeface="Arial" pitchFamily="34" charset="-120"/>
+              </a:rPr>
+              <a:t> (IAST: śukla-pakṣa; lit. "bright fortnight") — the waxing half: the Moon grows from invisible to full.</a:t>
+            </a:r>
+            <a:endParaRPr lang="en-US" sz="1200" dirty="0"/>
+          </a:p>
+          <a:p>
+            <a:pPr algn="l" marL="342900" indent="-342900">
+              <a:lnSpc>
+                <a:spcPts val="1620"/>
+              </a:lnSpc>
+              <a:spcAft>
+                <a:spcPts val="300"/>
+              </a:spcAft>
+              <a:buSzPct val="100000"/>
+              <a:buChar char="•"/>
+            </a:pPr>
+            <a:r>
+              <a:rPr lang="en-US" sz="1200" i="1" dirty="0">
+                <a:solidFill>
+                  <a:srgbClr val="1C2833"/>
+                </a:solidFill>
+                <a:latin typeface="Arial" pitchFamily="34" charset="0"/>
+                <a:ea typeface="Arial" pitchFamily="34" charset="-122"/>
+                <a:cs typeface="Arial" pitchFamily="34" charset="-120"/>
+              </a:rPr>
+              <a:t>kṛṣṇa pakṣa</a:t>
+            </a:r>
+            <a:pPr algn="l" indent="0" marL="0">
+              <a:lnSpc>
+                <a:spcPts val="1620"/>
+              </a:lnSpc>
+              <a:spcAft>
+                <a:spcPts val="300"/>
+              </a:spcAft>
+              <a:buNone/>
+            </a:pPr>
+            <a:r>
+              <a:rPr lang="en-US" sz="1200" dirty="0">
+                <a:solidFill>
+                  <a:srgbClr val="1C2833"/>
+                </a:solidFill>
+                <a:latin typeface="Arial" pitchFamily="34" charset="0"/>
+                <a:ea typeface="Arial" pitchFamily="34" charset="-122"/>
+                <a:cs typeface="Arial" pitchFamily="34" charset="-120"/>
+              </a:rPr>
+              <a:t> (IAST: kṛṣṇa-pakṣa; lit. "dark fortnight") — the waning half: the Moon shrinks from full back to invisible.</a:t>
+            </a:r>
+            <a:endParaRPr lang="en-US" sz="1200" dirty="0"/>
+          </a:p>
+          <a:p>
+            <a:pPr algn="l" marL="342900" indent="-342900">
+              <a:lnSpc>
+                <a:spcPts val="1620"/>
+              </a:lnSpc>
+              <a:spcAft>
+                <a:spcPts val="300"/>
+              </a:spcAft>
+              <a:buSzPct val="100000"/>
+              <a:buChar char="•"/>
+            </a:pPr>
+            <a:r>
+              <a:rPr lang="en-US" sz="1200" i="1" dirty="0">
+                <a:solidFill>
+                  <a:srgbClr val="1C2833"/>
+                </a:solidFill>
+                <a:latin typeface="Arial" pitchFamily="34" charset="0"/>
+                <a:ea typeface="Arial" pitchFamily="34" charset="-122"/>
+                <a:cs typeface="Arial" pitchFamily="34" charset="-120"/>
+              </a:rPr>
+              <a:t>amāvasyā</a:t>
+            </a:r>
+            <a:pPr algn="l" indent="0" marL="0">
+              <a:lnSpc>
+                <a:spcPts val="1620"/>
+              </a:lnSpc>
+              <a:spcAft>
+                <a:spcPts val="300"/>
+              </a:spcAft>
+              <a:buNone/>
+            </a:pPr>
+            <a:r>
+              <a:rPr lang="en-US" sz="1200" dirty="0">
+                <a:solidFill>
+                  <a:srgbClr val="1C2833"/>
+                </a:solidFill>
+                <a:latin typeface="Arial" pitchFamily="34" charset="0"/>
+                <a:ea typeface="Arial" pitchFamily="34" charset="-122"/>
+                <a:cs typeface="Arial" pitchFamily="34" charset="-120"/>
+              </a:rPr>
+              <a:t> (IAST: amāvasyā; lit. "dwelling-together") — new moon; the Moon and Sun are in the same direction in the sky.</a:t>
+            </a:r>
+            <a:endParaRPr lang="en-US" sz="1200" dirty="0"/>
+          </a:p>
+          <a:p>
+            <a:pPr algn="l" marL="342900" indent="-342900">
+              <a:lnSpc>
+                <a:spcPts val="1620"/>
+              </a:lnSpc>
+              <a:spcAft>
+                <a:spcPts val="300"/>
+              </a:spcAft>
+              <a:buSzPct val="100000"/>
+              <a:buChar char="•"/>
+            </a:pPr>
+            <a:r>
+              <a:rPr lang="en-US" sz="1200" i="1" dirty="0">
+                <a:solidFill>
+                  <a:srgbClr val="1C2833"/>
+                </a:solidFill>
+                <a:latin typeface="Arial" pitchFamily="34" charset="0"/>
+                <a:ea typeface="Arial" pitchFamily="34" charset="-122"/>
+                <a:cs typeface="Arial" pitchFamily="34" charset="-120"/>
+              </a:rPr>
+              <a:t>pūrṇimā</a:t>
+            </a:r>
+            <a:pPr algn="l" indent="0" marL="0">
+              <a:lnSpc>
+                <a:spcPts val="1620"/>
+              </a:lnSpc>
+              <a:spcAft>
+                <a:spcPts val="300"/>
+              </a:spcAft>
+              <a:buNone/>
+            </a:pPr>
+            <a:r>
+              <a:rPr lang="en-US" sz="1200" dirty="0">
+                <a:solidFill>
+                  <a:srgbClr val="1C2833"/>
+                </a:solidFill>
+                <a:latin typeface="Arial" pitchFamily="34" charset="0"/>
+                <a:ea typeface="Arial" pitchFamily="34" charset="-122"/>
+                <a:cs typeface="Arial" pitchFamily="34" charset="-120"/>
+              </a:rPr>
+              <a:t> (IAST: pūrṇimā; lit. "fullness") — full moon; Moon directly opposite the Sun.</a:t>
+            </a:r>
+            <a:endParaRPr lang="en-US" sz="1200" dirty="0"/>
+          </a:p>
+        </p:txBody>
+      </p:sp>
+      <p:sp>
+        <p:nvSpPr>
+          <p:cNvPr id="5" name="Text 3"/>
           <p:cNvSpPr/>
           <p:nvPr/>
         </p:nvSpPr>
@@ -4450,7 +8277,7 @@
                 <a:ea typeface="Georgia" pitchFamily="34" charset="-122"/>
                 <a:cs typeface="Georgia" pitchFamily="34" charset="-120"/>
               </a:rPr>
-              <a:t>Warm-up (5 min)</a:t>
+              <a:t>Lesson flow</a:t>
             </a:r>
             <a:endParaRPr lang="en-US" sz="1800" dirty="0"/>
           </a:p>
@@ -4459,169 +8286,6 @@
       <p:sp>
         <p:nvSpPr>
           <p:cNvPr id="4" name="Text 2"/>
-          <p:cNvSpPr/>
-          <p:nvPr/>
-        </p:nvSpPr>
-        <p:spPr>
-          <a:xfrm>
-            <a:off x="406301" y="870942"/>
-            <a:ext cx="8498026" cy="639812"/>
-          </a:xfrm>
-          <a:prstGeom prst="rect">
-            <a:avLst/>
-          </a:prstGeom>
-          <a:noFill/>
-          <a:ln/>
-        </p:spPr>
-        <p:txBody>
-          <a:bodyPr wrap="square" lIns="0" tIns="0" rIns="0" bIns="0" rtlCol="0" anchor="t"/>
-          <a:lstStyle/>
-          <a:p>
-            <a:pPr algn="l" indent="0" marL="0">
-              <a:lnSpc>
-                <a:spcPts val="1680"/>
-              </a:lnSpc>
-              <a:spcBef>
-                <a:spcPts val="300"/>
-              </a:spcBef>
-              <a:spcAft>
-                <a:spcPts val="300"/>
-              </a:spcAft>
-              <a:buNone/>
-            </a:pPr>
-            <a:r>
-              <a:rPr lang="en-US" sz="1200" dirty="0">
-                <a:solidFill>
-                  <a:srgbClr val="1C2833"/>
-                </a:solidFill>
-                <a:latin typeface="Arial" pitchFamily="34" charset="0"/>
-                <a:ea typeface="Arial" pitchFamily="34" charset="-122"/>
-                <a:cs typeface="Arial" pitchFamily="34" charset="-120"/>
-              </a:rPr>
-              <a:t>– Daily prompt: </a:t>
-            </a:r>
-            <a:pPr algn="l" indent="0" marL="0">
-              <a:lnSpc>
-                <a:spcPts val="1680"/>
-              </a:lnSpc>
-              <a:spcBef>
-                <a:spcPts val="300"/>
-              </a:spcBef>
-              <a:spcAft>
-                <a:spcPts val="300"/>
-              </a:spcAft>
-              <a:buNone/>
-            </a:pPr>
-            <a:r>
-              <a:rPr lang="en-US" sz="1200" i="1" dirty="0">
-                <a:solidFill>
-                  <a:srgbClr val="1C2833"/>
-                </a:solidFill>
-                <a:latin typeface="Arial" pitchFamily="34" charset="0"/>
-                <a:ea typeface="Arial" pitchFamily="34" charset="-122"/>
-                <a:cs typeface="Arial" pitchFamily="34" charset="-120"/>
-              </a:rPr>
-              <a:t>"Did you see the Moon last night? What shape?"</a:t>
-            </a:r>
-            <a:pPr algn="l" indent="0" marL="0">
-              <a:lnSpc>
-                <a:spcPts val="1680"/>
-              </a:lnSpc>
-              <a:spcBef>
-                <a:spcPts val="300"/>
-              </a:spcBef>
-              <a:spcAft>
-                <a:spcPts val="300"/>
-              </a:spcAft>
-              <a:buNone/>
-            </a:pPr>
-            <a:r>
-              <a:rPr lang="en-US" sz="1200" dirty="0">
-                <a:solidFill>
-                  <a:srgbClr val="1C2833"/>
-                </a:solidFill>
-                <a:latin typeface="Arial" pitchFamily="34" charset="0"/>
-                <a:ea typeface="Arial" pitchFamily="34" charset="-122"/>
-                <a:cs typeface="Arial" pitchFamily="34" charset="-120"/>
-              </a:rPr>
-              <a:t> — 2 students share. – Quick recall: ring the question from yesterday's demo. </a:t>
-            </a:r>
-            <a:pPr algn="l" indent="0" marL="0">
-              <a:lnSpc>
-                <a:spcPts val="1680"/>
-              </a:lnSpc>
-              <a:spcBef>
-                <a:spcPts val="300"/>
-              </a:spcBef>
-              <a:spcAft>
-                <a:spcPts val="300"/>
-              </a:spcAft>
-              <a:buNone/>
-            </a:pPr>
-            <a:r>
-              <a:rPr lang="en-US" sz="1200" i="1" dirty="0">
-                <a:solidFill>
-                  <a:srgbClr val="1C2833"/>
-                </a:solidFill>
-                <a:latin typeface="Arial" pitchFamily="34" charset="0"/>
-                <a:ea typeface="Arial" pitchFamily="34" charset="-122"/>
-                <a:cs typeface="Arial" pitchFamily="34" charset="-120"/>
-              </a:rPr>
-              <a:t>"Why does the Moon change shape?"</a:t>
-            </a:r>
-            <a:pPr algn="l" indent="0" marL="0">
-              <a:lnSpc>
-                <a:spcPts val="1680"/>
-              </a:lnSpc>
-              <a:spcBef>
-                <a:spcPts val="300"/>
-              </a:spcBef>
-              <a:spcAft>
-                <a:spcPts val="300"/>
-              </a:spcAft>
-              <a:buNone/>
-            </a:pPr>
-            <a:r>
-              <a:rPr lang="en-US" sz="1200" dirty="0">
-                <a:solidFill>
-                  <a:srgbClr val="1C2833"/>
-                </a:solidFill>
-                <a:latin typeface="Arial" pitchFamily="34" charset="0"/>
-                <a:ea typeface="Arial" pitchFamily="34" charset="-122"/>
-                <a:cs typeface="Arial" pitchFamily="34" charset="-120"/>
-              </a:rPr>
-              <a:t> (Sun lights half; we see different fractions as it orbits.) – One-sentence reminder: </a:t>
-            </a:r>
-            <a:pPr algn="l" indent="0" marL="0">
-              <a:lnSpc>
-                <a:spcPts val="1680"/>
-              </a:lnSpc>
-              <a:spcBef>
-                <a:spcPts val="300"/>
-              </a:spcBef>
-              <a:spcAft>
-                <a:spcPts val="300"/>
-              </a:spcAft>
-              <a:buNone/>
-            </a:pPr>
-            <a:r>
-              <a:rPr lang="en-US" sz="1200" i="1" dirty="0">
-                <a:solidFill>
-                  <a:srgbClr val="1C2833"/>
-                </a:solidFill>
-                <a:latin typeface="Arial" pitchFamily="34" charset="0"/>
-                <a:ea typeface="Arial" pitchFamily="34" charset="-122"/>
-                <a:cs typeface="Arial" pitchFamily="34" charset="-120"/>
-              </a:rPr>
-              <a:t>"The full cycle takes about 29.5 days — the synodic month."</a:t>
-            </a:r>
-            <a:endParaRPr lang="en-US" sz="1200" dirty="0"/>
-          </a:p>
-        </p:txBody>
-      </p:sp>
-      <p:sp>
-        <p:nvSpPr>
-          <p:cNvPr id="5" name="Text 3"/>
           <p:cNvSpPr/>
           <p:nvPr/>
         </p:nvSpPr>
@@ -4771,7 +8435,7 @@
                 <a:ea typeface="Georgia" pitchFamily="34" charset="-122"/>
                 <a:cs typeface="Georgia" pitchFamily="34" charset="-120"/>
               </a:rPr>
-              <a:t>Activity (15 min) — Sort the shapes</a:t>
+              <a:t>Warm-up (5 min)</a:t>
             </a:r>
             <a:endParaRPr lang="en-US" sz="1800" dirty="0"/>
           </a:p>
@@ -4785,8 +8449,8 @@
         </p:nvSpPr>
         <p:spPr>
           <a:xfrm>
-            <a:off x="406301" y="870942"/>
-            <a:ext cx="8498026" cy="213271"/>
+            <a:off x="634901" y="883593"/>
+            <a:ext cx="8102798" cy="975122"/>
           </a:xfrm>
           <a:prstGeom prst="rect">
             <a:avLst/>
@@ -4798,102 +8462,6 @@
           <a:bodyPr wrap="square" lIns="0" tIns="0" rIns="0" bIns="0" rtlCol="0" anchor="t"/>
           <a:lstStyle/>
           <a:p>
-            <a:pPr algn="l" indent="0" marL="0">
-              <a:lnSpc>
-                <a:spcPts val="1680"/>
-              </a:lnSpc>
-              <a:spcBef>
-                <a:spcPts val="300"/>
-              </a:spcBef>
-              <a:spcAft>
-                <a:spcPts val="300"/>
-              </a:spcAft>
-              <a:buNone/>
-            </a:pPr>
-            <a:r>
-              <a:rPr lang="en-US" sz="1200" dirty="0">
-                <a:solidFill>
-                  <a:srgbClr val="1C2833"/>
-                </a:solidFill>
-                <a:latin typeface="Arial" pitchFamily="34" charset="0"/>
-                <a:ea typeface="Arial" pitchFamily="34" charset="-122"/>
-                <a:cs typeface="Arial" pitchFamily="34" charset="-120"/>
-              </a:rPr>
-              <a:t>On the board, draw 8 Moon shapes (you sketched these yesterday in the demo). Number them 1–8 in random order.</a:t>
-            </a:r>
-            <a:endParaRPr lang="en-US" sz="1200" dirty="0"/>
-          </a:p>
-        </p:txBody>
-      </p:sp>
-      <p:sp>
-        <p:nvSpPr>
-          <p:cNvPr id="5" name="Text 3"/>
-          <p:cNvSpPr/>
-          <p:nvPr/>
-        </p:nvSpPr>
-        <p:spPr>
-          <a:xfrm>
-            <a:off x="406301" y="1160413"/>
-            <a:ext cx="8498026" cy="213271"/>
-          </a:xfrm>
-          <a:prstGeom prst="rect">
-            <a:avLst/>
-          </a:prstGeom>
-          <a:noFill/>
-          <a:ln/>
-        </p:spPr>
-        <p:txBody>
-          <a:bodyPr wrap="square" lIns="0" tIns="0" rIns="0" bIns="0" rtlCol="0" anchor="t"/>
-          <a:lstStyle/>
-          <a:p>
-            <a:pPr algn="l" indent="0" marL="0">
-              <a:lnSpc>
-                <a:spcPts val="1680"/>
-              </a:lnSpc>
-              <a:spcBef>
-                <a:spcPts val="300"/>
-              </a:spcBef>
-              <a:spcAft>
-                <a:spcPts val="300"/>
-              </a:spcAft>
-              <a:buNone/>
-            </a:pPr>
-            <a:r>
-              <a:rPr lang="en-US" sz="1200" dirty="0">
-                <a:solidFill>
-                  <a:srgbClr val="1C2833"/>
-                </a:solidFill>
-                <a:latin typeface="Arial" pitchFamily="34" charset="0"/>
-                <a:ea typeface="Arial" pitchFamily="34" charset="-122"/>
-                <a:cs typeface="Arial" pitchFamily="34" charset="-120"/>
-              </a:rPr>
-              <a:t>In pairs, students:</a:t>
-            </a:r>
-            <a:endParaRPr lang="en-US" sz="1200" dirty="0"/>
-          </a:p>
-        </p:txBody>
-      </p:sp>
-      <p:sp>
-        <p:nvSpPr>
-          <p:cNvPr id="6" name="Text 4"/>
-          <p:cNvSpPr/>
-          <p:nvPr/>
-        </p:nvSpPr>
-        <p:spPr>
-          <a:xfrm>
-            <a:off x="634901" y="1462534"/>
-            <a:ext cx="8102798" cy="769441"/>
-          </a:xfrm>
-          <a:prstGeom prst="rect">
-            <a:avLst/>
-          </a:prstGeom>
-          <a:noFill/>
-          <a:ln/>
-        </p:spPr>
-        <p:txBody>
-          <a:bodyPr wrap="square" lIns="0" tIns="0" rIns="0" bIns="0" rtlCol="0" anchor="t"/>
-          <a:lstStyle/>
-          <a:p>
             <a:pPr algn="l" marL="342900" indent="-342900">
               <a:lnSpc>
                 <a:spcPts val="1620"/>
@@ -4913,7 +8481,47 @@
                 <a:ea typeface="Arial" pitchFamily="34" charset="-122"/>
                 <a:cs typeface="Arial" pitchFamily="34" charset="-120"/>
               </a:rPr>
-              <a:t>Copy the 8 shapes (small, in a row) in their notebook.</a:t>
+              <a:t>Daily prompt: </a:t>
+            </a:r>
+            <a:pPr algn="l" indent="0" marL="0">
+              <a:lnSpc>
+                <a:spcPts val="1620"/>
+              </a:lnSpc>
+              <a:spcAft>
+                <a:spcPts val="300"/>
+              </a:spcAft>
+              <a:buNone/>
+            </a:pPr>
+            <a:r>
+              <a:rPr lang="en-US" sz="1200" i="1" dirty="0">
+                <a:solidFill>
+                  <a:srgbClr val="1C2833"/>
+                </a:solidFill>
+                <a:latin typeface="Arial" pitchFamily="34" charset="0"/>
+                <a:ea typeface="Arial" pitchFamily="34" charset="-122"/>
+                <a:cs typeface="Arial" pitchFamily="34" charset="-120"/>
+              </a:rPr>
+              <a:t>"Did you see the Moon last night? What shape?"</a:t>
+            </a:r>
+            <a:pPr algn="l" indent="0" marL="0">
+              <a:lnSpc>
+                <a:spcPts val="1620"/>
+              </a:lnSpc>
+              <a:spcAft>
+                <a:spcPts val="300"/>
+              </a:spcAft>
+              <a:buNone/>
+            </a:pPr>
+            <a:r>
+              <a:rPr lang="en-US" sz="1200" dirty="0">
+                <a:solidFill>
+                  <a:srgbClr val="1C2833"/>
+                </a:solidFill>
+                <a:latin typeface="Arial" pitchFamily="34" charset="0"/>
+                <a:ea typeface="Arial" pitchFamily="34" charset="-122"/>
+                <a:cs typeface="Arial" pitchFamily="34" charset="-120"/>
+              </a:rPr>
+              <a:t> — 2 students share.</a:t>
             </a:r>
             <a:endParaRPr lang="en-US" sz="1200" dirty="0"/>
           </a:p>
@@ -4937,7 +8545,7 @@
                 <a:ea typeface="Arial" pitchFamily="34" charset="-122"/>
                 <a:cs typeface="Arial" pitchFamily="34" charset="-120"/>
               </a:rPr>
-              <a:t>Label each as </a:t>
+              <a:t>Quick recall: ring the question from yesterday's demo. </a:t>
             </a:r>
             <a:pPr algn="l" indent="0" marL="0">
               <a:lnSpc>
@@ -4957,7 +8565,7 @@
                 <a:ea typeface="Arial" pitchFamily="34" charset="-122"/>
                 <a:cs typeface="Arial" pitchFamily="34" charset="-120"/>
               </a:rPr>
-              <a:t>śukla</a:t>
+              <a:t>"Why does the Moon change shape?"</a:t>
             </a:r>
             <a:pPr algn="l" indent="0" marL="0">
               <a:lnSpc>
@@ -4977,47 +8585,7 @@
                 <a:ea typeface="Arial" pitchFamily="34" charset="-122"/>
                 <a:cs typeface="Arial" pitchFamily="34" charset="-120"/>
               </a:rPr>
-              <a:t> or </a:t>
-            </a:r>
-            <a:pPr algn="l" indent="0" marL="0">
-              <a:lnSpc>
-                <a:spcPts val="1620"/>
-              </a:lnSpc>
-              <a:spcAft>
-                <a:spcPts val="300"/>
-              </a:spcAft>
-              <a:buNone/>
-            </a:pPr>
-            <a:r>
-              <a:rPr lang="en-US" sz="1200" i="1" dirty="0">
-                <a:solidFill>
-                  <a:srgbClr val="1C2833"/>
-                </a:solidFill>
-                <a:latin typeface="Arial" pitchFamily="34" charset="0"/>
-                <a:ea typeface="Arial" pitchFamily="34" charset="-122"/>
-                <a:cs typeface="Arial" pitchFamily="34" charset="-120"/>
-              </a:rPr>
-              <a:t>kṛṣṇa</a:t>
-            </a:r>
-            <a:pPr algn="l" indent="0" marL="0">
-              <a:lnSpc>
-                <a:spcPts val="1620"/>
-              </a:lnSpc>
-              <a:spcAft>
-                <a:spcPts val="300"/>
-              </a:spcAft>
-              <a:buNone/>
-            </a:pPr>
-            <a:r>
-              <a:rPr lang="en-US" sz="1200" dirty="0">
-                <a:solidFill>
-                  <a:srgbClr val="1C2833"/>
-                </a:solidFill>
-                <a:latin typeface="Arial" pitchFamily="34" charset="0"/>
-                <a:ea typeface="Arial" pitchFamily="34" charset="-122"/>
-                <a:cs typeface="Arial" pitchFamily="34" charset="-120"/>
-              </a:rPr>
-              <a:t> — and give a reason.</a:t>
+              <a:t> (Sun lights half; we see different fractions as it orbits.)</a:t>
             </a:r>
             <a:endParaRPr lang="en-US" sz="1200" dirty="0"/>
           </a:p>
@@ -5041,7 +8609,7 @@
                 <a:ea typeface="Arial" pitchFamily="34" charset="-122"/>
                 <a:cs typeface="Arial" pitchFamily="34" charset="-120"/>
               </a:rPr>
-              <a:t>Number them in the order they would appear across a lunar month, starting from </a:t>
+              <a:t>One-sentence reminder: </a:t>
             </a:r>
             <a:pPr algn="l" indent="0" marL="0">
               <a:lnSpc>
@@ -5061,27 +8629,7 @@
                 <a:ea typeface="Arial" pitchFamily="34" charset="-122"/>
                 <a:cs typeface="Arial" pitchFamily="34" charset="-120"/>
               </a:rPr>
-              <a:t>amāvasyā</a:t>
-            </a:r>
-            <a:pPr algn="l" indent="0" marL="0">
-              <a:lnSpc>
-                <a:spcPts val="1620"/>
-              </a:lnSpc>
-              <a:spcAft>
-                <a:spcPts val="300"/>
-              </a:spcAft>
-              <a:buNone/>
-            </a:pPr>
-            <a:r>
-              <a:rPr lang="en-US" sz="1200" dirty="0">
-                <a:solidFill>
-                  <a:srgbClr val="1C2833"/>
-                </a:solidFill>
-                <a:latin typeface="Arial" pitchFamily="34" charset="0"/>
-                <a:ea typeface="Arial" pitchFamily="34" charset="-122"/>
-                <a:cs typeface="Arial" pitchFamily="34" charset="-120"/>
-              </a:rPr>
-              <a:t>.</a:t>
+              <a:t>"The full cycle takes about 29.5 days — the synodic month."</a:t>
             </a:r>
             <a:endParaRPr lang="en-US" sz="1200" dirty="0"/>
           </a:p>
@@ -5089,55 +8637,7 @@
       </p:sp>
       <p:sp>
         <p:nvSpPr>
-          <p:cNvPr id="7" name="Text 5"/>
-          <p:cNvSpPr/>
-          <p:nvPr/>
-        </p:nvSpPr>
-        <p:spPr>
-          <a:xfrm>
-            <a:off x="406301" y="2320826"/>
-            <a:ext cx="8498026" cy="213271"/>
-          </a:xfrm>
-          <a:prstGeom prst="rect">
-            <a:avLst/>
-          </a:prstGeom>
-          <a:noFill/>
-          <a:ln/>
-        </p:spPr>
-        <p:txBody>
-          <a:bodyPr wrap="square" lIns="0" tIns="0" rIns="0" bIns="0" rtlCol="0" anchor="t"/>
-          <a:lstStyle/>
-          <a:p>
-            <a:pPr algn="l" indent="0" marL="0">
-              <a:lnSpc>
-                <a:spcPts val="1680"/>
-              </a:lnSpc>
-              <a:spcBef>
-                <a:spcPts val="300"/>
-              </a:spcBef>
-              <a:spcAft>
-                <a:spcPts val="300"/>
-              </a:spcAft>
-              <a:buNone/>
-            </a:pPr>
-            <a:r>
-              <a:rPr lang="en-US" sz="1200" dirty="0">
-                <a:solidFill>
-                  <a:srgbClr val="1C2833"/>
-                </a:solidFill>
-                <a:latin typeface="Arial" pitchFamily="34" charset="0"/>
-                <a:ea typeface="Arial" pitchFamily="34" charset="-122"/>
-                <a:cs typeface="Arial" pitchFamily="34" charset="-120"/>
-              </a:rPr>
-              <a:t>Discuss with a different pair (3 min): did you disagree on any? Which?</a:t>
-            </a:r>
-            <a:endParaRPr lang="en-US" sz="1200" dirty="0"/>
-          </a:p>
-        </p:txBody>
-      </p:sp>
-      <p:sp>
-        <p:nvSpPr>
-          <p:cNvPr id="8" name="Text 6"/>
+          <p:cNvPr id="5" name="Text 3"/>
           <p:cNvSpPr/>
           <p:nvPr/>
         </p:nvSpPr>
@@ -5287,7 +8787,7 @@
                 <a:ea typeface="Georgia" pitchFamily="34" charset="-122"/>
                 <a:cs typeface="Georgia" pitchFamily="34" charset="-120"/>
               </a:rPr>
-              <a:t>Wrap-up (5 min)</a:t>
+              <a:t>Core (20 min)</a:t>
             </a:r>
             <a:endParaRPr lang="en-US" sz="1800" dirty="0"/>
           </a:p>
@@ -5333,47 +8833,7 @@
                 <a:ea typeface="Arial" pitchFamily="34" charset="-122"/>
                 <a:cs typeface="Arial" pitchFamily="34" charset="-120"/>
               </a:rPr>
-              <a:t>Exit ticket (1 min):</a:t>
-            </a:r>
-            <a:pPr algn="l" indent="0" marL="0">
-              <a:lnSpc>
-                <a:spcPts val="1620"/>
-              </a:lnSpc>
-              <a:spcAft>
-                <a:spcPts val="300"/>
-              </a:spcAft>
-              <a:buNone/>
-            </a:pPr>
-            <a:r>
-              <a:rPr lang="en-US" sz="1200" dirty="0">
-                <a:solidFill>
-                  <a:srgbClr val="1C2833"/>
-                </a:solidFill>
-                <a:latin typeface="Arial" pitchFamily="34" charset="0"/>
-                <a:ea typeface="Arial" pitchFamily="34" charset="-122"/>
-                <a:cs typeface="Arial" pitchFamily="34" charset="-120"/>
-              </a:rPr>
-              <a:t> </a:t>
-            </a:r>
-            <a:pPr algn="l" indent="0" marL="0">
-              <a:lnSpc>
-                <a:spcPts val="1620"/>
-              </a:lnSpc>
-              <a:spcAft>
-                <a:spcPts val="300"/>
-              </a:spcAft>
-              <a:buNone/>
-            </a:pPr>
-            <a:r>
-              <a:rPr lang="en-US" sz="1200" i="1" dirty="0">
-                <a:solidFill>
-                  <a:srgbClr val="1C2833"/>
-                </a:solidFill>
-                <a:latin typeface="Arial" pitchFamily="34" charset="0"/>
-                <a:ea typeface="Arial" pitchFamily="34" charset="-122"/>
-                <a:cs typeface="Arial" pitchFamily="34" charset="-120"/>
-              </a:rPr>
-              <a:t>"What is the difference between śukla pakṣa and kṛṣṇa pakṣa? Use one sentence."</a:t>
+              <a:t>Split the cycle in half.</a:t>
             </a:r>
             <a:endParaRPr lang="en-US" sz="1200" dirty="0"/>
           </a:p>
@@ -5421,30 +8881,7 @@
                 <a:ea typeface="Arial" pitchFamily="34" charset="-122"/>
                 <a:cs typeface="Arial" pitchFamily="34" charset="-120"/>
               </a:rPr>
-              <a:t>– Preview Day 3: </a:t>
-            </a:r>
-            <a:pPr algn="l" indent="0" marL="0">
-              <a:lnSpc>
-                <a:spcPts val="1680"/>
-              </a:lnSpc>
-              <a:spcBef>
-                <a:spcPts val="300"/>
-              </a:spcBef>
-              <a:spcAft>
-                <a:spcPts val="300"/>
-              </a:spcAft>
-              <a:buNone/>
-            </a:pPr>
-            <a:r>
-              <a:rPr lang="en-US" sz="1200" i="1" dirty="0">
-                <a:solidFill>
-                  <a:srgbClr val="1C2833"/>
-                </a:solidFill>
-                <a:latin typeface="Arial" pitchFamily="34" charset="0"/>
-                <a:ea typeface="Arial" pitchFamily="34" charset="-122"/>
-                <a:cs typeface="Arial" pitchFamily="34" charset="-120"/>
-              </a:rPr>
-              <a:t>"Tomorrow we name the 15 days within each pakṣa — the tithis."</a:t>
+              <a:t>Draw on the board:</a:t>
             </a:r>
             <a:endParaRPr lang="en-US" sz="1200" dirty="0"/>
           </a:p>
@@ -5602,7 +9039,7 @@
                 <a:ea typeface="Georgia" pitchFamily="34" charset="-122"/>
                 <a:cs typeface="Georgia" pitchFamily="34" charset="-120"/>
               </a:rPr>
-              <a:t>Student-facing content</a:t>
+              <a:t>Core (20 min) (cont.)</a:t>
             </a:r>
             <a:endParaRPr lang="en-US" sz="1800" dirty="0"/>
           </a:p>
@@ -5617,7 +9054,7 @@
         <p:spPr>
           <a:xfrm>
             <a:off x="406301" y="883593"/>
-            <a:ext cx="8331398" cy="2112169"/>
+            <a:ext cx="8331398" cy="1475929"/>
           </a:xfrm>
           <a:prstGeom prst="rect">
             <a:avLst/>
@@ -5646,16 +9083,16 @@
         </p:nvSpPr>
         <p:spPr>
           <a:xfrm>
-            <a:off x="434876" y="883593"/>
-            <a:ext cx="0" cy="2112169"/>
+            <a:off x="430113" y="883593"/>
+            <a:ext cx="0" cy="1475929"/>
           </a:xfrm>
           <a:prstGeom prst="line">
             <a:avLst/>
           </a:prstGeom>
           <a:noFill/>
-          <a:ln w="57150">
+          <a:ln w="47625">
             <a:solidFill>
-              <a:srgbClr val="FE4447"/>
+              <a:srgbClr val="277884"/>
             </a:solidFill>
             <a:prstDash val="solid"/>
           </a:ln>
@@ -5669,8 +9106,8 @@
         </p:nvSpPr>
         <p:spPr>
           <a:xfrm>
-            <a:off x="692051" y="1074093"/>
-            <a:ext cx="7973389" cy="230981"/>
+            <a:off x="631627" y="1010543"/>
+            <a:ext cx="8086939" cy="174575"/>
           </a:xfrm>
           <a:prstGeom prst="rect">
             <a:avLst/>
@@ -5684,120 +9121,22 @@
           <a:p>
             <a:pPr algn="l" indent="0" marL="0">
               <a:lnSpc>
-                <a:spcPts val="1820"/>
-              </a:lnSpc>
-              <a:spcBef>
-                <a:spcPts val="300"/>
-              </a:spcBef>
-              <a:spcAft>
-                <a:spcPts val="300"/>
-              </a:spcAft>
-              <a:buNone/>
-            </a:pPr>
-            <a:r>
-              <a:rPr lang="en-US" sz="1300" dirty="0">
-                <a:solidFill>
-                  <a:srgbClr val="1C2833"/>
-                </a:solidFill>
-                <a:latin typeface="Georgia" pitchFamily="34" charset="0"/>
-                <a:ea typeface="Georgia" pitchFamily="34" charset="-122"/>
-                <a:cs typeface="Georgia" pitchFamily="34" charset="-120"/>
-              </a:rPr>
-              <a:t>*</a:t>
-            </a:r>
-            <a:pPr algn="l" indent="0" marL="0">
-              <a:lnSpc>
-                <a:spcPts val="1820"/>
-              </a:lnSpc>
-              <a:spcBef>
-                <a:spcPts val="300"/>
-              </a:spcBef>
-              <a:spcAft>
-                <a:spcPts val="300"/>
-              </a:spcAft>
-              <a:buNone/>
-            </a:pPr>
-            <a:r>
-              <a:rPr lang="en-US" sz="1300" i="1" dirty="0">
-                <a:solidFill>
-                  <a:srgbClr val="1C2833"/>
-                </a:solidFill>
-                <a:latin typeface="Georgia" pitchFamily="34" charset="0"/>
-                <a:ea typeface="Georgia" pitchFamily="34" charset="-122"/>
-                <a:cs typeface="Georgia" pitchFamily="34" charset="-120"/>
-              </a:rPr>
-              <a:t>A lunar month has two halves — two</a:t>
-            </a:r>
-            <a:pPr algn="l" indent="0" marL="0">
-              <a:lnSpc>
-                <a:spcPts val="1820"/>
-              </a:lnSpc>
-              <a:spcBef>
-                <a:spcPts val="300"/>
-              </a:spcBef>
-              <a:spcAft>
-                <a:spcPts val="300"/>
-              </a:spcAft>
-              <a:buNone/>
-            </a:pPr>
-            <a:r>
-              <a:rPr lang="en-US" sz="1300" dirty="0">
-                <a:solidFill>
-                  <a:srgbClr val="1C2833"/>
-                </a:solidFill>
-                <a:latin typeface="Georgia" pitchFamily="34" charset="0"/>
-                <a:ea typeface="Georgia" pitchFamily="34" charset="-122"/>
-                <a:cs typeface="Georgia" pitchFamily="34" charset="-120"/>
-              </a:rPr>
-              <a:t>pakṣas</a:t>
-            </a:r>
-            <a:pPr algn="l" indent="0" marL="0">
-              <a:lnSpc>
-                <a:spcPts val="1820"/>
-              </a:lnSpc>
-              <a:spcBef>
-                <a:spcPts val="300"/>
-              </a:spcBef>
-              <a:spcAft>
-                <a:spcPts val="300"/>
-              </a:spcAft>
-              <a:buNone/>
-            </a:pPr>
-            <a:r>
-              <a:rPr lang="en-US" sz="1300" i="1" dirty="0">
-                <a:solidFill>
-                  <a:srgbClr val="1C2833"/>
-                </a:solidFill>
-                <a:latin typeface="Georgia" pitchFamily="34" charset="0"/>
-                <a:ea typeface="Georgia" pitchFamily="34" charset="-122"/>
-                <a:cs typeface="Georgia" pitchFamily="34" charset="-120"/>
-              </a:rPr>
-              <a:t>.</a:t>
-            </a:r>
-            <a:pPr algn="l" indent="0" marL="0">
-              <a:lnSpc>
-                <a:spcPts val="1820"/>
-              </a:lnSpc>
-              <a:spcBef>
-                <a:spcPts val="300"/>
-              </a:spcBef>
-              <a:spcAft>
-                <a:spcPts val="300"/>
-              </a:spcAft>
-              <a:buNone/>
-            </a:pPr>
-            <a:r>
-              <a:rPr lang="en-US" sz="1300" dirty="0">
-                <a:solidFill>
-                  <a:srgbClr val="1C2833"/>
-                </a:solidFill>
-                <a:latin typeface="Georgia" pitchFamily="34" charset="0"/>
-                <a:ea typeface="Georgia" pitchFamily="34" charset="-122"/>
-                <a:cs typeface="Georgia" pitchFamily="34" charset="-120"/>
-              </a:rPr>
-              <a:t>*</a:t>
-            </a:r>
-            <a:endParaRPr lang="en-US" sz="1300" dirty="0"/>
+                <a:spcPts val="1375"/>
+              </a:lnSpc>
+              <a:buNone/>
+            </a:pPr>
+            <a:r>
+              <a:rPr lang="en-US" sz="1100" dirty="0">
+                <a:solidFill>
+                  <a:srgbClr val="1C2833"/>
+                </a:solidFill>
+                <a:latin typeface="Courier New" pitchFamily="34" charset="0"/>
+                <a:ea typeface="Courier New" pitchFamily="34" charset="-122"/>
+                <a:cs typeface="Courier New" pitchFamily="34" charset="-120"/>
+              </a:rPr>
+              <a:t>←──── ~14.75 days ────→  ←──── ~14.75 days ────→</a:t>
+            </a:r>
+            <a:endParaRPr lang="en-US" sz="1100" dirty="0"/>
           </a:p>
         </p:txBody>
       </p:sp>
@@ -5809,8 +9148,8 @@
         </p:nvSpPr>
         <p:spPr>
           <a:xfrm>
-            <a:off x="692051" y="1343174"/>
-            <a:ext cx="7973389" cy="692944"/>
+            <a:off x="631627" y="1185118"/>
+            <a:ext cx="8086939" cy="174575"/>
           </a:xfrm>
           <a:prstGeom prst="rect">
             <a:avLst/>
@@ -5824,120 +9163,22 @@
           <a:p>
             <a:pPr algn="l" indent="0" marL="0">
               <a:lnSpc>
-                <a:spcPts val="1820"/>
-              </a:lnSpc>
-              <a:spcBef>
-                <a:spcPts val="300"/>
-              </a:spcBef>
-              <a:spcAft>
-                <a:spcPts val="300"/>
-              </a:spcAft>
-              <a:buNone/>
-            </a:pPr>
-            <a:r>
-              <a:rPr lang="en-US" sz="1300" dirty="0">
-                <a:solidFill>
-                  <a:srgbClr val="1C2833"/>
-                </a:solidFill>
-                <a:latin typeface="Georgia" pitchFamily="34" charset="0"/>
-                <a:ea typeface="Georgia" pitchFamily="34" charset="-122"/>
-                <a:cs typeface="Georgia" pitchFamily="34" charset="-120"/>
-              </a:rPr>
-              <a:t>| Sanskrit | English | Direction the Moon is heading | |----------|---------|--------------------------------| | </a:t>
-            </a:r>
-            <a:pPr algn="l" indent="0" marL="0">
-              <a:lnSpc>
-                <a:spcPts val="1820"/>
-              </a:lnSpc>
-              <a:spcBef>
-                <a:spcPts val="300"/>
-              </a:spcBef>
-              <a:spcAft>
-                <a:spcPts val="300"/>
-              </a:spcAft>
-              <a:buNone/>
-            </a:pPr>
-            <a:r>
-              <a:rPr lang="en-US" sz="1300" i="1" dirty="0">
-                <a:solidFill>
-                  <a:srgbClr val="1C2833"/>
-                </a:solidFill>
-                <a:latin typeface="Georgia" pitchFamily="34" charset="0"/>
-                <a:ea typeface="Georgia" pitchFamily="34" charset="-122"/>
-                <a:cs typeface="Georgia" pitchFamily="34" charset="-120"/>
-              </a:rPr>
-              <a:t>śukla pakṣa</a:t>
-            </a:r>
-            <a:pPr algn="l" indent="0" marL="0">
-              <a:lnSpc>
-                <a:spcPts val="1820"/>
-              </a:lnSpc>
-              <a:spcBef>
-                <a:spcPts val="300"/>
-              </a:spcBef>
-              <a:spcAft>
-                <a:spcPts val="300"/>
-              </a:spcAft>
-              <a:buNone/>
-            </a:pPr>
-            <a:r>
-              <a:rPr lang="en-US" sz="1300" dirty="0">
-                <a:solidFill>
-                  <a:srgbClr val="1C2833"/>
-                </a:solidFill>
-                <a:latin typeface="Georgia" pitchFamily="34" charset="0"/>
-                <a:ea typeface="Georgia" pitchFamily="34" charset="-122"/>
-                <a:cs typeface="Georgia" pitchFamily="34" charset="-120"/>
-              </a:rPr>
-              <a:t> | bright fortnight | growing — new moon → full moon | | </a:t>
-            </a:r>
-            <a:pPr algn="l" indent="0" marL="0">
-              <a:lnSpc>
-                <a:spcPts val="1820"/>
-              </a:lnSpc>
-              <a:spcBef>
-                <a:spcPts val="300"/>
-              </a:spcBef>
-              <a:spcAft>
-                <a:spcPts val="300"/>
-              </a:spcAft>
-              <a:buNone/>
-            </a:pPr>
-            <a:r>
-              <a:rPr lang="en-US" sz="1300" i="1" dirty="0">
-                <a:solidFill>
-                  <a:srgbClr val="1C2833"/>
-                </a:solidFill>
-                <a:latin typeface="Georgia" pitchFamily="34" charset="0"/>
-                <a:ea typeface="Georgia" pitchFamily="34" charset="-122"/>
-                <a:cs typeface="Georgia" pitchFamily="34" charset="-120"/>
-              </a:rPr>
-              <a:t>kṛṣṇa pakṣa</a:t>
-            </a:r>
-            <a:pPr algn="l" indent="0" marL="0">
-              <a:lnSpc>
-                <a:spcPts val="1820"/>
-              </a:lnSpc>
-              <a:spcBef>
-                <a:spcPts val="300"/>
-              </a:spcBef>
-              <a:spcAft>
-                <a:spcPts val="300"/>
-              </a:spcAft>
-              <a:buNone/>
-            </a:pPr>
-            <a:r>
-              <a:rPr lang="en-US" sz="1300" dirty="0">
-                <a:solidFill>
-                  <a:srgbClr val="1C2833"/>
-                </a:solidFill>
-                <a:latin typeface="Georgia" pitchFamily="34" charset="0"/>
-                <a:ea typeface="Georgia" pitchFamily="34" charset="-122"/>
-                <a:cs typeface="Georgia" pitchFamily="34" charset="-120"/>
-              </a:rPr>
-              <a:t> | dark fortnight | shrinking — full moon → new moon |</a:t>
-            </a:r>
-            <a:endParaRPr lang="en-US" sz="1300" dirty="0"/>
+                <a:spcPts val="1375"/>
+              </a:lnSpc>
+              <a:buNone/>
+            </a:pPr>
+            <a:r>
+              <a:rPr lang="en-US" sz="1100" dirty="0">
+                <a:solidFill>
+                  <a:srgbClr val="1C2833"/>
+                </a:solidFill>
+                <a:latin typeface="Courier New" pitchFamily="34" charset="0"/>
+                <a:ea typeface="Courier New" pitchFamily="34" charset="-122"/>
+                <a:cs typeface="Courier New" pitchFamily="34" charset="-120"/>
+              </a:rPr>
+              <a:t>amāvasyā          pūrṇimā           amāvasyā</a:t>
+            </a:r>
+            <a:endParaRPr lang="en-US" sz="1100" dirty="0"/>
           </a:p>
         </p:txBody>
       </p:sp>
@@ -5949,8 +9190,8 @@
         </p:nvSpPr>
         <p:spPr>
           <a:xfrm>
-            <a:off x="692051" y="2074218"/>
-            <a:ext cx="7973389" cy="461963"/>
+            <a:off x="631627" y="1359694"/>
+            <a:ext cx="8086939" cy="174575"/>
           </a:xfrm>
           <a:prstGeom prst="rect">
             <a:avLst/>
@@ -5964,120 +9205,22 @@
           <a:p>
             <a:pPr algn="l" indent="0" marL="0">
               <a:lnSpc>
-                <a:spcPts val="1820"/>
-              </a:lnSpc>
-              <a:spcBef>
-                <a:spcPts val="300"/>
-              </a:spcBef>
-              <a:spcAft>
-                <a:spcPts val="300"/>
-              </a:spcAft>
-              <a:buNone/>
-            </a:pPr>
-            <a:r>
-              <a:rPr lang="en-US" sz="1300" dirty="0">
-                <a:solidFill>
-                  <a:srgbClr val="1C2833"/>
-                </a:solidFill>
-                <a:latin typeface="Georgia" pitchFamily="34" charset="0"/>
-                <a:ea typeface="Georgia" pitchFamily="34" charset="-122"/>
-                <a:cs typeface="Georgia" pitchFamily="34" charset="-120"/>
-              </a:rPr>
-              <a:t>Two anchor days bookend the pakṣas: - </a:t>
-            </a:r>
-            <a:pPr algn="l" indent="0" marL="0">
-              <a:lnSpc>
-                <a:spcPts val="1820"/>
-              </a:lnSpc>
-              <a:spcBef>
-                <a:spcPts val="300"/>
-              </a:spcBef>
-              <a:spcAft>
-                <a:spcPts val="300"/>
-              </a:spcAft>
-              <a:buNone/>
-            </a:pPr>
-            <a:r>
-              <a:rPr lang="en-US" sz="1300" i="1" dirty="0">
-                <a:solidFill>
-                  <a:srgbClr val="1C2833"/>
-                </a:solidFill>
-                <a:latin typeface="Georgia" pitchFamily="34" charset="0"/>
-                <a:ea typeface="Georgia" pitchFamily="34" charset="-122"/>
-                <a:cs typeface="Georgia" pitchFamily="34" charset="-120"/>
-              </a:rPr>
-              <a:t>amāvasyā</a:t>
-            </a:r>
-            <a:pPr algn="l" indent="0" marL="0">
-              <a:lnSpc>
-                <a:spcPts val="1820"/>
-              </a:lnSpc>
-              <a:spcBef>
-                <a:spcPts val="300"/>
-              </a:spcBef>
-              <a:spcAft>
-                <a:spcPts val="300"/>
-              </a:spcAft>
-              <a:buNone/>
-            </a:pPr>
-            <a:r>
-              <a:rPr lang="en-US" sz="1300" dirty="0">
-                <a:solidFill>
-                  <a:srgbClr val="1C2833"/>
-                </a:solidFill>
-                <a:latin typeface="Georgia" pitchFamily="34" charset="0"/>
-                <a:ea typeface="Georgia" pitchFamily="34" charset="-122"/>
-                <a:cs typeface="Georgia" pitchFamily="34" charset="-120"/>
-              </a:rPr>
-              <a:t> (new moon) — Moon invisible, "dwelling together with" the Sun - </a:t>
-            </a:r>
-            <a:pPr algn="l" indent="0" marL="0">
-              <a:lnSpc>
-                <a:spcPts val="1820"/>
-              </a:lnSpc>
-              <a:spcBef>
-                <a:spcPts val="300"/>
-              </a:spcBef>
-              <a:spcAft>
-                <a:spcPts val="300"/>
-              </a:spcAft>
-              <a:buNone/>
-            </a:pPr>
-            <a:r>
-              <a:rPr lang="en-US" sz="1300" i="1" dirty="0">
-                <a:solidFill>
-                  <a:srgbClr val="1C2833"/>
-                </a:solidFill>
-                <a:latin typeface="Georgia" pitchFamily="34" charset="0"/>
-                <a:ea typeface="Georgia" pitchFamily="34" charset="-122"/>
-                <a:cs typeface="Georgia" pitchFamily="34" charset="-120"/>
-              </a:rPr>
-              <a:t>pūrṇimā</a:t>
-            </a:r>
-            <a:pPr algn="l" indent="0" marL="0">
-              <a:lnSpc>
-                <a:spcPts val="1820"/>
-              </a:lnSpc>
-              <a:spcBef>
-                <a:spcPts val="300"/>
-              </a:spcBef>
-              <a:spcAft>
-                <a:spcPts val="300"/>
-              </a:spcAft>
-              <a:buNone/>
-            </a:pPr>
-            <a:r>
-              <a:rPr lang="en-US" sz="1300" dirty="0">
-                <a:solidFill>
-                  <a:srgbClr val="1C2833"/>
-                </a:solidFill>
-                <a:latin typeface="Georgia" pitchFamily="34" charset="0"/>
-                <a:ea typeface="Georgia" pitchFamily="34" charset="-122"/>
-                <a:cs typeface="Georgia" pitchFamily="34" charset="-120"/>
-              </a:rPr>
-              <a:t> (full moon) — Moon fully lit, opposite the Sun</a:t>
-            </a:r>
-            <a:endParaRPr lang="en-US" sz="1300" dirty="0"/>
+                <a:spcPts val="1375"/>
+              </a:lnSpc>
+              <a:buNone/>
+            </a:pPr>
+            <a:r>
+              <a:rPr lang="en-US" sz="1100" dirty="0">
+                <a:solidFill>
+                  <a:srgbClr val="1C2833"/>
+                </a:solidFill>
+                <a:latin typeface="Courier New" pitchFamily="34" charset="0"/>
+                <a:ea typeface="Courier New" pitchFamily="34" charset="-122"/>
+                <a:cs typeface="Courier New" pitchFamily="34" charset="-120"/>
+              </a:rPr>
+              <a:t>(new moon)        (full moon)       (new moon)</a:t>
+            </a:r>
+            <a:endParaRPr lang="en-US" sz="1100" dirty="0"/>
           </a:p>
         </p:txBody>
       </p:sp>
@@ -6089,8 +9232,8 @@
         </p:nvSpPr>
         <p:spPr>
           <a:xfrm>
-            <a:off x="692051" y="2574280"/>
-            <a:ext cx="7973389" cy="230981"/>
+            <a:off x="631627" y="1534269"/>
+            <a:ext cx="8086939" cy="174575"/>
           </a:xfrm>
           <a:prstGeom prst="rect">
             <a:avLst/>
@@ -6104,34 +9247,154 @@
           <a:p>
             <a:pPr algn="l" indent="0" marL="0">
               <a:lnSpc>
-                <a:spcPts val="1820"/>
-              </a:lnSpc>
-              <a:spcBef>
-                <a:spcPts val="300"/>
-              </a:spcBef>
-              <a:spcAft>
-                <a:spcPts val="300"/>
-              </a:spcAft>
-              <a:buNone/>
-            </a:pPr>
-            <a:r>
-              <a:rPr lang="en-US" sz="1300" i="1" dirty="0">
-                <a:solidFill>
-                  <a:srgbClr val="1C2833"/>
-                </a:solidFill>
-                <a:latin typeface="Georgia" pitchFamily="34" charset="0"/>
-                <a:ea typeface="Georgia" pitchFamily="34" charset="-122"/>
-                <a:cs typeface="Georgia" pitchFamily="34" charset="-120"/>
-              </a:rPr>
-              <a:t>Neither pakṣa is "good" or "bad." They are astronomical halves of the cycle.</a:t>
-            </a:r>
-            <a:endParaRPr lang="en-US" sz="1300" dirty="0"/>
+                <a:spcPts val="1375"/>
+              </a:lnSpc>
+              <a:buNone/>
+            </a:pPr>
+            <a:r>
+              <a:rPr lang="en-US" sz="1100" dirty="0">
+                <a:solidFill>
+                  <a:srgbClr val="1C2833"/>
+                </a:solidFill>
+                <a:latin typeface="Courier New" pitchFamily="34" charset="0"/>
+                <a:ea typeface="Courier New" pitchFamily="34" charset="-122"/>
+                <a:cs typeface="Courier New" pitchFamily="34" charset="-120"/>
+              </a:rPr>
+              <a:t>↑                                    ↑</a:t>
+            </a:r>
+            <a:endParaRPr lang="en-US" sz="1100" dirty="0"/>
           </a:p>
         </p:txBody>
       </p:sp>
       <p:sp>
         <p:nvSpPr>
           <p:cNvPr id="10" name="Text 8"/>
+          <p:cNvSpPr/>
+          <p:nvPr/>
+        </p:nvSpPr>
+        <p:spPr>
+          <a:xfrm>
+            <a:off x="631627" y="1708845"/>
+            <a:ext cx="8086939" cy="174575"/>
+          </a:xfrm>
+          <a:prstGeom prst="rect">
+            <a:avLst/>
+          </a:prstGeom>
+          <a:noFill/>
+          <a:ln/>
+        </p:spPr>
+        <p:txBody>
+          <a:bodyPr wrap="square" lIns="0" tIns="0" rIns="0" bIns="0" rtlCol="0" anchor="t"/>
+          <a:lstStyle/>
+          <a:p>
+            <a:pPr algn="l" indent="0" marL="0">
+              <a:lnSpc>
+                <a:spcPts val="1375"/>
+              </a:lnSpc>
+              <a:buNone/>
+            </a:pPr>
+            <a:r>
+              <a:rPr lang="en-US" sz="1100" dirty="0">
+                <a:solidFill>
+                  <a:srgbClr val="1C2833"/>
+                </a:solidFill>
+                <a:latin typeface="Courier New" pitchFamily="34" charset="0"/>
+                <a:ea typeface="Courier New" pitchFamily="34" charset="-122"/>
+                <a:cs typeface="Courier New" pitchFamily="34" charset="-120"/>
+              </a:rPr>
+              <a:t>|   ŚUKLA PAKṢA       KṚṢṆA PAKṢA  |</a:t>
+            </a:r>
+            <a:endParaRPr lang="en-US" sz="1100" dirty="0"/>
+          </a:p>
+        </p:txBody>
+      </p:sp>
+      <p:sp>
+        <p:nvSpPr>
+          <p:cNvPr id="11" name="Text 9"/>
+          <p:cNvSpPr/>
+          <p:nvPr/>
+        </p:nvSpPr>
+        <p:spPr>
+          <a:xfrm>
+            <a:off x="631627" y="1883420"/>
+            <a:ext cx="8086939" cy="174575"/>
+          </a:xfrm>
+          <a:prstGeom prst="rect">
+            <a:avLst/>
+          </a:prstGeom>
+          <a:noFill/>
+          <a:ln/>
+        </p:spPr>
+        <p:txBody>
+          <a:bodyPr wrap="square" lIns="0" tIns="0" rIns="0" bIns="0" rtlCol="0" anchor="t"/>
+          <a:lstStyle/>
+          <a:p>
+            <a:pPr algn="l" indent="0" marL="0">
+              <a:lnSpc>
+                <a:spcPts val="1375"/>
+              </a:lnSpc>
+              <a:buNone/>
+            </a:pPr>
+            <a:r>
+              <a:rPr lang="en-US" sz="1100" dirty="0">
+                <a:solidFill>
+                  <a:srgbClr val="1C2833"/>
+                </a:solidFill>
+                <a:latin typeface="Courier New" pitchFamily="34" charset="0"/>
+                <a:ea typeface="Courier New" pitchFamily="34" charset="-122"/>
+                <a:cs typeface="Courier New" pitchFamily="34" charset="-120"/>
+              </a:rPr>
+              <a:t>|   (waxing /         (waning /    |</a:t>
+            </a:r>
+            <a:endParaRPr lang="en-US" sz="1100" dirty="0"/>
+          </a:p>
+        </p:txBody>
+      </p:sp>
+      <p:sp>
+        <p:nvSpPr>
+          <p:cNvPr id="12" name="Text 10"/>
+          <p:cNvSpPr/>
+          <p:nvPr/>
+        </p:nvSpPr>
+        <p:spPr>
+          <a:xfrm>
+            <a:off x="631627" y="2057995"/>
+            <a:ext cx="8086939" cy="174575"/>
+          </a:xfrm>
+          <a:prstGeom prst="rect">
+            <a:avLst/>
+          </a:prstGeom>
+          <a:noFill/>
+          <a:ln/>
+        </p:spPr>
+        <p:txBody>
+          <a:bodyPr wrap="square" lIns="0" tIns="0" rIns="0" bIns="0" rtlCol="0" anchor="t"/>
+          <a:lstStyle/>
+          <a:p>
+            <a:pPr algn="l" indent="0" marL="0">
+              <a:lnSpc>
+                <a:spcPts val="1375"/>
+              </a:lnSpc>
+              <a:buNone/>
+            </a:pPr>
+            <a:r>
+              <a:rPr lang="en-US" sz="1100" dirty="0">
+                <a:solidFill>
+                  <a:srgbClr val="1C2833"/>
+                </a:solidFill>
+                <a:latin typeface="Courier New" pitchFamily="34" charset="0"/>
+                <a:ea typeface="Courier New" pitchFamily="34" charset="-122"/>
+                <a:cs typeface="Courier New" pitchFamily="34" charset="-120"/>
+              </a:rPr>
+              <a:t>|    "bright")         "dark")     |</a:t>
+            </a:r>
+            <a:endParaRPr lang="en-US" sz="1100" dirty="0"/>
+          </a:p>
+        </p:txBody>
+      </p:sp>
+      <p:sp>
+        <p:nvSpPr>
+          <p:cNvPr id="13" name="Text 11"/>
           <p:cNvSpPr/>
           <p:nvPr/>
         </p:nvSpPr>
@@ -6281,7 +9544,7 @@
                 <a:ea typeface="Georgia" pitchFamily="34" charset="-122"/>
                 <a:cs typeface="Georgia" pitchFamily="34" charset="-120"/>
               </a:rPr>
-              <a:t>Homework</a:t>
+              <a:t>Core (20 min) (cont.)</a:t>
             </a:r>
             <a:endParaRPr lang="en-US" sz="1800" dirty="0"/>
           </a:p>
@@ -6295,8 +9558,8 @@
         </p:nvSpPr>
         <p:spPr>
           <a:xfrm>
-            <a:off x="406301" y="870942"/>
-            <a:ext cx="8498026" cy="426541"/>
+            <a:off x="634901" y="883593"/>
+            <a:ext cx="8102798" cy="937022"/>
           </a:xfrm>
           <a:prstGeom prst="rect">
             <a:avLst/>
@@ -6308,17 +9571,15 @@
           <a:bodyPr wrap="square" lIns="0" tIns="0" rIns="0" bIns="0" rtlCol="0" anchor="t"/>
           <a:lstStyle/>
           <a:p>
-            <a:pPr algn="l" indent="0" marL="0">
-              <a:lnSpc>
-                <a:spcPts val="1680"/>
-              </a:lnSpc>
-              <a:spcBef>
-                <a:spcPts val="300"/>
-              </a:spcBef>
-              <a:spcAft>
-                <a:spcPts val="300"/>
-              </a:spcAft>
-              <a:buNone/>
+            <a:pPr algn="l" marL="342900" indent="-342900">
+              <a:lnSpc>
+                <a:spcPts val="1620"/>
+              </a:lnSpc>
+              <a:spcAft>
+                <a:spcPts val="300"/>
+              </a:spcAft>
+              <a:buSzPct val="100000"/>
+              <a:buChar char="•"/>
             </a:pPr>
             <a:r>
               <a:rPr lang="en-US" sz="1200" dirty="0">
@@ -6329,15 +9590,92 @@
                 <a:ea typeface="Arial" pitchFamily="34" charset="-122"/>
                 <a:cs typeface="Arial" pitchFamily="34" charset="-120"/>
               </a:rPr>
-              <a:t>– Continue the Moon diary. Tonight, add </a:t>
-            </a:r>
-            <a:pPr algn="l" indent="0" marL="0">
-              <a:lnSpc>
-                <a:spcPts val="1680"/>
-              </a:lnSpc>
-              <a:spcBef>
-                <a:spcPts val="300"/>
-              </a:spcBef>
+              <a:t>The fortnight from </a:t>
+            </a:r>
+            <a:pPr algn="l" indent="0" marL="0">
+              <a:lnSpc>
+                <a:spcPts val="1620"/>
+              </a:lnSpc>
+              <a:spcAft>
+                <a:spcPts val="300"/>
+              </a:spcAft>
+              <a:buNone/>
+            </a:pPr>
+            <a:r>
+              <a:rPr lang="en-US" sz="1200" i="1" dirty="0">
+                <a:solidFill>
+                  <a:srgbClr val="1C2833"/>
+                </a:solidFill>
+                <a:latin typeface="Arial" pitchFamily="34" charset="0"/>
+                <a:ea typeface="Arial" pitchFamily="34" charset="-122"/>
+                <a:cs typeface="Arial" pitchFamily="34" charset="-120"/>
+              </a:rPr>
+              <a:t>amāvasyā</a:t>
+            </a:r>
+            <a:pPr algn="l" indent="0" marL="0">
+              <a:lnSpc>
+                <a:spcPts val="1620"/>
+              </a:lnSpc>
+              <a:spcAft>
+                <a:spcPts val="300"/>
+              </a:spcAft>
+              <a:buNone/>
+            </a:pPr>
+            <a:r>
+              <a:rPr lang="en-US" sz="1200" dirty="0">
+                <a:solidFill>
+                  <a:srgbClr val="1C2833"/>
+                </a:solidFill>
+                <a:latin typeface="Arial" pitchFamily="34" charset="0"/>
+                <a:ea typeface="Arial" pitchFamily="34" charset="-122"/>
+                <a:cs typeface="Arial" pitchFamily="34" charset="-120"/>
+              </a:rPr>
+              <a:t> to </a:t>
+            </a:r>
+            <a:pPr algn="l" indent="0" marL="0">
+              <a:lnSpc>
+                <a:spcPts val="1620"/>
+              </a:lnSpc>
+              <a:spcAft>
+                <a:spcPts val="300"/>
+              </a:spcAft>
+              <a:buNone/>
+            </a:pPr>
+            <a:r>
+              <a:rPr lang="en-US" sz="1200" i="1" dirty="0">
+                <a:solidFill>
+                  <a:srgbClr val="1C2833"/>
+                </a:solidFill>
+                <a:latin typeface="Arial" pitchFamily="34" charset="0"/>
+                <a:ea typeface="Arial" pitchFamily="34" charset="-122"/>
+                <a:cs typeface="Arial" pitchFamily="34" charset="-120"/>
+              </a:rPr>
+              <a:t>pūrṇimā</a:t>
+            </a:r>
+            <a:pPr algn="l" indent="0" marL="0">
+              <a:lnSpc>
+                <a:spcPts val="1620"/>
+              </a:lnSpc>
+              <a:spcAft>
+                <a:spcPts val="300"/>
+              </a:spcAft>
+              <a:buNone/>
+            </a:pPr>
+            <a:r>
+              <a:rPr lang="en-US" sz="1200" dirty="0">
+                <a:solidFill>
+                  <a:srgbClr val="1C2833"/>
+                </a:solidFill>
+                <a:latin typeface="Arial" pitchFamily="34" charset="0"/>
+                <a:ea typeface="Arial" pitchFamily="34" charset="-122"/>
+                <a:cs typeface="Arial" pitchFamily="34" charset="-120"/>
+              </a:rPr>
+              <a:t> — when the Moon is </a:t>
+            </a:r>
+            <a:pPr algn="l" indent="0" marL="0">
+              <a:lnSpc>
+                <a:spcPts val="1620"/>
+              </a:lnSpc>
               <a:spcAft>
                 <a:spcPts val="300"/>
               </a:spcAft>
@@ -6352,15 +9690,12 @@
                 <a:ea typeface="Arial" pitchFamily="34" charset="-122"/>
                 <a:cs typeface="Arial" pitchFamily="34" charset="-120"/>
               </a:rPr>
-              <a:t>which pakṣa you are in</a:t>
-            </a:r>
-            <a:pPr algn="l" indent="0" marL="0">
-              <a:lnSpc>
-                <a:spcPts val="1680"/>
-              </a:lnSpc>
-              <a:spcBef>
-                <a:spcPts val="300"/>
-              </a:spcBef>
+              <a:t>growing</a:t>
+            </a:r>
+            <a:pPr algn="l" indent="0" marL="0">
+              <a:lnSpc>
+                <a:spcPts val="1620"/>
+              </a:lnSpc>
               <a:spcAft>
                 <a:spcPts val="300"/>
               </a:spcAft>
@@ -6375,15 +9710,12 @@
                 <a:ea typeface="Arial" pitchFamily="34" charset="-122"/>
                 <a:cs typeface="Arial" pitchFamily="34" charset="-120"/>
               </a:rPr>
-              <a:t> to your sketch. – For Day 3, *</a:t>
-            </a:r>
-            <a:pPr algn="l" indent="0" marL="0">
-              <a:lnSpc>
-                <a:spcPts val="1680"/>
-              </a:lnSpc>
-              <a:spcBef>
-                <a:spcPts val="300"/>
-              </a:spcBef>
+              <a:t> — is the </a:t>
+            </a:r>
+            <a:pPr algn="l" indent="0" marL="0">
+              <a:lnSpc>
+                <a:spcPts val="1620"/>
+              </a:lnSpc>
               <a:spcAft>
                 <a:spcPts val="300"/>
               </a:spcAft>
@@ -6398,15 +9730,12 @@
                 <a:ea typeface="Arial" pitchFamily="34" charset="-122"/>
                 <a:cs typeface="Arial" pitchFamily="34" charset="-120"/>
               </a:rPr>
-              <a:t>memorise the names</a:t>
-            </a:r>
-            <a:pPr algn="l" indent="0" marL="0">
-              <a:lnSpc>
-                <a:spcPts val="1680"/>
-              </a:lnSpc>
-              <a:spcBef>
-                <a:spcPts val="300"/>
-              </a:spcBef>
+              <a:t>śukla pakṣa</a:t>
+            </a:r>
+            <a:pPr algn="l" indent="0" marL="0">
+              <a:lnSpc>
+                <a:spcPts val="1620"/>
+              </a:lnSpc>
               <a:spcAft>
                 <a:spcPts val="300"/>
               </a:spcAft>
@@ -6421,15 +9750,156 @@
                 <a:ea typeface="Arial" pitchFamily="34" charset="-122"/>
                 <a:cs typeface="Arial" pitchFamily="34" charset="-120"/>
               </a:rPr>
+              <a:t> ("bright fortnight"). The visible lit fraction is increasing each night.</a:t>
+            </a:r>
+            <a:endParaRPr lang="en-US" sz="1200" dirty="0"/>
+          </a:p>
+          <a:p>
+            <a:pPr algn="l" marL="342900" indent="-342900">
+              <a:lnSpc>
+                <a:spcPts val="1620"/>
+              </a:lnSpc>
+              <a:spcAft>
+                <a:spcPts val="300"/>
+              </a:spcAft>
+              <a:buSzPct val="100000"/>
+              <a:buChar char="•"/>
+            </a:pPr>
+            <a:r>
+              <a:rPr lang="en-US" sz="1200" dirty="0">
+                <a:solidFill>
+                  <a:srgbClr val="1C2833"/>
+                </a:solidFill>
+                <a:latin typeface="Arial" pitchFamily="34" charset="0"/>
+                <a:ea typeface="Arial" pitchFamily="34" charset="-122"/>
+                <a:cs typeface="Arial" pitchFamily="34" charset="-120"/>
+              </a:rPr>
+              <a:t>The fortnight from </a:t>
+            </a:r>
+            <a:pPr algn="l" indent="0" marL="0">
+              <a:lnSpc>
+                <a:spcPts val="1620"/>
+              </a:lnSpc>
+              <a:spcAft>
+                <a:spcPts val="300"/>
+              </a:spcAft>
+              <a:buNone/>
+            </a:pPr>
+            <a:r>
+              <a:rPr lang="en-US" sz="1200" i="1" dirty="0">
+                <a:solidFill>
+                  <a:srgbClr val="1C2833"/>
+                </a:solidFill>
+                <a:latin typeface="Arial" pitchFamily="34" charset="0"/>
+                <a:ea typeface="Arial" pitchFamily="34" charset="-122"/>
+                <a:cs typeface="Arial" pitchFamily="34" charset="-120"/>
+              </a:rPr>
+              <a:t>pūrṇimā</a:t>
+            </a:r>
+            <a:pPr algn="l" indent="0" marL="0">
+              <a:lnSpc>
+                <a:spcPts val="1620"/>
+              </a:lnSpc>
+              <a:spcAft>
+                <a:spcPts val="300"/>
+              </a:spcAft>
+              <a:buNone/>
+            </a:pPr>
+            <a:r>
+              <a:rPr lang="en-US" sz="1200" dirty="0">
+                <a:solidFill>
+                  <a:srgbClr val="1C2833"/>
+                </a:solidFill>
+                <a:latin typeface="Arial" pitchFamily="34" charset="0"/>
+                <a:ea typeface="Arial" pitchFamily="34" charset="-122"/>
+                <a:cs typeface="Arial" pitchFamily="34" charset="-120"/>
+              </a:rPr>
+              <a:t> to </a:t>
+            </a:r>
+            <a:pPr algn="l" indent="0" marL="0">
+              <a:lnSpc>
+                <a:spcPts val="1620"/>
+              </a:lnSpc>
+              <a:spcAft>
+                <a:spcPts val="300"/>
+              </a:spcAft>
+              <a:buNone/>
+            </a:pPr>
+            <a:r>
+              <a:rPr lang="en-US" sz="1200" i="1" dirty="0">
+                <a:solidFill>
+                  <a:srgbClr val="1C2833"/>
+                </a:solidFill>
+                <a:latin typeface="Arial" pitchFamily="34" charset="0"/>
+                <a:ea typeface="Arial" pitchFamily="34" charset="-122"/>
+                <a:cs typeface="Arial" pitchFamily="34" charset="-120"/>
+              </a:rPr>
               <a:t>amāvasyā</a:t>
             </a:r>
             <a:pPr algn="l" indent="0" marL="0">
               <a:lnSpc>
-                <a:spcPts val="1680"/>
-              </a:lnSpc>
-              <a:spcBef>
-                <a:spcPts val="300"/>
-              </a:spcBef>
+                <a:spcPts val="1620"/>
+              </a:lnSpc>
+              <a:spcAft>
+                <a:spcPts val="300"/>
+              </a:spcAft>
+              <a:buNone/>
+            </a:pPr>
+            <a:r>
+              <a:rPr lang="en-US" sz="1200" dirty="0">
+                <a:solidFill>
+                  <a:srgbClr val="1C2833"/>
+                </a:solidFill>
+                <a:latin typeface="Arial" pitchFamily="34" charset="0"/>
+                <a:ea typeface="Arial" pitchFamily="34" charset="-122"/>
+                <a:cs typeface="Arial" pitchFamily="34" charset="-120"/>
+              </a:rPr>
+              <a:t> — when the Moon is </a:t>
+            </a:r>
+            <a:pPr algn="l" indent="0" marL="0">
+              <a:lnSpc>
+                <a:spcPts val="1620"/>
+              </a:lnSpc>
+              <a:spcAft>
+                <a:spcPts val="300"/>
+              </a:spcAft>
+              <a:buNone/>
+            </a:pPr>
+            <a:r>
+              <a:rPr lang="en-US" sz="1200" b="1" dirty="0">
+                <a:solidFill>
+                  <a:srgbClr val="1C2833"/>
+                </a:solidFill>
+                <a:latin typeface="Arial" pitchFamily="34" charset="0"/>
+                <a:ea typeface="Arial" pitchFamily="34" charset="-122"/>
+                <a:cs typeface="Arial" pitchFamily="34" charset="-120"/>
+              </a:rPr>
+              <a:t>shrinking</a:t>
+            </a:r>
+            <a:pPr algn="l" indent="0" marL="0">
+              <a:lnSpc>
+                <a:spcPts val="1620"/>
+              </a:lnSpc>
+              <a:spcAft>
+                <a:spcPts val="300"/>
+              </a:spcAft>
+              <a:buNone/>
+            </a:pPr>
+            <a:r>
+              <a:rPr lang="en-US" sz="1200" dirty="0">
+                <a:solidFill>
+                  <a:srgbClr val="1C2833"/>
+                </a:solidFill>
+                <a:latin typeface="Arial" pitchFamily="34" charset="0"/>
+                <a:ea typeface="Arial" pitchFamily="34" charset="-122"/>
+                <a:cs typeface="Arial" pitchFamily="34" charset="-120"/>
+              </a:rPr>
+              <a:t> — is the </a:t>
+            </a:r>
+            <a:pPr algn="l" indent="0" marL="0">
+              <a:lnSpc>
+                <a:spcPts val="1620"/>
+              </a:lnSpc>
               <a:spcAft>
                 <a:spcPts val="300"/>
               </a:spcAft>
@@ -6444,15 +9914,12 @@
                 <a:ea typeface="Arial" pitchFamily="34" charset="-122"/>
                 <a:cs typeface="Arial" pitchFamily="34" charset="-120"/>
               </a:rPr>
-              <a:t> and</a:t>
-            </a:r>
-            <a:pPr algn="l" indent="0" marL="0">
-              <a:lnSpc>
-                <a:spcPts val="1680"/>
-              </a:lnSpc>
-              <a:spcBef>
-                <a:spcPts val="300"/>
-              </a:spcBef>
+              <a:t>kṛṣṇa pakṣa</a:t>
+            </a:r>
+            <a:pPr algn="l" indent="0" marL="0">
+              <a:lnSpc>
+                <a:spcPts val="1620"/>
+              </a:lnSpc>
               <a:spcAft>
                 <a:spcPts val="300"/>
               </a:spcAft>
@@ -6467,53 +9934,7 @@
                 <a:ea typeface="Arial" pitchFamily="34" charset="-122"/>
                 <a:cs typeface="Arial" pitchFamily="34" charset="-120"/>
               </a:rPr>
-              <a:t>pūrṇimā</a:t>
-            </a:r>
-            <a:pPr algn="l" indent="0" marL="0">
-              <a:lnSpc>
-                <a:spcPts val="1680"/>
-              </a:lnSpc>
-              <a:spcBef>
-                <a:spcPts val="300"/>
-              </a:spcBef>
-              <a:spcAft>
-                <a:spcPts val="300"/>
-              </a:spcAft>
-              <a:buNone/>
-            </a:pPr>
-            <a:r>
-              <a:rPr lang="en-US" sz="1200" i="1" dirty="0">
-                <a:solidFill>
-                  <a:srgbClr val="1C2833"/>
-                </a:solidFill>
-                <a:latin typeface="Arial" pitchFamily="34" charset="0"/>
-                <a:ea typeface="Arial" pitchFamily="34" charset="-122"/>
-                <a:cs typeface="Arial" pitchFamily="34" charset="-120"/>
-              </a:rPr>
-              <a:t> and the two pakṣa names</a:t>
-            </a:r>
-            <a:pPr algn="l" indent="0" marL="0">
-              <a:lnSpc>
-                <a:spcPts val="1680"/>
-              </a:lnSpc>
-              <a:spcBef>
-                <a:spcPts val="300"/>
-              </a:spcBef>
-              <a:spcAft>
-                <a:spcPts val="300"/>
-              </a:spcAft>
-              <a:buNone/>
-            </a:pPr>
-            <a:r>
-              <a:rPr lang="en-US" sz="1200" dirty="0">
-                <a:solidFill>
-                  <a:srgbClr val="1C2833"/>
-                </a:solidFill>
-                <a:latin typeface="Arial" pitchFamily="34" charset="0"/>
-                <a:ea typeface="Arial" pitchFamily="34" charset="-122"/>
-                <a:cs typeface="Arial" pitchFamily="34" charset="-120"/>
-              </a:rPr>
-              <a:t>*.</a:t>
+              <a:t> ("dark fortnight"). The visible lit fraction is decreasing each night.</a:t>
             </a:r>
             <a:endParaRPr lang="en-US" sz="1200" dirty="0"/>
           </a:p>
